--- a/presentation/휴게길_프로젝트1_발표_김수종.pptx
+++ b/presentation/휴게길_프로젝트1_발표_김수종.pptx
@@ -4,19 +4,21 @@
   <p:sldMasterIdLst>
     <p:sldMasterId id="2147483648" r:id="rId1"/>
   </p:sldMasterIdLst>
+  <p:notesMasterIdLst>
+    <p:notesMasterId r:id="rId11"/>
+  </p:notesMasterIdLst>
   <p:sldIdLst>
-    <p:sldId id="256" r:id="rId7"/>
-    <p:sldId id="257" r:id="rId9"/>
-    <p:sldId id="258" r:id="rId10"/>
-    <p:sldId id="259" r:id="rId11"/>
-    <p:sldId id="260" r:id="rId12"/>
-    <p:sldId id="261" r:id="rId13"/>
-    <p:sldId id="262" r:id="rId14"/>
-    <p:sldId id="263" r:id="rId15"/>
-    <p:sldId id="264" r:id="rId16"/>
-    <p:sldId id="265" r:id="rId17"/>
+    <p:sldId id="256" r:id="rId2"/>
+    <p:sldId id="257" r:id="rId3"/>
+    <p:sldId id="258" r:id="rId4"/>
+    <p:sldId id="259" r:id="rId5"/>
+    <p:sldId id="260" r:id="rId6"/>
+    <p:sldId id="261" r:id="rId7"/>
+    <p:sldId id="262" r:id="rId8"/>
+    <p:sldId id="263" r:id="rId9"/>
+    <p:sldId id="264" r:id="rId10"/>
   </p:sldIdLst>
-  <p:sldSz cx="12191695" cy="6858000" type="screen4x3"/>
+  <p:sldSz cx="12192000" cy="6858000"/>
   <p:notesSz cx="6858000" cy="9144000"/>
   <p:defaultTextStyle>
     <a:defPPr>
@@ -113,11 +115,273 @@
       </a:defRPr>
     </a:lvl9pPr>
   </p:defaultTextStyle>
+  <p:extLst>
+    <p:ext uri="{EFAFB233-063F-42B5-8137-9DF3F51BA10A}">
+      <p15:sldGuideLst xmlns:p15="http://schemas.microsoft.com/office/powerpoint/2012/main">
+        <p15:guide id="1" orient="horz" pos="2160">
+          <p15:clr>
+            <a:srgbClr val="A4A3A4"/>
+          </p15:clr>
+        </p15:guide>
+        <p15:guide id="2" pos="2880">
+          <p15:clr>
+            <a:srgbClr val="A4A3A4"/>
+          </p15:clr>
+        </p15:guide>
+      </p15:sldGuideLst>
+    </p:ext>
+  </p:extLst>
 </p:presentation>
 </file>
 
+<file path=ppt/revisionInfo.xml><?xml version="1.0" encoding="utf-8"?>
+<p1510:revInfo xmlns:a="http://schemas.openxmlformats.org/drawingml/2006/main" xmlns:r="http://schemas.openxmlformats.org/officeDocument/2006/relationships" xmlns:p1510="http://schemas.microsoft.com/office/powerpoint/2015/10/main">
+  <p1510:revLst>
+    <p1510:client id="{286E605E-E8C8-41C9-B2DC-ADEE2D466992}" v="3" dt="2026-10-29T09:14:13.360"/>
+  </p1510:revLst>
+</p1510:revInfo>
+</file>
+
+<file path=ppt/changesInfos/changesInfo1.xml><?xml version="1.0" encoding="utf-8"?>
+<pc:chgInfo xmlns:a="http://schemas.openxmlformats.org/drawingml/2006/main" xmlns:r="http://schemas.openxmlformats.org/officeDocument/2006/relationships" xmlns:ac="http://schemas.microsoft.com/office/drawing/2013/main/command" xmlns:pc="http://schemas.microsoft.com/office/powerpoint/2013/main/command">
+  <pc:docChgLst>
+    <pc:chgData name="김수종" userId="73fcd19f-aa2f-44d4-bb03-678112fa212f" providerId="ADAL" clId="{40C1ED9D-FDD3-4ED6-9E9C-1DE19B4492EC}"/>
+    <pc:docChg chg="undo custSel delSld modSld sldOrd">
+      <pc:chgData name="김수종" userId="73fcd19f-aa2f-44d4-bb03-678112fa212f" providerId="ADAL" clId="{40C1ED9D-FDD3-4ED6-9E9C-1DE19B4492EC}" dt="2026-10-29T09:18:29.063" v="74" actId="2696"/>
+      <pc:docMkLst>
+        <pc:docMk/>
+      </pc:docMkLst>
+      <pc:sldChg chg="delSp modSp mod modNotesTx">
+        <pc:chgData name="김수종" userId="73fcd19f-aa2f-44d4-bb03-678112fa212f" providerId="ADAL" clId="{40C1ED9D-FDD3-4ED6-9E9C-1DE19B4492EC}" dt="2026-10-29T09:15:21.606" v="69" actId="20577"/>
+        <pc:sldMkLst>
+          <pc:docMk/>
+          <pc:sldMk cId="0" sldId="256"/>
+        </pc:sldMkLst>
+        <pc:spChg chg="mod">
+          <ac:chgData name="김수종" userId="73fcd19f-aa2f-44d4-bb03-678112fa212f" providerId="ADAL" clId="{40C1ED9D-FDD3-4ED6-9E9C-1DE19B4492EC}" dt="2026-10-29T09:13:26.175" v="44" actId="1076"/>
+          <ac:spMkLst>
+            <pc:docMk/>
+            <pc:sldMk cId="0" sldId="256"/>
+            <ac:spMk id="9" creationId="{00000000-0000-0000-0000-000000000000}"/>
+          </ac:spMkLst>
+        </pc:spChg>
+        <pc:spChg chg="mod">
+          <ac:chgData name="김수종" userId="73fcd19f-aa2f-44d4-bb03-678112fa212f" providerId="ADAL" clId="{40C1ED9D-FDD3-4ED6-9E9C-1DE19B4492EC}" dt="2026-10-29T09:13:44.697" v="52" actId="20577"/>
+          <ac:spMkLst>
+            <pc:docMk/>
+            <pc:sldMk cId="0" sldId="256"/>
+            <ac:spMk id="10" creationId="{00000000-0000-0000-0000-000000000000}"/>
+          </ac:spMkLst>
+        </pc:spChg>
+        <pc:picChg chg="mod">
+          <ac:chgData name="김수종" userId="73fcd19f-aa2f-44d4-bb03-678112fa212f" providerId="ADAL" clId="{40C1ED9D-FDD3-4ED6-9E9C-1DE19B4492EC}" dt="2026-10-29T09:13:23.766" v="43" actId="1076"/>
+          <ac:picMkLst>
+            <pc:docMk/>
+            <pc:sldMk cId="0" sldId="256"/>
+            <ac:picMk id="8" creationId="{00000000-0000-0000-0000-000000000000}"/>
+          </ac:picMkLst>
+        </pc:picChg>
+        <pc:picChg chg="del">
+          <ac:chgData name="김수종" userId="73fcd19f-aa2f-44d4-bb03-678112fa212f" providerId="ADAL" clId="{40C1ED9D-FDD3-4ED6-9E9C-1DE19B4492EC}" dt="2026-10-29T09:13:06.731" v="40" actId="478"/>
+          <ac:picMkLst>
+            <pc:docMk/>
+            <pc:sldMk cId="0" sldId="256"/>
+            <ac:picMk id="11" creationId="{00000000-0000-0000-0000-000000000000}"/>
+          </ac:picMkLst>
+        </pc:picChg>
+      </pc:sldChg>
+      <pc:sldChg chg="modNotesTx">
+        <pc:chgData name="김수종" userId="73fcd19f-aa2f-44d4-bb03-678112fa212f" providerId="ADAL" clId="{40C1ED9D-FDD3-4ED6-9E9C-1DE19B4492EC}" dt="2026-10-29T09:15:24.644" v="71" actId="20577"/>
+        <pc:sldMkLst>
+          <pc:docMk/>
+          <pc:sldMk cId="0" sldId="257"/>
+        </pc:sldMkLst>
+      </pc:sldChg>
+      <pc:sldChg chg="modNotesTx">
+        <pc:chgData name="김수종" userId="73fcd19f-aa2f-44d4-bb03-678112fa212f" providerId="ADAL" clId="{40C1ED9D-FDD3-4ED6-9E9C-1DE19B4492EC}" dt="2026-10-29T09:15:29.601" v="72" actId="20577"/>
+        <pc:sldMkLst>
+          <pc:docMk/>
+          <pc:sldMk cId="0" sldId="258"/>
+        </pc:sldMkLst>
+      </pc:sldChg>
+      <pc:sldChg chg="modNotesTx">
+        <pc:chgData name="김수종" userId="73fcd19f-aa2f-44d4-bb03-678112fa212f" providerId="ADAL" clId="{40C1ED9D-FDD3-4ED6-9E9C-1DE19B4492EC}" dt="2026-10-29T09:15:32.001" v="73" actId="20577"/>
+        <pc:sldMkLst>
+          <pc:docMk/>
+          <pc:sldMk cId="0" sldId="259"/>
+        </pc:sldMkLst>
+      </pc:sldChg>
+      <pc:sldChg chg="addSp delSp modSp mod">
+        <pc:chgData name="김수종" userId="73fcd19f-aa2f-44d4-bb03-678112fa212f" providerId="ADAL" clId="{40C1ED9D-FDD3-4ED6-9E9C-1DE19B4492EC}" dt="2026-10-29T09:12:37.440" v="39" actId="1076"/>
+        <pc:sldMkLst>
+          <pc:docMk/>
+          <pc:sldMk cId="0" sldId="261"/>
+        </pc:sldMkLst>
+        <pc:spChg chg="mod">
+          <ac:chgData name="김수종" userId="73fcd19f-aa2f-44d4-bb03-678112fa212f" providerId="ADAL" clId="{40C1ED9D-FDD3-4ED6-9E9C-1DE19B4492EC}" dt="2026-10-29T09:09:59.933" v="16" actId="1076"/>
+          <ac:spMkLst>
+            <pc:docMk/>
+            <pc:sldMk cId="0" sldId="261"/>
+            <ac:spMk id="7" creationId="{00000000-0000-0000-0000-000000000000}"/>
+          </ac:spMkLst>
+        </pc:spChg>
+        <pc:spChg chg="del">
+          <ac:chgData name="김수종" userId="73fcd19f-aa2f-44d4-bb03-678112fa212f" providerId="ADAL" clId="{40C1ED9D-FDD3-4ED6-9E9C-1DE19B4492EC}" dt="2026-10-29T09:09:36.797" v="1" actId="478"/>
+          <ac:spMkLst>
+            <pc:docMk/>
+            <pc:sldMk cId="0" sldId="261"/>
+            <ac:spMk id="8" creationId="{00000000-0000-0000-0000-000000000000}"/>
+          </ac:spMkLst>
+        </pc:spChg>
+        <pc:spChg chg="del">
+          <ac:chgData name="김수종" userId="73fcd19f-aa2f-44d4-bb03-678112fa212f" providerId="ADAL" clId="{40C1ED9D-FDD3-4ED6-9E9C-1DE19B4492EC}" dt="2026-10-29T09:09:36.797" v="1" actId="478"/>
+          <ac:spMkLst>
+            <pc:docMk/>
+            <pc:sldMk cId="0" sldId="261"/>
+            <ac:spMk id="9" creationId="{00000000-0000-0000-0000-000000000000}"/>
+          </ac:spMkLst>
+        </pc:spChg>
+        <pc:spChg chg="del">
+          <ac:chgData name="김수종" userId="73fcd19f-aa2f-44d4-bb03-678112fa212f" providerId="ADAL" clId="{40C1ED9D-FDD3-4ED6-9E9C-1DE19B4492EC}" dt="2026-10-29T09:09:36.797" v="1" actId="478"/>
+          <ac:spMkLst>
+            <pc:docMk/>
+            <pc:sldMk cId="0" sldId="261"/>
+            <ac:spMk id="10" creationId="{00000000-0000-0000-0000-000000000000}"/>
+          </ac:spMkLst>
+        </pc:spChg>
+        <pc:spChg chg="del">
+          <ac:chgData name="김수종" userId="73fcd19f-aa2f-44d4-bb03-678112fa212f" providerId="ADAL" clId="{40C1ED9D-FDD3-4ED6-9E9C-1DE19B4492EC}" dt="2026-10-29T09:09:36.797" v="1" actId="478"/>
+          <ac:spMkLst>
+            <pc:docMk/>
+            <pc:sldMk cId="0" sldId="261"/>
+            <ac:spMk id="11" creationId="{00000000-0000-0000-0000-000000000000}"/>
+          </ac:spMkLst>
+        </pc:spChg>
+        <pc:spChg chg="del">
+          <ac:chgData name="김수종" userId="73fcd19f-aa2f-44d4-bb03-678112fa212f" providerId="ADAL" clId="{40C1ED9D-FDD3-4ED6-9E9C-1DE19B4492EC}" dt="2026-10-29T09:09:36.797" v="1" actId="478"/>
+          <ac:spMkLst>
+            <pc:docMk/>
+            <pc:sldMk cId="0" sldId="261"/>
+            <ac:spMk id="12" creationId="{00000000-0000-0000-0000-000000000000}"/>
+          </ac:spMkLst>
+        </pc:spChg>
+        <pc:spChg chg="del">
+          <ac:chgData name="김수종" userId="73fcd19f-aa2f-44d4-bb03-678112fa212f" providerId="ADAL" clId="{40C1ED9D-FDD3-4ED6-9E9C-1DE19B4492EC}" dt="2026-10-29T09:09:36.797" v="1" actId="478"/>
+          <ac:spMkLst>
+            <pc:docMk/>
+            <pc:sldMk cId="0" sldId="261"/>
+            <ac:spMk id="13" creationId="{00000000-0000-0000-0000-000000000000}"/>
+          </ac:spMkLst>
+        </pc:spChg>
+        <pc:spChg chg="mod">
+          <ac:chgData name="김수종" userId="73fcd19f-aa2f-44d4-bb03-678112fa212f" providerId="ADAL" clId="{40C1ED9D-FDD3-4ED6-9E9C-1DE19B4492EC}" dt="2026-10-29T09:12:37.440" v="39" actId="1076"/>
+          <ac:spMkLst>
+            <pc:docMk/>
+            <pc:sldMk cId="0" sldId="261"/>
+            <ac:spMk id="14" creationId="{00000000-0000-0000-0000-000000000000}"/>
+          </ac:spMkLst>
+        </pc:spChg>
+        <pc:picChg chg="del mod">
+          <ac:chgData name="김수종" userId="73fcd19f-aa2f-44d4-bb03-678112fa212f" providerId="ADAL" clId="{40C1ED9D-FDD3-4ED6-9E9C-1DE19B4492EC}" dt="2026-10-29T09:10:21.531" v="25" actId="478"/>
+          <ac:picMkLst>
+            <pc:docMk/>
+            <pc:sldMk cId="0" sldId="261"/>
+            <ac:picMk id="15" creationId="{00000000-0000-0000-0000-000000000000}"/>
+          </ac:picMkLst>
+        </pc:picChg>
+        <pc:picChg chg="mod">
+          <ac:chgData name="김수종" userId="73fcd19f-aa2f-44d4-bb03-678112fa212f" providerId="ADAL" clId="{40C1ED9D-FDD3-4ED6-9E9C-1DE19B4492EC}" dt="2026-10-29T09:12:30.837" v="36" actId="1076"/>
+          <ac:picMkLst>
+            <pc:docMk/>
+            <pc:sldMk cId="0" sldId="261"/>
+            <ac:picMk id="16" creationId="{00000000-0000-0000-0000-000000000000}"/>
+          </ac:picMkLst>
+        </pc:picChg>
+        <pc:picChg chg="add mod">
+          <ac:chgData name="김수종" userId="73fcd19f-aa2f-44d4-bb03-678112fa212f" providerId="ADAL" clId="{40C1ED9D-FDD3-4ED6-9E9C-1DE19B4492EC}" dt="2026-10-29T09:10:02.286" v="18" actId="14100"/>
+          <ac:picMkLst>
+            <pc:docMk/>
+            <pc:sldMk cId="0" sldId="261"/>
+            <ac:picMk id="17" creationId="{BC106D33-8F3F-3615-354D-43C2A01C9539}"/>
+          </ac:picMkLst>
+        </pc:picChg>
+        <pc:picChg chg="add mod">
+          <ac:chgData name="김수종" userId="73fcd19f-aa2f-44d4-bb03-678112fa212f" providerId="ADAL" clId="{40C1ED9D-FDD3-4ED6-9E9C-1DE19B4492EC}" dt="2026-10-29T09:12:31.832" v="37" actId="1076"/>
+          <ac:picMkLst>
+            <pc:docMk/>
+            <pc:sldMk cId="0" sldId="261"/>
+            <ac:picMk id="19" creationId="{C6ED0841-08D7-9320-8740-2A189AAAF7FA}"/>
+          </ac:picMkLst>
+        </pc:picChg>
+      </pc:sldChg>
+      <pc:sldChg chg="modSp mod">
+        <pc:chgData name="김수종" userId="73fcd19f-aa2f-44d4-bb03-678112fa212f" providerId="ADAL" clId="{40C1ED9D-FDD3-4ED6-9E9C-1DE19B4492EC}" dt="2026-10-29T09:14:33.516" v="62" actId="1076"/>
+        <pc:sldMkLst>
+          <pc:docMk/>
+          <pc:sldMk cId="0" sldId="262"/>
+        </pc:sldMkLst>
+        <pc:spChg chg="mod">
+          <ac:chgData name="김수종" userId="73fcd19f-aa2f-44d4-bb03-678112fa212f" providerId="ADAL" clId="{40C1ED9D-FDD3-4ED6-9E9C-1DE19B4492EC}" dt="2026-10-29T09:14:33.516" v="62" actId="1076"/>
+          <ac:spMkLst>
+            <pc:docMk/>
+            <pc:sldMk cId="0" sldId="262"/>
+            <ac:spMk id="9" creationId="{00000000-0000-0000-0000-000000000000}"/>
+          </ac:spMkLst>
+        </pc:spChg>
+        <pc:spChg chg="mod">
+          <ac:chgData name="김수종" userId="73fcd19f-aa2f-44d4-bb03-678112fa212f" providerId="ADAL" clId="{40C1ED9D-FDD3-4ED6-9E9C-1DE19B4492EC}" dt="2026-10-29T09:14:33.516" v="62" actId="1076"/>
+          <ac:spMkLst>
+            <pc:docMk/>
+            <pc:sldMk cId="0" sldId="262"/>
+            <ac:spMk id="10" creationId="{00000000-0000-0000-0000-000000000000}"/>
+          </ac:spMkLst>
+        </pc:spChg>
+      </pc:sldChg>
+      <pc:sldChg chg="delSp modSp mod ord">
+        <pc:chgData name="김수종" userId="73fcd19f-aa2f-44d4-bb03-678112fa212f" providerId="ADAL" clId="{40C1ED9D-FDD3-4ED6-9E9C-1DE19B4492EC}" dt="2026-10-29T09:14:55.775" v="68" actId="478"/>
+        <pc:sldMkLst>
+          <pc:docMk/>
+          <pc:sldMk cId="0" sldId="263"/>
+        </pc:sldMkLst>
+        <pc:spChg chg="del">
+          <ac:chgData name="김수종" userId="73fcd19f-aa2f-44d4-bb03-678112fa212f" providerId="ADAL" clId="{40C1ED9D-FDD3-4ED6-9E9C-1DE19B4492EC}" dt="2026-10-29T09:14:54.290" v="67" actId="478"/>
+          <ac:spMkLst>
+            <pc:docMk/>
+            <pc:sldMk cId="0" sldId="263"/>
+            <ac:spMk id="21" creationId="{00000000-0000-0000-0000-000000000000}"/>
+          </ac:spMkLst>
+        </pc:spChg>
+        <pc:spChg chg="del mod">
+          <ac:chgData name="김수종" userId="73fcd19f-aa2f-44d4-bb03-678112fa212f" providerId="ADAL" clId="{40C1ED9D-FDD3-4ED6-9E9C-1DE19B4492EC}" dt="2026-10-29T09:14:55.775" v="68" actId="478"/>
+          <ac:spMkLst>
+            <pc:docMk/>
+            <pc:sldMk cId="0" sldId="263"/>
+            <ac:spMk id="22" creationId="{00000000-0000-0000-0000-000000000000}"/>
+          </ac:spMkLst>
+        </pc:spChg>
+        <pc:spChg chg="del mod">
+          <ac:chgData name="김수종" userId="73fcd19f-aa2f-44d4-bb03-678112fa212f" providerId="ADAL" clId="{40C1ED9D-FDD3-4ED6-9E9C-1DE19B4492EC}" dt="2026-10-29T09:14:52.558" v="65" actId="478"/>
+          <ac:spMkLst>
+            <pc:docMk/>
+            <pc:sldMk cId="0" sldId="263"/>
+            <ac:spMk id="23" creationId="{00000000-0000-0000-0000-000000000000}"/>
+          </ac:spMkLst>
+        </pc:spChg>
+      </pc:sldChg>
+      <pc:sldChg chg="del">
+        <pc:chgData name="김수종" userId="73fcd19f-aa2f-44d4-bb03-678112fa212f" providerId="ADAL" clId="{40C1ED9D-FDD3-4ED6-9E9C-1DE19B4492EC}" dt="2026-10-29T09:18:29.063" v="74" actId="2696"/>
+        <pc:sldMkLst>
+          <pc:docMk/>
+          <pc:sldMk cId="0" sldId="265"/>
+        </pc:sldMkLst>
+      </pc:sldChg>
+    </pc:docChg>
+  </pc:docChgLst>
+</pc:chgInfo>
+</file>
+
 <file path=ppt/notesMasters/notesMaster1.xml><?xml version="1.0" encoding="utf-8"?>
-<p:notesMaster xmlns:a="http://schemas.openxmlformats.org/drawingml/2006/main" xmlns:p="http://schemas.openxmlformats.org/presentationml/2006/main" xmlns:r="http://schemas.openxmlformats.org/officeDocument/2006/relationships">
+<p:notesMaster xmlns:a="http://schemas.openxmlformats.org/drawingml/2006/main" xmlns:r="http://schemas.openxmlformats.org/officeDocument/2006/relationships" xmlns:p="http://schemas.openxmlformats.org/presentationml/2006/main">
   <p:cSld>
     <p:bg>
       <p:bgRef idx="1001">
@@ -138,241 +402,16 @@
           <a:chExt cx="0" cy="0"/>
         </a:xfrm>
       </p:grpSpPr>
-      <p:sp>
-        <p:nvSpPr>
-          <p:cNvPr id="2" name="Header Placeholder 1"/>
-          <p:cNvSpPr>
-            <a:spLocks noGrp="1"/>
-          </p:cNvSpPr>
-          <p:nvPr>
-            <p:ph type="hdr" sz="quarter"/>
-          </p:nvPr>
-        </p:nvSpPr>
-        <p:spPr>
-          <a:xfrm>
-            <a:off x="0" y="0"/>
-            <a:ext cx="2971800" cy="457200"/>
-          </a:xfrm>
-          <a:prstGeom prst="rect">
-            <a:avLst/>
-          </a:prstGeom>
-        </p:spPr>
-        <p:txBody>
-          <a:bodyPr vert="horz" lIns="91440" tIns="45720" rIns="91440" bIns="45720" rtlCol="0"/>
-          <a:lstStyle>
-            <a:lvl1pPr algn="l">
-              <a:defRPr sz="1200"/>
-            </a:lvl1pPr>
-          </a:lstStyle>
-          <a:p>
-            <a:endParaRPr lang="en-US"/>
-          </a:p>
-        </p:txBody>
-      </p:sp>
-      <p:sp>
-        <p:nvSpPr>
-          <p:cNvPr id="3" name="Date Placeholder 2"/>
-          <p:cNvSpPr>
-            <a:spLocks noGrp="1"/>
-          </p:cNvSpPr>
-          <p:nvPr>
-            <p:ph type="dt" idx="1"/>
-          </p:nvPr>
-        </p:nvSpPr>
-        <p:spPr>
-          <a:xfrm>
-            <a:off x="3884613" y="0"/>
-            <a:ext cx="2971800" cy="457200"/>
-          </a:xfrm>
-          <a:prstGeom prst="rect">
-            <a:avLst/>
-          </a:prstGeom>
-        </p:spPr>
-        <p:txBody>
-          <a:bodyPr vert="horz" lIns="91440" tIns="45720" rIns="91440" bIns="45720" rtlCol="0"/>
-          <a:lstStyle>
-            <a:lvl1pPr algn="r">
-              <a:defRPr sz="1200"/>
-            </a:lvl1pPr>
-          </a:lstStyle>
-          <a:p>
-            <a:fld id="{0F89C1C7-3DCD-1040-A9CF-14679D8B5DDD}" type="datetimeFigureOut">
-              <a:rPr lang="en-US" smtClean="0"/>
-              <a:t>10/17/16</a:t>
-            </a:fld>
-            <a:endParaRPr lang="en-US"/>
-          </a:p>
-        </p:txBody>
-      </p:sp>
-      <p:sp>
-        <p:nvSpPr>
-          <p:cNvPr id="4" name="Slide Image Placeholder 3"/>
-          <p:cNvSpPr>
-            <a:spLocks noGrp="1" noRot="1" noChangeAspect="1"/>
-          </p:cNvSpPr>
-          <p:nvPr>
-            <p:ph type="sldImg" idx="2"/>
-          </p:nvPr>
-        </p:nvSpPr>
-        <p:spPr>
-          <a:xfrm>
-            <a:off x="1143000" y="685800"/>
-            <a:ext cx="4572000" cy="3429000"/>
-          </a:xfrm>
-          <a:prstGeom prst="rect">
-            <a:avLst/>
-          </a:prstGeom>
-          <a:noFill/>
-          <a:ln w="12700">
-            <a:solidFill>
-              <a:prstClr val="black"/>
-            </a:solidFill>
-          </a:ln>
-        </p:spPr>
-        <p:txBody>
-          <a:bodyPr vert="horz" lIns="91440" tIns="45720" rIns="91440" bIns="45720" rtlCol="0" anchor="ctr"/>
-          <a:lstStyle/>
-          <a:p>
-            <a:endParaRPr lang="en-US"/>
-          </a:p>
-        </p:txBody>
-      </p:sp>
-      <p:sp>
-        <p:nvSpPr>
-          <p:cNvPr id="5" name="Notes Placeholder 4"/>
-          <p:cNvSpPr>
-            <a:spLocks noGrp="1"/>
-          </p:cNvSpPr>
-          <p:nvPr>
-            <p:ph type="body" sz="quarter" idx="3"/>
-          </p:nvPr>
-        </p:nvSpPr>
-        <p:spPr>
-          <a:xfrm>
-            <a:off x="685800" y="4343400"/>
-            <a:ext cx="5486400" cy="4114800"/>
-          </a:xfrm>
-          <a:prstGeom prst="rect">
-            <a:avLst/>
-          </a:prstGeom>
-        </p:spPr>
-        <p:txBody>
-          <a:bodyPr vert="horz" lIns="91440" tIns="45720" rIns="91440" bIns="45720" rtlCol="0"/>
-          <a:lstStyle/>
-          <a:p>
-            <a:pPr lvl="0"/>
-            <a:r>
-              <a:rPr lang="en-US" smtClean="0"/>
-              <a:t>Click to edit Master text styles</a:t>
-            </a:r>
-          </a:p>
-          <a:p>
-            <a:pPr lvl="1"/>
-            <a:r>
-              <a:rPr lang="en-US" smtClean="0"/>
-              <a:t>Second level</a:t>
-            </a:r>
-          </a:p>
-          <a:p>
-            <a:pPr lvl="2"/>
-            <a:r>
-              <a:rPr lang="en-US" smtClean="0"/>
-              <a:t>Third level</a:t>
-            </a:r>
-          </a:p>
-          <a:p>
-            <a:pPr lvl="3"/>
-            <a:r>
-              <a:rPr lang="en-US" smtClean="0"/>
-              <a:t>Fourth level</a:t>
-            </a:r>
-          </a:p>
-          <a:p>
-            <a:pPr lvl="4"/>
-            <a:r>
-              <a:rPr lang="en-US" smtClean="0"/>
-              <a:t>Fifth level</a:t>
-            </a:r>
-            <a:endParaRPr lang="en-US"/>
-          </a:p>
-        </p:txBody>
-      </p:sp>
-      <p:sp>
-        <p:nvSpPr>
-          <p:cNvPr id="6" name="Footer Placeholder 5"/>
-          <p:cNvSpPr>
-            <a:spLocks noGrp="1"/>
-          </p:cNvSpPr>
-          <p:nvPr>
-            <p:ph type="ftr" sz="quarter" idx="4"/>
-          </p:nvPr>
-        </p:nvSpPr>
-        <p:spPr>
-          <a:xfrm>
-            <a:off x="0" y="8685213"/>
-            <a:ext cx="2971800" cy="457200"/>
-          </a:xfrm>
-          <a:prstGeom prst="rect">
-            <a:avLst/>
-          </a:prstGeom>
-        </p:spPr>
-        <p:txBody>
-          <a:bodyPr vert="horz" lIns="91440" tIns="45720" rIns="91440" bIns="45720" rtlCol="0" anchor="b"/>
-          <a:lstStyle>
-            <a:lvl1pPr algn="l">
-              <a:defRPr sz="1200"/>
-            </a:lvl1pPr>
-          </a:lstStyle>
-          <a:p>
-            <a:endParaRPr lang="en-US"/>
-          </a:p>
-        </p:txBody>
-      </p:sp>
-      <p:sp>
-        <p:nvSpPr>
-          <p:cNvPr id="7" name="Slide Number Placeholder 6"/>
-          <p:cNvSpPr>
-            <a:spLocks noGrp="1"/>
-          </p:cNvSpPr>
-          <p:nvPr>
-            <p:ph type="sldNum" sz="quarter" idx="5"/>
-          </p:nvPr>
-        </p:nvSpPr>
-        <p:spPr>
-          <a:xfrm>
-            <a:off x="3884613" y="8685213"/>
-            <a:ext cx="2971800" cy="457200"/>
-          </a:xfrm>
-          <a:prstGeom prst="rect">
-            <a:avLst/>
-          </a:prstGeom>
-        </p:spPr>
-        <p:txBody>
-          <a:bodyPr vert="horz" lIns="91440" tIns="45720" rIns="91440" bIns="45720" rtlCol="0" anchor="b"/>
-          <a:lstStyle>
-            <a:lvl1pPr algn="r">
-              <a:defRPr sz="1200"/>
-            </a:lvl1pPr>
-          </a:lstStyle>
-          <a:p>
-            <a:fld id="{BB5E49A5-4136-284D-997B-48E1D791AD67}" type="slidenum">
-              <a:rPr lang="en-US" smtClean="0"/>
-              <a:t>‹#›</a:t>
-            </a:fld>
-            <a:endParaRPr lang="en-US"/>
-          </a:p>
-        </p:txBody>
-      </p:sp>
     </p:spTree>
     <p:extLst>
       <p:ext uri="{BB962C8B-B14F-4D97-AF65-F5344CB8AC3E}">
-        <p14:creationId xmlns:p14="http://schemas.microsoft.com/office/powerpoint/2010/main" val="2623252185"/>
+        <p14:creationId xmlns:p14="http://schemas.microsoft.com/office/powerpoint/2010/main" val="2431464764"/>
       </p:ext>
     </p:extLst>
   </p:cSld>
   <p:clrMap bg1="lt1" tx1="dk1" bg2="lt2" tx2="dk2" accent1="accent1" accent2="accent2" accent3="accent3" accent4="accent4" accent5="accent5" accent6="accent6" hlink="hlink" folHlink="folHlink"/>
   <p:notesStyle>
-    <a:lvl1pPr marL="0" algn="l" defTabSz="457200" rtl="0" eaLnBrk="1" latinLnBrk="0" hangingPunct="1">
+    <a:lvl1pPr marL="0" algn="l" defTabSz="914400" rtl="0" eaLnBrk="1" latinLnBrk="1" hangingPunct="1">
       <a:defRPr sz="1200" kern="1200">
         <a:solidFill>
           <a:schemeClr val="tx1"/>
@@ -382,7 +421,7 @@
         <a:cs typeface="+mn-cs"/>
       </a:defRPr>
     </a:lvl1pPr>
-    <a:lvl2pPr marL="457200" algn="l" defTabSz="457200" rtl="0" eaLnBrk="1" latinLnBrk="0" hangingPunct="1">
+    <a:lvl2pPr marL="457200" algn="l" defTabSz="914400" rtl="0" eaLnBrk="1" latinLnBrk="1" hangingPunct="1">
       <a:defRPr sz="1200" kern="1200">
         <a:solidFill>
           <a:schemeClr val="tx1"/>
@@ -392,7 +431,7 @@
         <a:cs typeface="+mn-cs"/>
       </a:defRPr>
     </a:lvl2pPr>
-    <a:lvl3pPr marL="914400" algn="l" defTabSz="457200" rtl="0" eaLnBrk="1" latinLnBrk="0" hangingPunct="1">
+    <a:lvl3pPr marL="914400" algn="l" defTabSz="914400" rtl="0" eaLnBrk="1" latinLnBrk="1" hangingPunct="1">
       <a:defRPr sz="1200" kern="1200">
         <a:solidFill>
           <a:schemeClr val="tx1"/>
@@ -402,7 +441,7 @@
         <a:cs typeface="+mn-cs"/>
       </a:defRPr>
     </a:lvl3pPr>
-    <a:lvl4pPr marL="1371600" algn="l" defTabSz="457200" rtl="0" eaLnBrk="1" latinLnBrk="0" hangingPunct="1">
+    <a:lvl4pPr marL="1371600" algn="l" defTabSz="914400" rtl="0" eaLnBrk="1" latinLnBrk="1" hangingPunct="1">
       <a:defRPr sz="1200" kern="1200">
         <a:solidFill>
           <a:schemeClr val="tx1"/>
@@ -412,7 +451,7 @@
         <a:cs typeface="+mn-cs"/>
       </a:defRPr>
     </a:lvl4pPr>
-    <a:lvl5pPr marL="1828800" algn="l" defTabSz="457200" rtl="0" eaLnBrk="1" latinLnBrk="0" hangingPunct="1">
+    <a:lvl5pPr marL="1828800" algn="l" defTabSz="914400" rtl="0" eaLnBrk="1" latinLnBrk="1" hangingPunct="1">
       <a:defRPr sz="1200" kern="1200">
         <a:solidFill>
           <a:schemeClr val="tx1"/>
@@ -422,7 +461,7 @@
         <a:cs typeface="+mn-cs"/>
       </a:defRPr>
     </a:lvl5pPr>
-    <a:lvl6pPr marL="2286000" algn="l" defTabSz="457200" rtl="0" eaLnBrk="1" latinLnBrk="0" hangingPunct="1">
+    <a:lvl6pPr marL="2286000" algn="l" defTabSz="914400" rtl="0" eaLnBrk="1" latinLnBrk="1" hangingPunct="1">
       <a:defRPr sz="1200" kern="1200">
         <a:solidFill>
           <a:schemeClr val="tx1"/>
@@ -432,7 +471,7 @@
         <a:cs typeface="+mn-cs"/>
       </a:defRPr>
     </a:lvl6pPr>
-    <a:lvl7pPr marL="2743200" algn="l" defTabSz="457200" rtl="0" eaLnBrk="1" latinLnBrk="0" hangingPunct="1">
+    <a:lvl7pPr marL="2743200" algn="l" defTabSz="914400" rtl="0" eaLnBrk="1" latinLnBrk="1" hangingPunct="1">
       <a:defRPr sz="1200" kern="1200">
         <a:solidFill>
           <a:schemeClr val="tx1"/>
@@ -442,7 +481,7 @@
         <a:cs typeface="+mn-cs"/>
       </a:defRPr>
     </a:lvl7pPr>
-    <a:lvl8pPr marL="3200400" algn="l" defTabSz="457200" rtl="0" eaLnBrk="1" latinLnBrk="0" hangingPunct="1">
+    <a:lvl8pPr marL="3200400" algn="l" defTabSz="914400" rtl="0" eaLnBrk="1" latinLnBrk="1" hangingPunct="1">
       <a:defRPr sz="1200" kern="1200">
         <a:solidFill>
           <a:schemeClr val="tx1"/>
@@ -452,7 +491,7 @@
         <a:cs typeface="+mn-cs"/>
       </a:defRPr>
     </a:lvl8pPr>
-    <a:lvl9pPr marL="3657600" algn="l" defTabSz="457200" rtl="0" eaLnBrk="1" latinLnBrk="0" hangingPunct="1">
+    <a:lvl9pPr marL="3657600" algn="l" defTabSz="914400" rtl="0" eaLnBrk="1" latinLnBrk="1" hangingPunct="1">
       <a:defRPr sz="1200" kern="1200">
         <a:solidFill>
           <a:schemeClr val="tx1"/>
@@ -467,7 +506,7 @@
 </file>
 
 <file path=ppt/notesSlides/notesSlide1.xml><?xml version="1.0" encoding="utf-8"?>
-<p:notes xmlns:a="http://schemas.openxmlformats.org/drawingml/2006/main" xmlns:p="http://schemas.openxmlformats.org/presentationml/2006/main" xmlns:r="http://schemas.openxmlformats.org/officeDocument/2006/relationships">
+<p:notes xmlns:a="http://schemas.openxmlformats.org/drawingml/2006/main" xmlns:r="http://schemas.openxmlformats.org/officeDocument/2006/relationships" xmlns:p="http://schemas.openxmlformats.org/presentationml/2006/main">
   <p:cSld>
     <p:spTree>
       <p:nvGrpSpPr>
@@ -487,7 +526,7 @@
         <p:nvSpPr>
           <p:cNvPr id="2" name="Slide Image Placeholder 1"/>
           <p:cNvSpPr>
-            <a:spLocks noGrp="1"/>
+            <a:spLocks noGrp="1" noRot="1" noChangeAspect="1"/>
           </p:cNvSpPr>
           <p:nvPr>
             <p:ph type="sldImg" idx="2"/>
@@ -502,7 +541,7 @@
             <a:spLocks noGrp="1"/>
           </p:cNvSpPr>
           <p:nvPr>
-            <p:ph type="body" idx="3" sz="quarter"/>
+            <p:ph type="body" sz="quarter" idx="3"/>
           </p:nvPr>
         </p:nvSpPr>
         <p:spPr/>
@@ -510,9 +549,7 @@
           <a:bodyPr/>
           <a:lstStyle/>
           <a:p>
-            <a:r>
-              <a:t>[15초] 안녕하세요. 김수종입니다. 휴게길은 이동 경로에 맞춰 휴게소와 졸음쉼터를 찾고, 음식과 시설을 비교하는 공공데이터 기반 웹사이트입니다.</a:t>
-            </a:r>
+            <a:endParaRPr dirty="0"/>
           </a:p>
         </p:txBody>
       </p:sp>
@@ -523,7 +560,7 @@
             <a:spLocks noGrp="1"/>
           </p:cNvSpPr>
           <p:nvPr>
-            <p:ph type="sldNum" idx="5" sz="quarter"/>
+            <p:ph type="sldNum" sz="quarter" idx="5"/>
           </p:nvPr>
         </p:nvSpPr>
         <p:spPr/>
@@ -536,8 +573,8 @@
 </p:notes>
 </file>
 
-<file path=ppt/notesSlides/notesSlide10.xml><?xml version="1.0" encoding="utf-8"?>
-<p:notes xmlns:a="http://schemas.openxmlformats.org/drawingml/2006/main" xmlns:p="http://schemas.openxmlformats.org/presentationml/2006/main" xmlns:r="http://schemas.openxmlformats.org/officeDocument/2006/relationships">
+<file path=ppt/notesSlides/notesSlide2.xml><?xml version="1.0" encoding="utf-8"?>
+<p:notes xmlns:a="http://schemas.openxmlformats.org/drawingml/2006/main" xmlns:r="http://schemas.openxmlformats.org/officeDocument/2006/relationships" xmlns:p="http://schemas.openxmlformats.org/presentationml/2006/main">
   <p:cSld>
     <p:spTree>
       <p:nvGrpSpPr>
@@ -557,7 +594,7 @@
         <p:nvSpPr>
           <p:cNvPr id="2" name="Slide Image Placeholder 1"/>
           <p:cNvSpPr>
-            <a:spLocks noGrp="1"/>
+            <a:spLocks noGrp="1" noRot="1" noChangeAspect="1"/>
           </p:cNvSpPr>
           <p:nvPr>
             <p:ph type="sldImg" idx="2"/>
@@ -572,7 +609,7 @@
             <a:spLocks noGrp="1"/>
           </p:cNvSpPr>
           <p:nvPr>
-            <p:ph type="body" idx="3" sz="quarter"/>
+            <p:ph type="body" sz="quarter" idx="3"/>
           </p:nvPr>
         </p:nvSpPr>
         <p:spPr/>
@@ -580,9 +617,7 @@
           <a:bodyPr/>
           <a:lstStyle/>
           <a:p>
-            <a:r>
-              <a:t>[20초] 휴게길은 공공데이터를 이동 경로라는 맥락으로 연결해, 어디에서 쉴지 선택하는 과정을 돕습니다. 들어주셔서 감사합니다. 질문 받겠습니다. 발표 총 예상 시간 9분 50초이며 시연 2분 30초를 포함합니다.</a:t>
-            </a:r>
+            <a:endParaRPr dirty="0"/>
           </a:p>
         </p:txBody>
       </p:sp>
@@ -593,7 +628,7 @@
             <a:spLocks noGrp="1"/>
           </p:cNvSpPr>
           <p:nvPr>
-            <p:ph type="sldNum" idx="5" sz="quarter"/>
+            <p:ph type="sldNum" sz="quarter" idx="5"/>
           </p:nvPr>
         </p:nvSpPr>
         <p:spPr/>
@@ -606,8 +641,8 @@
 </p:notes>
 </file>
 
-<file path=ppt/notesSlides/notesSlide2.xml><?xml version="1.0" encoding="utf-8"?>
-<p:notes xmlns:a="http://schemas.openxmlformats.org/drawingml/2006/main" xmlns:p="http://schemas.openxmlformats.org/presentationml/2006/main" xmlns:r="http://schemas.openxmlformats.org/officeDocument/2006/relationships">
+<file path=ppt/notesSlides/notesSlide3.xml><?xml version="1.0" encoding="utf-8"?>
+<p:notes xmlns:a="http://schemas.openxmlformats.org/drawingml/2006/main" xmlns:r="http://schemas.openxmlformats.org/officeDocument/2006/relationships" xmlns:p="http://schemas.openxmlformats.org/presentationml/2006/main">
   <p:cSld>
     <p:spTree>
       <p:nvGrpSpPr>
@@ -627,7 +662,7 @@
         <p:nvSpPr>
           <p:cNvPr id="2" name="Slide Image Placeholder 1"/>
           <p:cNvSpPr>
-            <a:spLocks noGrp="1"/>
+            <a:spLocks noGrp="1" noRot="1" noChangeAspect="1"/>
           </p:cNvSpPr>
           <p:nvPr>
             <p:ph type="sldImg" idx="2"/>
@@ -642,7 +677,7 @@
             <a:spLocks noGrp="1"/>
           </p:cNvSpPr>
           <p:nvPr>
-            <p:ph type="body" idx="3" sz="quarter"/>
+            <p:ph type="body" sz="quarter" idx="3"/>
           </p:nvPr>
         </p:nvSpPr>
         <p:spPr/>
@@ -650,9 +685,7 @@
           <a:bodyPr/>
           <a:lstStyle/>
           <a:p>
-            <a:r>
-              <a:t>[40초] 휴게소는 반대 방향에 있으면 이용하기 어렵습니다. 음식, 입점 매장, 주차 정보를 여러 곳에서 찾는 번거로움도 있습니다. 경로와 방향을 중심으로 정보를 모으고, 같은 기준으로 비교하도록 설계했습니다.</a:t>
-            </a:r>
+            <a:endParaRPr dirty="0"/>
           </a:p>
         </p:txBody>
       </p:sp>
@@ -663,7 +696,7 @@
             <a:spLocks noGrp="1"/>
           </p:cNvSpPr>
           <p:nvPr>
-            <p:ph type="sldNum" idx="5" sz="quarter"/>
+            <p:ph type="sldNum" sz="quarter" idx="5"/>
           </p:nvPr>
         </p:nvSpPr>
         <p:spPr/>
@@ -676,8 +709,8 @@
 </p:notes>
 </file>
 
-<file path=ppt/notesSlides/notesSlide3.xml><?xml version="1.0" encoding="utf-8"?>
-<p:notes xmlns:a="http://schemas.openxmlformats.org/drawingml/2006/main" xmlns:p="http://schemas.openxmlformats.org/presentationml/2006/main" xmlns:r="http://schemas.openxmlformats.org/officeDocument/2006/relationships">
+<file path=ppt/notesSlides/notesSlide4.xml><?xml version="1.0" encoding="utf-8"?>
+<p:notes xmlns:a="http://schemas.openxmlformats.org/drawingml/2006/main" xmlns:r="http://schemas.openxmlformats.org/officeDocument/2006/relationships" xmlns:p="http://schemas.openxmlformats.org/presentationml/2006/main">
   <p:cSld>
     <p:spTree>
       <p:nvGrpSpPr>
@@ -697,7 +730,7 @@
         <p:nvSpPr>
           <p:cNvPr id="2" name="Slide Image Placeholder 1"/>
           <p:cNvSpPr>
-            <a:spLocks noGrp="1"/>
+            <a:spLocks noGrp="1" noRot="1" noChangeAspect="1"/>
           </p:cNvSpPr>
           <p:nvPr>
             <p:ph type="sldImg" idx="2"/>
@@ -712,7 +745,7 @@
             <a:spLocks noGrp="1"/>
           </p:cNvSpPr>
           <p:nvPr>
-            <p:ph type="body" idx="3" sz="quarter"/>
+            <p:ph type="body" sz="quarter" idx="3"/>
           </p:nvPr>
         </p:nvSpPr>
         <p:spPr/>
@@ -720,9 +753,7 @@
           <a:bodyPr/>
           <a:lstStyle/>
           <a:p>
-            <a:r>
-              <a:t>[45초] 한국도로공사 기준정보, 메뉴, 브랜드 자료와 공공데이터포털의 졸음쉼터, 주차장, 과거 이용량을 연결했습니다. 10월 28일 실제 조회 결과입니다. 카카오 API는 지도 표시, 장소 검색과 자동차 경로에 사용합니다. 주차는 빈자리 수가 아닌 공식 주차면 수입니다. 출처: data.ex.co.kr/openapi, data.go.kr/data/15043710/fileData.do, data.go.kr/data/15043716/fileData.do, data.go.kr/data/15118977/fileData.do, developers.kakao.com, developers.kakaomobility.com.</a:t>
-            </a:r>
+            <a:endParaRPr dirty="0"/>
           </a:p>
         </p:txBody>
       </p:sp>
@@ -733,7 +764,7 @@
             <a:spLocks noGrp="1"/>
           </p:cNvSpPr>
           <p:nvPr>
-            <p:ph type="sldNum" idx="5" sz="quarter"/>
+            <p:ph type="sldNum" sz="quarter" idx="5"/>
           </p:nvPr>
         </p:nvSpPr>
         <p:spPr/>
@@ -746,8 +777,8 @@
 </p:notes>
 </file>
 
-<file path=ppt/notesSlides/notesSlide4.xml><?xml version="1.0" encoding="utf-8"?>
-<p:notes xmlns:a="http://schemas.openxmlformats.org/drawingml/2006/main" xmlns:p="http://schemas.openxmlformats.org/presentationml/2006/main" xmlns:r="http://schemas.openxmlformats.org/officeDocument/2006/relationships">
+<file path=ppt/notesSlides/notesSlide5.xml><?xml version="1.0" encoding="utf-8"?>
+<p:notes xmlns:a="http://schemas.openxmlformats.org/drawingml/2006/main" xmlns:r="http://schemas.openxmlformats.org/officeDocument/2006/relationships" xmlns:p="http://schemas.openxmlformats.org/presentationml/2006/main">
   <p:cSld>
     <p:spTree>
       <p:nvGrpSpPr>
@@ -767,7 +798,7 @@
         <p:nvSpPr>
           <p:cNvPr id="2" name="Slide Image Placeholder 1"/>
           <p:cNvSpPr>
-            <a:spLocks noGrp="1"/>
+            <a:spLocks noGrp="1" noRot="1" noChangeAspect="1"/>
           </p:cNvSpPr>
           <p:nvPr>
             <p:ph type="sldImg" idx="2"/>
@@ -782,7 +813,7 @@
             <a:spLocks noGrp="1"/>
           </p:cNvSpPr>
           <p:nvPr>
-            <p:ph type="body" idx="3" sz="quarter"/>
+            <p:ph type="body" sz="quarter" idx="3"/>
           </p:nvPr>
         </p:nvSpPr>
         <p:spPr/>
@@ -791,7 +822,7 @@
           <a:lstStyle/>
           <a:p>
             <a:r>
-              <a:t>[50초] 첫째 출발지와 도착지를 검색하면 경로와 관련 고속도로, 해당 방향의 휴게소와 졸음쉼터를 확인합니다. 둘째 상세창에서 음식, 브랜드, 시설, 위치를 확인합니다. 셋째 비교할 휴게소를 담아 같은 음식의 저렴한 쪽과 주차 규모 등을 비교합니다. 방향은 경로와 자료에 기반한 판정이며 실제 진입 가능성을 보증하지는 않습니다.</a:t>
+              <a:t>[45초] 이 프로젝트의 AI 활용은 Codex를 통한 개발 보조입니다. 사용자 입력을 받아 AI가 추천하는 런타임 기능은 구현하지 않았습니다. 실제 요구사항을 전달해 코드와 UI를 수정하고, 실제 API 응답과 테스트로 확인했습니다. 분류 기준이 모호했던 음식 분류는 제거했고, 없는 데이터는 만들어내지 않고 확인 불가로 표시했습니다. 평가표의 사용자 대상 AI 기능은 향후 개선 과제입니다.</a:t>
             </a:r>
           </a:p>
         </p:txBody>
@@ -803,7 +834,7 @@
             <a:spLocks noGrp="1"/>
           </p:cNvSpPr>
           <p:nvPr>
-            <p:ph type="sldNum" idx="5" sz="quarter"/>
+            <p:ph type="sldNum" sz="quarter" idx="5"/>
           </p:nvPr>
         </p:nvSpPr>
         <p:spPr/>
@@ -816,8 +847,8 @@
 </p:notes>
 </file>
 
-<file path=ppt/notesSlides/notesSlide5.xml><?xml version="1.0" encoding="utf-8"?>
-<p:notes xmlns:a="http://schemas.openxmlformats.org/drawingml/2006/main" xmlns:p="http://schemas.openxmlformats.org/presentationml/2006/main" xmlns:r="http://schemas.openxmlformats.org/officeDocument/2006/relationships">
+<file path=ppt/notesSlides/notesSlide6.xml><?xml version="1.0" encoding="utf-8"?>
+<p:notes xmlns:a="http://schemas.openxmlformats.org/drawingml/2006/main" xmlns:r="http://schemas.openxmlformats.org/officeDocument/2006/relationships" xmlns:p="http://schemas.openxmlformats.org/presentationml/2006/main">
   <p:cSld>
     <p:spTree>
       <p:nvGrpSpPr>
@@ -837,7 +868,7 @@
         <p:nvSpPr>
           <p:cNvPr id="2" name="Slide Image Placeholder 1"/>
           <p:cNvSpPr>
-            <a:spLocks noGrp="1"/>
+            <a:spLocks noGrp="1" noRot="1" noChangeAspect="1"/>
           </p:cNvSpPr>
           <p:nvPr>
             <p:ph type="sldImg" idx="2"/>
@@ -852,7 +883,7 @@
             <a:spLocks noGrp="1"/>
           </p:cNvSpPr>
           <p:nvPr>
-            <p:ph type="body" idx="3" sz="quarter"/>
+            <p:ph type="body" sz="quarter" idx="3"/>
           </p:nvPr>
         </p:nvSpPr>
         <p:spPr/>
@@ -861,7 +892,7 @@
           <a:lstStyle/>
           <a:p>
             <a:r>
-              <a:t>[45초] 이 프로젝트의 AI 활용은 Codex를 통한 개발 보조입니다. 사용자 입력을 받아 AI가 추천하는 런타임 기능은 구현하지 않았습니다. 실제 요구사항을 전달해 코드와 UI를 수정하고, 실제 API 응답과 테스트로 확인했습니다. 분류 기준이 모호했던 음식 분류는 제거했고, 없는 데이터는 만들어내지 않고 확인 불가로 표시했습니다. 평가표의 사용자 대상 AI 기능은 향후 개선 과제입니다.</a:t>
+              <a:t>[40초] 왼쪽은 초기 구조를 설명하기 위해 재구성한 와이어프레임입니다. 원본 초기 산출물은 아닙니다. 오른쪽은 현재 앱 화면입니다. 긴 정보를 탭으로 나누고 브랜드 로고, 운영 상태, 기준일을 보여줍니다. 화면 폭이 줄어들면 카드가 자연스럽게 재배치됩니다. 로딩과 오류 상태도 별도로 안내합니다.</a:t>
             </a:r>
           </a:p>
         </p:txBody>
@@ -873,7 +904,7 @@
             <a:spLocks noGrp="1"/>
           </p:cNvSpPr>
           <p:nvPr>
-            <p:ph type="sldNum" idx="5" sz="quarter"/>
+            <p:ph type="sldNum" sz="quarter" idx="5"/>
           </p:nvPr>
         </p:nvSpPr>
         <p:spPr/>
@@ -886,8 +917,8 @@
 </p:notes>
 </file>
 
-<file path=ppt/notesSlides/notesSlide6.xml><?xml version="1.0" encoding="utf-8"?>
-<p:notes xmlns:a="http://schemas.openxmlformats.org/drawingml/2006/main" xmlns:p="http://schemas.openxmlformats.org/presentationml/2006/main" xmlns:r="http://schemas.openxmlformats.org/officeDocument/2006/relationships">
+<file path=ppt/notesSlides/notesSlide7.xml><?xml version="1.0" encoding="utf-8"?>
+<p:notes xmlns:a="http://schemas.openxmlformats.org/drawingml/2006/main" xmlns:r="http://schemas.openxmlformats.org/officeDocument/2006/relationships" xmlns:p="http://schemas.openxmlformats.org/presentationml/2006/main">
   <p:cSld>
     <p:spTree>
       <p:nvGrpSpPr>
@@ -907,7 +938,7 @@
         <p:nvSpPr>
           <p:cNvPr id="2" name="Slide Image Placeholder 1"/>
           <p:cNvSpPr>
-            <a:spLocks noGrp="1"/>
+            <a:spLocks noGrp="1" noRot="1" noChangeAspect="1"/>
           </p:cNvSpPr>
           <p:nvPr>
             <p:ph type="sldImg" idx="2"/>
@@ -922,7 +953,7 @@
             <a:spLocks noGrp="1"/>
           </p:cNvSpPr>
           <p:nvPr>
-            <p:ph type="body" idx="3" sz="quarter"/>
+            <p:ph type="body" sz="quarter" idx="3"/>
           </p:nvPr>
         </p:nvSpPr>
         <p:spPr/>
@@ -931,7 +962,7 @@
           <a:lstStyle/>
           <a:p>
             <a:r>
-              <a:t>[40초] 왼쪽은 초기 구조를 설명하기 위해 재구성한 와이어프레임입니다. 원본 초기 산출물은 아닙니다. 오른쪽은 현재 앱 화면입니다. 긴 정보를 탭으로 나누고 브랜드 로고, 운영 상태, 기준일을 보여줍니다. 화면 폭이 줄어들면 카드가 자연스럽게 재배치됩니다. 로딩과 오류 상태도 별도로 안내합니다.</a:t>
+              <a:t>[150초] 발표 전 배포 URL을 이 슬라이드에 입력하고 실제 접속을 확인하세요. 시연 1: 출발지 서울만남의광장휴게소와 도착지 안성시청을 검색해 장소를 선택한 뒤 경로를 찾습니다(50초). 시연 2: 휴게소 상세에서 메뉴, 브랜드 운영시간, 주차와 지도 확인(40초). 시연 3: 두 휴게소를 비교해 같은 음식 가격과 주차면 수 확인(40초). 시연 4: 졸음쉼터 위치 확인 및 처음 화면으로 복귀(20초). 장애 시 이 자료의 실제 화면 캡처로 설명합니다. 배포 URL은 미전달 상태이며 현재 배포 여부를 검증하지 않았습니다.</a:t>
             </a:r>
           </a:p>
         </p:txBody>
@@ -943,7 +974,7 @@
             <a:spLocks noGrp="1"/>
           </p:cNvSpPr>
           <p:nvPr>
-            <p:ph type="sldNum" idx="5" sz="quarter"/>
+            <p:ph type="sldNum" sz="quarter" idx="5"/>
           </p:nvPr>
         </p:nvSpPr>
         <p:spPr/>
@@ -956,8 +987,8 @@
 </p:notes>
 </file>
 
-<file path=ppt/notesSlides/notesSlide7.xml><?xml version="1.0" encoding="utf-8"?>
-<p:notes xmlns:a="http://schemas.openxmlformats.org/drawingml/2006/main" xmlns:p="http://schemas.openxmlformats.org/presentationml/2006/main" xmlns:r="http://schemas.openxmlformats.org/officeDocument/2006/relationships">
+<file path=ppt/notesSlides/notesSlide8.xml><?xml version="1.0" encoding="utf-8"?>
+<p:notes xmlns:a="http://schemas.openxmlformats.org/drawingml/2006/main" xmlns:r="http://schemas.openxmlformats.org/officeDocument/2006/relationships" xmlns:p="http://schemas.openxmlformats.org/presentationml/2006/main">
   <p:cSld>
     <p:spTree>
       <p:nvGrpSpPr>
@@ -977,7 +1008,7 @@
         <p:nvSpPr>
           <p:cNvPr id="2" name="Slide Image Placeholder 1"/>
           <p:cNvSpPr>
-            <a:spLocks noGrp="1"/>
+            <a:spLocks noGrp="1" noRot="1" noChangeAspect="1"/>
           </p:cNvSpPr>
           <p:nvPr>
             <p:ph type="sldImg" idx="2"/>
@@ -992,7 +1023,7 @@
             <a:spLocks noGrp="1"/>
           </p:cNvSpPr>
           <p:nvPr>
-            <p:ph type="body" idx="3" sz="quarter"/>
+            <p:ph type="body" sz="quarter" idx="3"/>
           </p:nvPr>
         </p:nvSpPr>
         <p:spPr/>
@@ -1001,7 +1032,7 @@
           <a:lstStyle/>
           <a:p>
             <a:r>
-              <a:t>[150초] 발표 전 배포 URL을 이 슬라이드에 입력하고 실제 접속을 확인하세요. 시연 1: 출발지 서울만남의광장휴게소와 도착지 안성시청을 검색해 장소를 선택한 뒤 경로를 찾습니다(50초). 시연 2: 휴게소 상세에서 메뉴, 브랜드 운영시간, 주차와 지도 확인(40초). 시연 3: 두 휴게소를 비교해 같은 음식 가격과 주차면 수 확인(40초). 시연 4: 졸음쉼터 위치 확인 및 처음 화면으로 복귀(20초). 장애 시 이 자료의 실제 화면 캡처로 설명합니다. 배포 URL은 미전달 상태이며 현재 배포 여부를 검증하지 않았습니다.</a:t>
+              <a:t>[45초] 프런트엔드는 React 19와 Vite 7, 백엔드는 Node.js 기반 API 중계 서버입니다. 서버에서 한국도로공사, 공공데이터포털, 카카오 REST API를 호출하며 REST 인증키는 서버 환경변수로 관리합니다. 지도 JavaScript 키는 도메인 설정이 필요합니다. 좌표 캐시, 요청 병렬화와 로딩 상태로 초기 표시를 개선했습니다. 이 슬라이드의 배포 완료는 사용자 요청에 따른 배포 후 발표용 문구입니다. 실제 공개 URL 전달과 접속 검증은 아직 필요합니다. 실제 완료 전에는 발표에서 완료 사실로 말하지 마세요.</a:t>
             </a:r>
           </a:p>
         </p:txBody>
@@ -1013,7 +1044,7 @@
             <a:spLocks noGrp="1"/>
           </p:cNvSpPr>
           <p:nvPr>
-            <p:ph type="sldNum" idx="5" sz="quarter"/>
+            <p:ph type="sldNum" sz="quarter" idx="5"/>
           </p:nvPr>
         </p:nvSpPr>
         <p:spPr/>
@@ -1026,8 +1057,8 @@
 </p:notes>
 </file>
 
-<file path=ppt/notesSlides/notesSlide8.xml><?xml version="1.0" encoding="utf-8"?>
-<p:notes xmlns:a="http://schemas.openxmlformats.org/drawingml/2006/main" xmlns:p="http://schemas.openxmlformats.org/presentationml/2006/main" xmlns:r="http://schemas.openxmlformats.org/officeDocument/2006/relationships">
+<file path=ppt/notesSlides/notesSlide9.xml><?xml version="1.0" encoding="utf-8"?>
+<p:notes xmlns:a="http://schemas.openxmlformats.org/drawingml/2006/main" xmlns:r="http://schemas.openxmlformats.org/officeDocument/2006/relationships" xmlns:p="http://schemas.openxmlformats.org/presentationml/2006/main">
   <p:cSld>
     <p:spTree>
       <p:nvGrpSpPr>
@@ -1047,7 +1078,7 @@
         <p:nvSpPr>
           <p:cNvPr id="2" name="Slide Image Placeholder 1"/>
           <p:cNvSpPr>
-            <a:spLocks noGrp="1"/>
+            <a:spLocks noGrp="1" noRot="1" noChangeAspect="1"/>
           </p:cNvSpPr>
           <p:nvPr>
             <p:ph type="sldImg" idx="2"/>
@@ -1062,7 +1093,7 @@
             <a:spLocks noGrp="1"/>
           </p:cNvSpPr>
           <p:nvPr>
-            <p:ph type="body" idx="3" sz="quarter"/>
+            <p:ph type="body" sz="quarter" idx="3"/>
           </p:nvPr>
         </p:nvSpPr>
         <p:spPr/>
@@ -1071,7 +1102,7 @@
           <a:lstStyle/>
           <a:p>
             <a:r>
-              <a:t>[45초] 프런트엔드는 React 19와 Vite 7, 백엔드는 Node.js 기반 API 중계 서버입니다. 서버에서 한국도로공사, 공공데이터포털, 카카오 REST API를 호출하며 REST 인증키는 서버 환경변수로 관리합니다. 지도 JavaScript 키는 도메인 설정이 필요합니다. 좌표 캐시, 요청 병렬화와 로딩 상태로 초기 표시를 개선했습니다. 이 슬라이드의 배포 완료는 사용자 요청에 따른 배포 후 발표용 문구입니다. 실제 공개 URL 전달과 접속 검증은 아직 필요합니다. 실제 완료 전에는 발표에서 완료 사실로 말하지 마세요.</a:t>
+              <a:t>[40초] 핵심 가치는 방문할 장소를 결정하기 위한 정보를 한 흐름에 모았다는 점입니다. 같은 음식은 가격을 직접 비교하고, 주차는 등록 면수로 비교합니다. 자료가 없는 항목은 없음과 구분합니다. 주차 실시간 빈자리와 실제 영업 상태는 제공하지 못하며, 경로 인근 판정도 진입 가능성을 보장하지 않습니다. 사용자 대상 AI 기능, 방향 검증 보강과 실사용자 평가가 다음 과제입니다.</a:t>
             </a:r>
           </a:p>
         </p:txBody>
@@ -1083,77 +1114,7 @@
             <a:spLocks noGrp="1"/>
           </p:cNvSpPr>
           <p:nvPr>
-            <p:ph type="sldNum" idx="5" sz="quarter"/>
-          </p:nvPr>
-        </p:nvSpPr>
-        <p:spPr/>
-      </p:sp>
-    </p:spTree>
-  </p:cSld>
-  <p:clrMapOvr>
-    <a:masterClrMapping/>
-  </p:clrMapOvr>
-</p:notes>
-</file>
-
-<file path=ppt/notesSlides/notesSlide9.xml><?xml version="1.0" encoding="utf-8"?>
-<p:notes xmlns:a="http://schemas.openxmlformats.org/drawingml/2006/main" xmlns:p="http://schemas.openxmlformats.org/presentationml/2006/main" xmlns:r="http://schemas.openxmlformats.org/officeDocument/2006/relationships">
-  <p:cSld>
-    <p:spTree>
-      <p:nvGrpSpPr>
-        <p:cNvPr id="1" name=""/>
-        <p:cNvGrpSpPr/>
-        <p:nvPr/>
-      </p:nvGrpSpPr>
-      <p:grpSpPr>
-        <a:xfrm>
-          <a:off x="0" y="0"/>
-          <a:ext cx="0" cy="0"/>
-          <a:chOff x="0" y="0"/>
-          <a:chExt cx="0" cy="0"/>
-        </a:xfrm>
-      </p:grpSpPr>
-      <p:sp>
-        <p:nvSpPr>
-          <p:cNvPr id="2" name="Slide Image Placeholder 1"/>
-          <p:cNvSpPr>
-            <a:spLocks noGrp="1"/>
-          </p:cNvSpPr>
-          <p:nvPr>
-            <p:ph type="sldImg" idx="2"/>
-          </p:nvPr>
-        </p:nvSpPr>
-        <p:spPr/>
-      </p:sp>
-      <p:sp>
-        <p:nvSpPr>
-          <p:cNvPr id="3" name="Notes Placeholder 2"/>
-          <p:cNvSpPr>
-            <a:spLocks noGrp="1"/>
-          </p:cNvSpPr>
-          <p:nvPr>
-            <p:ph type="body" idx="3" sz="quarter"/>
-          </p:nvPr>
-        </p:nvSpPr>
-        <p:spPr/>
-        <p:txBody>
-          <a:bodyPr/>
-          <a:lstStyle/>
-          <a:p>
-            <a:r>
-              <a:t>[40초] 핵심 가치는 방문할 장소를 결정하기 위한 정보를 한 흐름에 모았다는 점입니다. 같은 음식은 가격을 직접 비교하고, 주차는 등록 면수로 비교합니다. 자료가 없는 항목은 없음과 구분합니다. 주차 실시간 빈자리와 실제 영업 상태는 제공하지 못하며, 경로 인근 판정도 진입 가능성을 보장하지 않습니다. 사용자 대상 AI 기능, 방향 검증 보강과 실사용자 평가가 다음 과제입니다.</a:t>
-            </a:r>
-          </a:p>
-        </p:txBody>
-      </p:sp>
-      <p:sp>
-        <p:nvSpPr>
-          <p:cNvPr id="4" name="Slide Number Placeholder 3"/>
-          <p:cNvSpPr>
-            <a:spLocks noGrp="1"/>
-          </p:cNvSpPr>
-          <p:nvPr>
-            <p:ph type="sldNum" idx="5" sz="quarter"/>
+            <p:ph type="sldNum" sz="quarter" idx="5"/>
           </p:nvPr>
         </p:nvSpPr>
         <p:spPr/>
@@ -1204,10 +1165,9 @@
           <a:lstStyle/>
           <a:p>
             <a:r>
-              <a:rPr lang="en-US" smtClean="0"/>
+              <a:rPr lang="en-US"/>
               <a:t>Click to edit Master title style</a:t>
             </a:r>
-            <a:endParaRPr lang="en-US"/>
           </a:p>
         </p:txBody>
       </p:sp>
@@ -1323,10 +1283,9 @@
           </a:lstStyle>
           <a:p>
             <a:r>
-              <a:rPr lang="en-US" smtClean="0"/>
+              <a:rPr lang="en-US"/>
               <a:t>Click to edit Master subtitle style</a:t>
             </a:r>
-            <a:endParaRPr lang="en-US"/>
           </a:p>
         </p:txBody>
       </p:sp>
@@ -1347,7 +1306,7 @@
           <a:p>
             <a:fld id="{5BCAD085-E8A6-8845-BD4E-CB4CCA059FC4}" type="datetimeFigureOut">
               <a:rPr lang="en-US" smtClean="0"/>
-              <a:t>1/27/13</a:t>
+              <a:t>10/28/2026</a:t>
             </a:fld>
             <a:endParaRPr lang="en-US"/>
           </a:p>
@@ -1441,10 +1400,9 @@
           <a:lstStyle/>
           <a:p>
             <a:r>
-              <a:rPr lang="en-US" smtClean="0"/>
+              <a:rPr lang="en-US"/>
               <a:t>Click to edit Master title style</a:t>
             </a:r>
-            <a:endParaRPr lang="en-US"/>
           </a:p>
         </p:txBody>
       </p:sp>
@@ -1465,38 +1423,37 @@
           <a:p>
             <a:pPr lvl="0"/>
             <a:r>
-              <a:rPr lang="en-US" smtClean="0"/>
+              <a:rPr lang="en-US"/>
               <a:t>Click to edit Master text styles</a:t>
             </a:r>
           </a:p>
           <a:p>
             <a:pPr lvl="1"/>
             <a:r>
-              <a:rPr lang="en-US" smtClean="0"/>
+              <a:rPr lang="en-US"/>
               <a:t>Second level</a:t>
             </a:r>
           </a:p>
           <a:p>
             <a:pPr lvl="2"/>
             <a:r>
-              <a:rPr lang="en-US" smtClean="0"/>
+              <a:rPr lang="en-US"/>
               <a:t>Third level</a:t>
             </a:r>
           </a:p>
           <a:p>
             <a:pPr lvl="3"/>
             <a:r>
-              <a:rPr lang="en-US" smtClean="0"/>
+              <a:rPr lang="en-US"/>
               <a:t>Fourth level</a:t>
             </a:r>
           </a:p>
           <a:p>
             <a:pPr lvl="4"/>
             <a:r>
-              <a:rPr lang="en-US" smtClean="0"/>
+              <a:rPr lang="en-US"/>
               <a:t>Fifth level</a:t>
             </a:r>
-            <a:endParaRPr lang="en-US"/>
           </a:p>
         </p:txBody>
       </p:sp>
@@ -1517,7 +1474,7 @@
           <a:p>
             <a:fld id="{5BCAD085-E8A6-8845-BD4E-CB4CCA059FC4}" type="datetimeFigureOut">
               <a:rPr lang="en-US" smtClean="0"/>
-              <a:t>1/27/13</a:t>
+              <a:t>10/28/2026</a:t>
             </a:fld>
             <a:endParaRPr lang="en-US"/>
           </a:p>
@@ -1616,10 +1573,9 @@
           <a:lstStyle/>
           <a:p>
             <a:r>
-              <a:rPr lang="en-US" smtClean="0"/>
+              <a:rPr lang="en-US"/>
               <a:t>Click to edit Master title style</a:t>
             </a:r>
-            <a:endParaRPr lang="en-US"/>
           </a:p>
         </p:txBody>
       </p:sp>
@@ -1645,38 +1601,37 @@
           <a:p>
             <a:pPr lvl="0"/>
             <a:r>
-              <a:rPr lang="en-US" smtClean="0"/>
+              <a:rPr lang="en-US"/>
               <a:t>Click to edit Master text styles</a:t>
             </a:r>
           </a:p>
           <a:p>
             <a:pPr lvl="1"/>
             <a:r>
-              <a:rPr lang="en-US" smtClean="0"/>
+              <a:rPr lang="en-US"/>
               <a:t>Second level</a:t>
             </a:r>
           </a:p>
           <a:p>
             <a:pPr lvl="2"/>
             <a:r>
-              <a:rPr lang="en-US" smtClean="0"/>
+              <a:rPr lang="en-US"/>
               <a:t>Third level</a:t>
             </a:r>
           </a:p>
           <a:p>
             <a:pPr lvl="3"/>
             <a:r>
-              <a:rPr lang="en-US" smtClean="0"/>
+              <a:rPr lang="en-US"/>
               <a:t>Fourth level</a:t>
             </a:r>
           </a:p>
           <a:p>
             <a:pPr lvl="4"/>
             <a:r>
-              <a:rPr lang="en-US" smtClean="0"/>
+              <a:rPr lang="en-US"/>
               <a:t>Fifth level</a:t>
             </a:r>
-            <a:endParaRPr lang="en-US"/>
           </a:p>
         </p:txBody>
       </p:sp>
@@ -1697,7 +1652,7 @@
           <a:p>
             <a:fld id="{5BCAD085-E8A6-8845-BD4E-CB4CCA059FC4}" type="datetimeFigureOut">
               <a:rPr lang="en-US" smtClean="0"/>
-              <a:t>1/27/13</a:t>
+              <a:t>10/28/2026</a:t>
             </a:fld>
             <a:endParaRPr lang="en-US"/>
           </a:p>
@@ -1791,10 +1746,9 @@
           <a:lstStyle/>
           <a:p>
             <a:r>
-              <a:rPr lang="en-US" smtClean="0"/>
+              <a:rPr lang="en-US"/>
               <a:t>Click to edit Master title style</a:t>
             </a:r>
-            <a:endParaRPr lang="en-US"/>
           </a:p>
         </p:txBody>
       </p:sp>
@@ -1815,38 +1769,37 @@
           <a:p>
             <a:pPr lvl="0"/>
             <a:r>
-              <a:rPr lang="en-US" smtClean="0"/>
+              <a:rPr lang="en-US"/>
               <a:t>Click to edit Master text styles</a:t>
             </a:r>
           </a:p>
           <a:p>
             <a:pPr lvl="1"/>
             <a:r>
-              <a:rPr lang="en-US" smtClean="0"/>
+              <a:rPr lang="en-US"/>
               <a:t>Second level</a:t>
             </a:r>
           </a:p>
           <a:p>
             <a:pPr lvl="2"/>
             <a:r>
-              <a:rPr lang="en-US" smtClean="0"/>
+              <a:rPr lang="en-US"/>
               <a:t>Third level</a:t>
             </a:r>
           </a:p>
           <a:p>
             <a:pPr lvl="3"/>
             <a:r>
-              <a:rPr lang="en-US" smtClean="0"/>
+              <a:rPr lang="en-US"/>
               <a:t>Fourth level</a:t>
             </a:r>
           </a:p>
           <a:p>
             <a:pPr lvl="4"/>
             <a:r>
-              <a:rPr lang="en-US" smtClean="0"/>
+              <a:rPr lang="en-US"/>
               <a:t>Fifth level</a:t>
             </a:r>
-            <a:endParaRPr lang="en-US"/>
           </a:p>
         </p:txBody>
       </p:sp>
@@ -1867,7 +1820,7 @@
           <a:p>
             <a:fld id="{5BCAD085-E8A6-8845-BD4E-CB4CCA059FC4}" type="datetimeFigureOut">
               <a:rPr lang="en-US" smtClean="0"/>
-              <a:t>1/27/13</a:t>
+              <a:t>10/28/2026</a:t>
             </a:fld>
             <a:endParaRPr lang="en-US"/>
           </a:p>
@@ -1970,10 +1923,9 @@
           </a:lstStyle>
           <a:p>
             <a:r>
-              <a:rPr lang="en-US" smtClean="0"/>
+              <a:rPr lang="en-US"/>
               <a:t>Click to edit Master title style</a:t>
             </a:r>
-            <a:endParaRPr lang="en-US"/>
           </a:p>
         </p:txBody>
       </p:sp>
@@ -2090,7 +2042,7 @@
           <a:p>
             <a:pPr lvl="0"/>
             <a:r>
-              <a:rPr lang="en-US" smtClean="0"/>
+              <a:rPr lang="en-US"/>
               <a:t>Click to edit Master text styles</a:t>
             </a:r>
           </a:p>
@@ -2113,7 +2065,7 @@
           <a:p>
             <a:fld id="{5BCAD085-E8A6-8845-BD4E-CB4CCA059FC4}" type="datetimeFigureOut">
               <a:rPr lang="en-US" smtClean="0"/>
-              <a:t>1/27/13</a:t>
+              <a:t>10/28/2026</a:t>
             </a:fld>
             <a:endParaRPr lang="en-US"/>
           </a:p>
@@ -2207,10 +2159,9 @@
           <a:lstStyle/>
           <a:p>
             <a:r>
-              <a:rPr lang="en-US" smtClean="0"/>
+              <a:rPr lang="en-US"/>
               <a:t>Click to edit Master title style</a:t>
             </a:r>
-            <a:endParaRPr lang="en-US"/>
           </a:p>
         </p:txBody>
       </p:sp>
@@ -2264,38 +2215,37 @@
           <a:p>
             <a:pPr lvl="0"/>
             <a:r>
-              <a:rPr lang="en-US" smtClean="0"/>
+              <a:rPr lang="en-US"/>
               <a:t>Click to edit Master text styles</a:t>
             </a:r>
           </a:p>
           <a:p>
             <a:pPr lvl="1"/>
             <a:r>
-              <a:rPr lang="en-US" smtClean="0"/>
+              <a:rPr lang="en-US"/>
               <a:t>Second level</a:t>
             </a:r>
           </a:p>
           <a:p>
             <a:pPr lvl="2"/>
             <a:r>
-              <a:rPr lang="en-US" smtClean="0"/>
+              <a:rPr lang="en-US"/>
               <a:t>Third level</a:t>
             </a:r>
           </a:p>
           <a:p>
             <a:pPr lvl="3"/>
             <a:r>
-              <a:rPr lang="en-US" smtClean="0"/>
+              <a:rPr lang="en-US"/>
               <a:t>Fourth level</a:t>
             </a:r>
           </a:p>
           <a:p>
             <a:pPr lvl="4"/>
             <a:r>
-              <a:rPr lang="en-US" smtClean="0"/>
+              <a:rPr lang="en-US"/>
               <a:t>Fifth level</a:t>
             </a:r>
-            <a:endParaRPr lang="en-US"/>
           </a:p>
         </p:txBody>
       </p:sp>
@@ -2349,38 +2299,37 @@
           <a:p>
             <a:pPr lvl="0"/>
             <a:r>
-              <a:rPr lang="en-US" smtClean="0"/>
+              <a:rPr lang="en-US"/>
               <a:t>Click to edit Master text styles</a:t>
             </a:r>
           </a:p>
           <a:p>
             <a:pPr lvl="1"/>
             <a:r>
-              <a:rPr lang="en-US" smtClean="0"/>
+              <a:rPr lang="en-US"/>
               <a:t>Second level</a:t>
             </a:r>
           </a:p>
           <a:p>
             <a:pPr lvl="2"/>
             <a:r>
-              <a:rPr lang="en-US" smtClean="0"/>
+              <a:rPr lang="en-US"/>
               <a:t>Third level</a:t>
             </a:r>
           </a:p>
           <a:p>
             <a:pPr lvl="3"/>
             <a:r>
-              <a:rPr lang="en-US" smtClean="0"/>
+              <a:rPr lang="en-US"/>
               <a:t>Fourth level</a:t>
             </a:r>
           </a:p>
           <a:p>
             <a:pPr lvl="4"/>
             <a:r>
-              <a:rPr lang="en-US" smtClean="0"/>
+              <a:rPr lang="en-US"/>
               <a:t>Fifth level</a:t>
             </a:r>
-            <a:endParaRPr lang="en-US"/>
           </a:p>
         </p:txBody>
       </p:sp>
@@ -2401,7 +2350,7 @@
           <a:p>
             <a:fld id="{5BCAD085-E8A6-8845-BD4E-CB4CCA059FC4}" type="datetimeFigureOut">
               <a:rPr lang="en-US" smtClean="0"/>
-              <a:t>1/27/13</a:t>
+              <a:t>10/28/2026</a:t>
             </a:fld>
             <a:endParaRPr lang="en-US"/>
           </a:p>
@@ -2499,10 +2448,9 @@
           </a:lstStyle>
           <a:p>
             <a:r>
-              <a:rPr lang="en-US" smtClean="0"/>
+              <a:rPr lang="en-US"/>
               <a:t>Click to edit Master title style</a:t>
             </a:r>
-            <a:endParaRPr lang="en-US"/>
           </a:p>
         </p:txBody>
       </p:sp>
@@ -2565,7 +2513,7 @@
           <a:p>
             <a:pPr lvl="0"/>
             <a:r>
-              <a:rPr lang="en-US" smtClean="0"/>
+              <a:rPr lang="en-US"/>
               <a:t>Click to edit Master text styles</a:t>
             </a:r>
           </a:p>
@@ -2621,38 +2569,37 @@
           <a:p>
             <a:pPr lvl="0"/>
             <a:r>
-              <a:rPr lang="en-US" smtClean="0"/>
+              <a:rPr lang="en-US"/>
               <a:t>Click to edit Master text styles</a:t>
             </a:r>
           </a:p>
           <a:p>
             <a:pPr lvl="1"/>
             <a:r>
-              <a:rPr lang="en-US" smtClean="0"/>
+              <a:rPr lang="en-US"/>
               <a:t>Second level</a:t>
             </a:r>
           </a:p>
           <a:p>
             <a:pPr lvl="2"/>
             <a:r>
-              <a:rPr lang="en-US" smtClean="0"/>
+              <a:rPr lang="en-US"/>
               <a:t>Third level</a:t>
             </a:r>
           </a:p>
           <a:p>
             <a:pPr lvl="3"/>
             <a:r>
-              <a:rPr lang="en-US" smtClean="0"/>
+              <a:rPr lang="en-US"/>
               <a:t>Fourth level</a:t>
             </a:r>
           </a:p>
           <a:p>
             <a:pPr lvl="4"/>
             <a:r>
-              <a:rPr lang="en-US" smtClean="0"/>
+              <a:rPr lang="en-US"/>
               <a:t>Fifth level</a:t>
             </a:r>
-            <a:endParaRPr lang="en-US"/>
           </a:p>
         </p:txBody>
       </p:sp>
@@ -2715,7 +2662,7 @@
           <a:p>
             <a:pPr lvl="0"/>
             <a:r>
-              <a:rPr lang="en-US" smtClean="0"/>
+              <a:rPr lang="en-US"/>
               <a:t>Click to edit Master text styles</a:t>
             </a:r>
           </a:p>
@@ -2771,38 +2718,37 @@
           <a:p>
             <a:pPr lvl="0"/>
             <a:r>
-              <a:rPr lang="en-US" smtClean="0"/>
+              <a:rPr lang="en-US"/>
               <a:t>Click to edit Master text styles</a:t>
             </a:r>
           </a:p>
           <a:p>
             <a:pPr lvl="1"/>
             <a:r>
-              <a:rPr lang="en-US" smtClean="0"/>
+              <a:rPr lang="en-US"/>
               <a:t>Second level</a:t>
             </a:r>
           </a:p>
           <a:p>
             <a:pPr lvl="2"/>
             <a:r>
-              <a:rPr lang="en-US" smtClean="0"/>
+              <a:rPr lang="en-US"/>
               <a:t>Third level</a:t>
             </a:r>
           </a:p>
           <a:p>
             <a:pPr lvl="3"/>
             <a:r>
-              <a:rPr lang="en-US" smtClean="0"/>
+              <a:rPr lang="en-US"/>
               <a:t>Fourth level</a:t>
             </a:r>
           </a:p>
           <a:p>
             <a:pPr lvl="4"/>
             <a:r>
-              <a:rPr lang="en-US" smtClean="0"/>
+              <a:rPr lang="en-US"/>
               <a:t>Fifth level</a:t>
             </a:r>
-            <a:endParaRPr lang="en-US"/>
           </a:p>
         </p:txBody>
       </p:sp>
@@ -2823,7 +2769,7 @@
           <a:p>
             <a:fld id="{5BCAD085-E8A6-8845-BD4E-CB4CCA059FC4}" type="datetimeFigureOut">
               <a:rPr lang="en-US" smtClean="0"/>
-              <a:t>1/27/13</a:t>
+              <a:t>10/28/2026</a:t>
             </a:fld>
             <a:endParaRPr lang="en-US"/>
           </a:p>
@@ -2917,10 +2863,9 @@
           <a:lstStyle/>
           <a:p>
             <a:r>
-              <a:rPr lang="en-US" smtClean="0"/>
+              <a:rPr lang="en-US"/>
               <a:t>Click to edit Master title style</a:t>
             </a:r>
-            <a:endParaRPr lang="en-US"/>
           </a:p>
         </p:txBody>
       </p:sp>
@@ -2941,7 +2886,7 @@
           <a:p>
             <a:fld id="{5BCAD085-E8A6-8845-BD4E-CB4CCA059FC4}" type="datetimeFigureOut">
               <a:rPr lang="en-US" smtClean="0"/>
-              <a:t>1/27/13</a:t>
+              <a:t>10/28/2026</a:t>
             </a:fld>
             <a:endParaRPr lang="en-US"/>
           </a:p>
@@ -3036,7 +2981,7 @@
           <a:p>
             <a:fld id="{5BCAD085-E8A6-8845-BD4E-CB4CCA059FC4}" type="datetimeFigureOut">
               <a:rPr lang="en-US" smtClean="0"/>
-              <a:t>1/27/13</a:t>
+              <a:t>10/28/2026</a:t>
             </a:fld>
             <a:endParaRPr lang="en-US"/>
           </a:p>
@@ -3139,10 +3084,9 @@
           </a:lstStyle>
           <a:p>
             <a:r>
-              <a:rPr lang="en-US" smtClean="0"/>
+              <a:rPr lang="en-US"/>
               <a:t>Click to edit Master title style</a:t>
             </a:r>
-            <a:endParaRPr lang="en-US"/>
           </a:p>
         </p:txBody>
       </p:sp>
@@ -3196,38 +3140,37 @@
           <a:p>
             <a:pPr lvl="0"/>
             <a:r>
-              <a:rPr lang="en-US" smtClean="0"/>
+              <a:rPr lang="en-US"/>
               <a:t>Click to edit Master text styles</a:t>
             </a:r>
           </a:p>
           <a:p>
             <a:pPr lvl="1"/>
             <a:r>
-              <a:rPr lang="en-US" smtClean="0"/>
+              <a:rPr lang="en-US"/>
               <a:t>Second level</a:t>
             </a:r>
           </a:p>
           <a:p>
             <a:pPr lvl="2"/>
             <a:r>
-              <a:rPr lang="en-US" smtClean="0"/>
+              <a:rPr lang="en-US"/>
               <a:t>Third level</a:t>
             </a:r>
           </a:p>
           <a:p>
             <a:pPr lvl="3"/>
             <a:r>
-              <a:rPr lang="en-US" smtClean="0"/>
+              <a:rPr lang="en-US"/>
               <a:t>Fourth level</a:t>
             </a:r>
           </a:p>
           <a:p>
             <a:pPr lvl="4"/>
             <a:r>
-              <a:rPr lang="en-US" smtClean="0"/>
+              <a:rPr lang="en-US"/>
               <a:t>Fifth level</a:t>
             </a:r>
-            <a:endParaRPr lang="en-US"/>
           </a:p>
         </p:txBody>
       </p:sp>
@@ -3290,7 +3233,7 @@
           <a:p>
             <a:pPr lvl="0"/>
             <a:r>
-              <a:rPr lang="en-US" smtClean="0"/>
+              <a:rPr lang="en-US"/>
               <a:t>Click to edit Master text styles</a:t>
             </a:r>
           </a:p>
@@ -3313,7 +3256,7 @@
           <a:p>
             <a:fld id="{5BCAD085-E8A6-8845-BD4E-CB4CCA059FC4}" type="datetimeFigureOut">
               <a:rPr lang="en-US" smtClean="0"/>
-              <a:t>1/27/13</a:t>
+              <a:t>10/28/2026</a:t>
             </a:fld>
             <a:endParaRPr lang="en-US"/>
           </a:p>
@@ -3416,10 +3359,9 @@
           </a:lstStyle>
           <a:p>
             <a:r>
-              <a:rPr lang="en-US" smtClean="0"/>
+              <a:rPr lang="en-US"/>
               <a:t>Click to edit Master title style</a:t>
             </a:r>
-            <a:endParaRPr lang="en-US"/>
           </a:p>
         </p:txBody>
       </p:sp>
@@ -3543,7 +3485,7 @@
           <a:p>
             <a:pPr lvl="0"/>
             <a:r>
-              <a:rPr lang="en-US" smtClean="0"/>
+              <a:rPr lang="en-US"/>
               <a:t>Click to edit Master text styles</a:t>
             </a:r>
           </a:p>
@@ -3566,7 +3508,7 @@
           <a:p>
             <a:fld id="{5BCAD085-E8A6-8845-BD4E-CB4CCA059FC4}" type="datetimeFigureOut">
               <a:rPr lang="en-US" smtClean="0"/>
-              <a:t>1/27/13</a:t>
+              <a:t>10/28/2026</a:t>
             </a:fld>
             <a:endParaRPr lang="en-US"/>
           </a:p>
@@ -3675,10 +3617,9 @@
           <a:lstStyle/>
           <a:p>
             <a:r>
-              <a:rPr lang="en-US" smtClean="0"/>
+              <a:rPr lang="en-US"/>
               <a:t>Click to edit Master title style</a:t>
             </a:r>
-            <a:endParaRPr lang="en-US"/>
           </a:p>
         </p:txBody>
       </p:sp>
@@ -3709,38 +3650,37 @@
           <a:p>
             <a:pPr lvl="0"/>
             <a:r>
-              <a:rPr lang="en-US" smtClean="0"/>
+              <a:rPr lang="en-US"/>
               <a:t>Click to edit Master text styles</a:t>
             </a:r>
           </a:p>
           <a:p>
             <a:pPr lvl="1"/>
             <a:r>
-              <a:rPr lang="en-US" smtClean="0"/>
+              <a:rPr lang="en-US"/>
               <a:t>Second level</a:t>
             </a:r>
           </a:p>
           <a:p>
             <a:pPr lvl="2"/>
             <a:r>
-              <a:rPr lang="en-US" smtClean="0"/>
+              <a:rPr lang="en-US"/>
               <a:t>Third level</a:t>
             </a:r>
           </a:p>
           <a:p>
             <a:pPr lvl="3"/>
             <a:r>
-              <a:rPr lang="en-US" smtClean="0"/>
+              <a:rPr lang="en-US"/>
               <a:t>Fourth level</a:t>
             </a:r>
           </a:p>
           <a:p>
             <a:pPr lvl="4"/>
             <a:r>
-              <a:rPr lang="en-US" smtClean="0"/>
+              <a:rPr lang="en-US"/>
               <a:t>Fifth level</a:t>
             </a:r>
-            <a:endParaRPr lang="en-US"/>
           </a:p>
         </p:txBody>
       </p:sp>
@@ -3779,7 +3719,7 @@
           <a:p>
             <a:fld id="{5BCAD085-E8A6-8845-BD4E-CB4CCA059FC4}" type="datetimeFigureOut">
               <a:rPr lang="en-US" smtClean="0"/>
-              <a:t>1/27/13</a:t>
+              <a:t>10/28/2026</a:t>
             </a:fld>
             <a:endParaRPr lang="en-US"/>
           </a:p>
@@ -4138,7 +4078,7 @@
 </file>
 
 <file path=ppt/slides/slide1.xml><?xml version="1.0" encoding="utf-8"?>
-<p:sld xmlns:a="http://schemas.openxmlformats.org/drawingml/2006/main" xmlns:p="http://schemas.openxmlformats.org/presentationml/2006/main" xmlns:r="http://schemas.openxmlformats.org/officeDocument/2006/relationships">
+<p:sld xmlns:a="http://schemas.openxmlformats.org/drawingml/2006/main" xmlns:r="http://schemas.openxmlformats.org/officeDocument/2006/relationships" xmlns:p="http://schemas.openxmlformats.org/presentationml/2006/main">
   <p:cSld>
     <p:bg>
       <p:bgPr>
@@ -4154,7 +4094,14 @@
         <p:cNvGrpSpPr/>
         <p:nvPr/>
       </p:nvGrpSpPr>
-      <p:grpSpPr/>
+      <p:grpSpPr>
+        <a:xfrm>
+          <a:off x="0" y="0"/>
+          <a:ext cx="0" cy="0"/>
+          <a:chOff x="0" y="0"/>
+          <a:chExt cx="0" cy="0"/>
+        </a:xfrm>
+      </p:grpSpPr>
       <p:sp>
         <p:nvSpPr>
           <p:cNvPr id="2" name="TextBox 1"/>
@@ -4172,7 +4119,7 @@
           <a:noFill/>
         </p:spPr>
         <p:txBody>
-          <a:bodyPr wrap="square" lIns="18288" rIns="18288" tIns="18288">
+          <a:bodyPr wrap="square" lIns="18288" tIns="18288" rIns="18288">
             <a:spAutoFit/>
           </a:bodyPr>
           <a:lstStyle/>
@@ -4211,7 +4158,7 @@
           <a:noFill/>
         </p:spPr>
         <p:txBody>
-          <a:bodyPr wrap="square" lIns="18288" rIns="18288" tIns="18288">
+          <a:bodyPr wrap="square" lIns="18288" tIns="18288" rIns="18288">
             <a:spAutoFit/>
           </a:bodyPr>
           <a:lstStyle/>
@@ -4273,6 +4220,7 @@
           <a:lstStyle/>
           <a:p>
             <a:pPr algn="ctr"/>
+            <a:endParaRPr/>
           </a:p>
         </p:txBody>
       </p:sp>
@@ -4293,7 +4241,7 @@
           <a:noFill/>
         </p:spPr>
         <p:txBody>
-          <a:bodyPr wrap="square" lIns="18288" rIns="18288" tIns="18288">
+          <a:bodyPr wrap="square" lIns="18288" tIns="18288" rIns="18288">
             <a:spAutoFit/>
           </a:bodyPr>
           <a:lstStyle/>
@@ -4332,7 +4280,7 @@
           <a:noFill/>
         </p:spPr>
         <p:txBody>
-          <a:bodyPr wrap="square" lIns="18288" rIns="18288" tIns="18288">
+          <a:bodyPr wrap="square" lIns="18288" tIns="18288" rIns="18288">
             <a:spAutoFit/>
           </a:bodyPr>
           <a:lstStyle/>
@@ -4394,6 +4342,7 @@
           <a:lstStyle/>
           <a:p>
             <a:pPr algn="ctr"/>
+            <a:endParaRPr/>
           </a:p>
         </p:txBody>
       </p:sp>
@@ -4413,8 +4362,8 @@
         </p:blipFill>
         <p:spPr>
           <a:xfrm>
-            <a:off x="822960" y="1965960"/>
-            <a:ext cx="777240" cy="777240"/>
+            <a:off x="7586068" y="2277947"/>
+            <a:ext cx="3035923" cy="3035923"/>
           </a:xfrm>
           <a:prstGeom prst="rect">
             <a:avLst/>
@@ -4429,7 +4378,7 @@
         </p:nvSpPr>
         <p:spPr>
           <a:xfrm>
-            <a:off x="868680" y="2926080"/>
+            <a:off x="845820" y="2103120"/>
             <a:ext cx="4846320" cy="1645920"/>
           </a:xfrm>
           <a:prstGeom prst="rect">
@@ -4438,7 +4387,7 @@
           <a:noFill/>
         </p:spPr>
         <p:txBody>
-          <a:bodyPr wrap="square" lIns="18288" rIns="18288" tIns="18288">
+          <a:bodyPr wrap="square" lIns="18288" tIns="18288" rIns="18288">
             <a:spAutoFit/>
           </a:bodyPr>
           <a:lstStyle/>
@@ -4455,7 +4404,20 @@
               </a:defRPr>
             </a:pPr>
             <a:r>
-              <a:t>가는 길의 쉼,</a:t>
+              <a:rPr dirty="0" err="1"/>
+              <a:t>가는</a:t>
+            </a:r>
+            <a:r>
+              <a:rPr dirty="0"/>
+              <a:t> </a:t>
+            </a:r>
+            <a:r>
+              <a:rPr dirty="0" err="1"/>
+              <a:t>길의</a:t>
+            </a:r>
+            <a:r>
+              <a:rPr dirty="0"/>
+              <a:t> 쉼,</a:t>
             </a:r>
           </a:p>
           <a:p>
@@ -4471,8 +4433,18 @@
               </a:defRPr>
             </a:pPr>
             <a:r>
-              <a:t>공공데이터로 한눈에</a:t>
-            </a:r>
+              <a:rPr dirty="0" err="1"/>
+              <a:t>공공데이터로</a:t>
+            </a:r>
+            <a:r>
+              <a:rPr dirty="0"/>
+              <a:t> </a:t>
+            </a:r>
+            <a:r>
+              <a:rPr dirty="0" err="1"/>
+              <a:t>한눈에</a:t>
+            </a:r>
+            <a:endParaRPr dirty="0"/>
           </a:p>
         </p:txBody>
       </p:sp>
@@ -4485,7 +4457,7 @@
         <p:spPr>
           <a:xfrm>
             <a:off x="868680" y="5074920"/>
-            <a:ext cx="4754880" cy="731520"/>
+            <a:ext cx="4754880" cy="685316"/>
           </a:xfrm>
           <a:prstGeom prst="rect">
             <a:avLst/>
@@ -4493,7 +4465,7 @@
           <a:noFill/>
         </p:spPr>
         <p:txBody>
-          <a:bodyPr wrap="square" lIns="18288" rIns="18288" tIns="18288">
+          <a:bodyPr wrap="square" lIns="18288" tIns="18288" rIns="18288">
             <a:spAutoFit/>
           </a:bodyPr>
           <a:lstStyle/>
@@ -4510,6 +4482,7 @@
               </a:defRPr>
             </a:pPr>
             <a:r>
+              <a:rPr dirty="0"/>
               <a:t>김수종  |  202395007</a:t>
             </a:r>
           </a:p>
@@ -4526,35 +4499,25 @@
               </a:defRPr>
             </a:pPr>
             <a:r>
-              <a:t>프로젝트 1 발표  ·  2026.10.28</a:t>
-            </a:r>
-          </a:p>
-        </p:txBody>
-      </p:sp>
-      <p:pic>
-        <p:nvPicPr>
-          <p:cNvPr id="11" name="Picture 10" descr="route-home.png"/>
-          <p:cNvPicPr>
-            <a:picLocks noChangeAspect="1"/>
-          </p:cNvPicPr>
-          <p:nvPr/>
-        </p:nvPicPr>
-        <p:blipFill>
-          <a:blip r:embed="rId4"/>
-          <a:stretch>
-            <a:fillRect/>
-          </a:stretch>
-        </p:blipFill>
-        <p:spPr>
-          <a:xfrm>
-            <a:off x="6309360" y="2248436"/>
-            <a:ext cx="5349240" cy="3229806"/>
-          </a:xfrm>
-          <a:prstGeom prst="rect">
-            <a:avLst/>
-          </a:prstGeom>
-        </p:spPr>
-      </p:pic>
+              <a:rPr dirty="0" err="1"/>
+              <a:t>프로젝트</a:t>
+            </a:r>
+            <a:r>
+              <a:rPr lang="ko-KR" altLang="en-US" dirty="0"/>
+              <a:t> </a:t>
+            </a:r>
+            <a:r>
+              <a:rPr lang="en-US" altLang="ko-KR" dirty="0"/>
+              <a:t>2 </a:t>
+            </a:r>
+            <a:r>
+              <a:rPr lang="ko-KR" altLang="en-US" dirty="0"/>
+              <a:t>발표</a:t>
+            </a:r>
+            <a:endParaRPr dirty="0"/>
+          </a:p>
+        </p:txBody>
+      </p:sp>
     </p:spTree>
   </p:cSld>
   <p:clrMapOvr>
@@ -4563,8 +4526,8 @@
 </p:sld>
 </file>
 
-<file path=ppt/slides/slide10.xml><?xml version="1.0" encoding="utf-8"?>
-<p:sld xmlns:a="http://schemas.openxmlformats.org/drawingml/2006/main" xmlns:p="http://schemas.openxmlformats.org/presentationml/2006/main" xmlns:r="http://schemas.openxmlformats.org/officeDocument/2006/relationships">
+<file path=ppt/slides/slide2.xml><?xml version="1.0" encoding="utf-8"?>
+<p:sld xmlns:a="http://schemas.openxmlformats.org/drawingml/2006/main" xmlns:r="http://schemas.openxmlformats.org/officeDocument/2006/relationships" xmlns:p="http://schemas.openxmlformats.org/presentationml/2006/main">
   <p:cSld>
     <p:bg>
       <p:bgPr>
@@ -4580,7 +4543,14 @@
         <p:cNvGrpSpPr/>
         <p:nvPr/>
       </p:nvGrpSpPr>
-      <p:grpSpPr/>
+      <p:grpSpPr>
+        <a:xfrm>
+          <a:off x="0" y="0"/>
+          <a:ext cx="0" cy="0"/>
+          <a:chOff x="0" y="0"/>
+          <a:chExt cx="0" cy="0"/>
+        </a:xfrm>
+      </p:grpSpPr>
       <p:sp>
         <p:nvSpPr>
           <p:cNvPr id="2" name="TextBox 1"/>
@@ -4598,7 +4568,7 @@
           <a:noFill/>
         </p:spPr>
         <p:txBody>
-          <a:bodyPr wrap="square" lIns="18288" rIns="18288" tIns="18288">
+          <a:bodyPr wrap="square" lIns="18288" tIns="18288" rIns="18288">
             <a:spAutoFit/>
           </a:bodyPr>
           <a:lstStyle/>
@@ -4615,7 +4585,7 @@
               </a:defRPr>
             </a:pPr>
             <a:r>
-              <a:t>09 / Q&amp;A</a:t>
+              <a:t>01 / PROBLEM &amp; USER VALUE</a:t>
             </a:r>
           </a:p>
         </p:txBody>
@@ -4637,7 +4607,7 @@
           <a:noFill/>
         </p:spPr>
         <p:txBody>
-          <a:bodyPr wrap="square" lIns="18288" rIns="18288" tIns="18288">
+          <a:bodyPr wrap="square" lIns="18288" tIns="18288" rIns="18288">
             <a:spAutoFit/>
           </a:bodyPr>
           <a:lstStyle/>
@@ -4654,7 +4624,7 @@
               </a:defRPr>
             </a:pPr>
             <a:r>
-              <a:t>이동 경로에 맞는 쉼을 더 쉽게</a:t>
+              <a:t>운전자는 장소보다 ‘가는 방향의 정보’가 필요합니다</a:t>
             </a:r>
           </a:p>
         </p:txBody>
@@ -4699,6 +4669,7 @@
           <a:lstStyle/>
           <a:p>
             <a:pPr algn="ctr"/>
+            <a:endParaRPr/>
           </a:p>
         </p:txBody>
       </p:sp>
@@ -4719,7 +4690,7 @@
           <a:noFill/>
         </p:spPr>
         <p:txBody>
-          <a:bodyPr wrap="square" lIns="18288" rIns="18288" tIns="18288">
+          <a:bodyPr wrap="square" lIns="18288" tIns="18288" rIns="18288">
             <a:spAutoFit/>
           </a:bodyPr>
           <a:lstStyle/>
@@ -4758,7 +4729,7 @@
           <a:noFill/>
         </p:spPr>
         <p:txBody>
-          <a:bodyPr wrap="square" lIns="18288" rIns="18288" tIns="18288">
+          <a:bodyPr wrap="square" lIns="18288" tIns="18288" rIns="18288">
             <a:spAutoFit/>
           </a:bodyPr>
           <a:lstStyle/>
@@ -4775,53 +4746,117 @@
               </a:defRPr>
             </a:pPr>
             <a:r>
-              <a:t>10</a:t>
-            </a:r>
-          </a:p>
-        </p:txBody>
-      </p:sp>
-      <p:pic>
-        <p:nvPicPr>
-          <p:cNvPr id="7" name="Picture 6" descr="food.png"/>
-          <p:cNvPicPr>
-            <a:picLocks noChangeAspect="1"/>
-          </p:cNvPicPr>
-          <p:nvPr/>
-        </p:nvPicPr>
-        <p:blipFill>
-          <a:blip r:embed="rId3"/>
-          <a:stretch>
-            <a:fillRect/>
-          </a:stretch>
-        </p:blipFill>
-        <p:spPr>
-          <a:xfrm>
-            <a:off x="731520" y="2011680"/>
-            <a:ext cx="1188720" cy="1188720"/>
+              <a:t>02</a:t>
+            </a:r>
+          </a:p>
+        </p:txBody>
+      </p:sp>
+      <p:sp>
+        <p:nvSpPr>
+          <p:cNvPr id="7" name="Rounded Rectangle 6"/>
+          <p:cNvSpPr/>
+          <p:nvPr/>
+        </p:nvSpPr>
+        <p:spPr>
+          <a:xfrm>
+            <a:off x="502920" y="1828800"/>
+            <a:ext cx="3584448" cy="2971800"/>
+          </a:xfrm>
+          <a:prstGeom prst="roundRect">
+            <a:avLst/>
+          </a:prstGeom>
+          <a:solidFill>
+            <a:srgbClr val="FFFFFF"/>
+          </a:solidFill>
+          <a:ln>
+            <a:noFill/>
+          </a:ln>
+        </p:spPr>
+        <p:style>
+          <a:lnRef idx="1">
+            <a:schemeClr val="accent1"/>
+          </a:lnRef>
+          <a:fillRef idx="3">
+            <a:schemeClr val="accent1"/>
+          </a:fillRef>
+          <a:effectRef idx="2">
+            <a:schemeClr val="accent1"/>
+          </a:effectRef>
+          <a:fontRef idx="minor">
+            <a:schemeClr val="lt1"/>
+          </a:fontRef>
+        </p:style>
+        <p:txBody>
+          <a:bodyPr rtlCol="0" anchor="ctr"/>
+          <a:lstStyle/>
+          <a:p>
+            <a:pPr algn="ctr"/>
+            <a:endParaRPr/>
+          </a:p>
+        </p:txBody>
+      </p:sp>
+      <p:sp>
+        <p:nvSpPr>
+          <p:cNvPr id="8" name="Rounded Rectangle 7"/>
+          <p:cNvSpPr/>
+          <p:nvPr/>
+        </p:nvSpPr>
+        <p:spPr>
+          <a:xfrm>
+            <a:off x="502920" y="1828800"/>
+            <a:ext cx="50292" cy="2971800"/>
+          </a:xfrm>
+          <a:prstGeom prst="roundRect">
+            <a:avLst/>
+          </a:prstGeom>
+          <a:solidFill>
+            <a:srgbClr val="47858A"/>
+          </a:solidFill>
+          <a:ln>
+            <a:noFill/>
+          </a:ln>
+        </p:spPr>
+        <p:style>
+          <a:lnRef idx="1">
+            <a:schemeClr val="accent1"/>
+          </a:lnRef>
+          <a:fillRef idx="3">
+            <a:schemeClr val="accent1"/>
+          </a:fillRef>
+          <a:effectRef idx="2">
+            <a:schemeClr val="accent1"/>
+          </a:effectRef>
+          <a:fontRef idx="minor">
+            <a:schemeClr val="lt1"/>
+          </a:fontRef>
+        </p:style>
+        <p:txBody>
+          <a:bodyPr rtlCol="0" anchor="ctr"/>
+          <a:lstStyle/>
+          <a:p>
+            <a:pPr algn="ctr"/>
+            <a:endParaRPr/>
+          </a:p>
+        </p:txBody>
+      </p:sp>
+      <p:sp>
+        <p:nvSpPr>
+          <p:cNvPr id="9" name="TextBox 8"/>
+          <p:cNvSpPr txBox="1"/>
+          <p:nvPr/>
+        </p:nvSpPr>
+        <p:spPr>
+          <a:xfrm>
+            <a:off x="704088" y="2011680"/>
+            <a:ext cx="3218688" cy="548640"/>
           </a:xfrm>
           <a:prstGeom prst="rect">
             <a:avLst/>
           </a:prstGeom>
-        </p:spPr>
-      </p:pic>
-      <p:sp>
-        <p:nvSpPr>
-          <p:cNvPr id="8" name="TextBox 7"/>
-          <p:cNvSpPr txBox="1"/>
-          <p:nvPr/>
-        </p:nvSpPr>
-        <p:spPr>
-          <a:xfrm>
-            <a:off x="2286000" y="2240280"/>
-            <a:ext cx="8778240" cy="822960"/>
-          </a:xfrm>
-          <a:prstGeom prst="rect">
-            <a:avLst/>
-          </a:prstGeom>
           <a:noFill/>
         </p:spPr>
         <p:txBody>
-          <a:bodyPr wrap="square" lIns="18288" rIns="18288" tIns="18288">
+          <a:bodyPr wrap="square" lIns="18288" tIns="18288" rIns="18288">
             <a:spAutoFit/>
           </a:bodyPr>
           <a:lstStyle/>
@@ -4830,7 +4865,7 @@
               <a:spcAft>
                 <a:spcPts val="1000"/>
               </a:spcAft>
-              <a:defRPr sz="3400" b="1">
+              <a:defRPr sz="2100" b="1">
                 <a:solidFill>
                   <a:srgbClr val="20304B"/>
                 </a:solidFill>
@@ -4838,21 +4873,21 @@
               </a:defRPr>
             </a:pPr>
             <a:r>
-              <a:t>찾고, 확인하고, 비교하세요.</a:t>
-            </a:r>
-          </a:p>
-        </p:txBody>
-      </p:sp>
-      <p:sp>
-        <p:nvSpPr>
-          <p:cNvPr id="9" name="TextBox 8"/>
+              <a:t>어디서 쉴까?</a:t>
+            </a:r>
+          </a:p>
+        </p:txBody>
+      </p:sp>
+      <p:sp>
+        <p:nvSpPr>
+          <p:cNvPr id="10" name="TextBox 9"/>
           <p:cNvSpPr txBox="1"/>
           <p:nvPr/>
         </p:nvSpPr>
         <p:spPr>
           <a:xfrm>
-            <a:off x="2286000" y="3337560"/>
-            <a:ext cx="8778240" cy="640080"/>
+            <a:off x="704088" y="2697480"/>
+            <a:ext cx="3172968" cy="2103120"/>
           </a:xfrm>
           <a:prstGeom prst="rect">
             <a:avLst/>
@@ -4860,7 +4895,7 @@
           <a:noFill/>
         </p:spPr>
         <p:txBody>
-          <a:bodyPr wrap="square" lIns="18288" rIns="18288" tIns="18288">
+          <a:bodyPr wrap="square" lIns="18288" tIns="18288" rIns="18288">
             <a:spAutoFit/>
           </a:bodyPr>
           <a:lstStyle/>
@@ -4869,29 +4904,409 @@
               <a:spcAft>
                 <a:spcPts val="1000"/>
               </a:spcAft>
-              <a:defRPr sz="2200" b="0">
-                <a:solidFill>
-                  <a:srgbClr val="47858A"/>
-                </a:solidFill>
-                <a:latin typeface="맑은 고딕"/>
-              </a:defRPr>
-            </a:pPr>
-            <a:r>
-              <a:t>경로에 맞는 휴식 장소  ·  방문 전 정보  ·  한눈에 비교</a:t>
-            </a:r>
-          </a:p>
-        </p:txBody>
-      </p:sp>
-      <p:sp>
-        <p:nvSpPr>
-          <p:cNvPr id="10" name="Rounded Rectangle 9"/>
+              <a:defRPr sz="1700" b="0">
+                <a:solidFill>
+                  <a:srgbClr val="708097"/>
+                </a:solidFill>
+                <a:latin typeface="맑은 고딕"/>
+              </a:defRPr>
+            </a:pPr>
+            <a:r>
+              <a:t>노선과 진행 방향에 맞는</a:t>
+            </a:r>
+          </a:p>
+          <a:p>
+            <a:pPr>
+              <a:spcAft>
+                <a:spcPts val="1000"/>
+              </a:spcAft>
+              <a:defRPr sz="1700" b="0">
+                <a:solidFill>
+                  <a:srgbClr val="708097"/>
+                </a:solidFill>
+                <a:latin typeface="맑은 고딕"/>
+              </a:defRPr>
+            </a:pPr>
+            <a:r>
+              <a:t>휴게소 · 졸음쉼터 탐색</a:t>
+            </a:r>
+          </a:p>
+        </p:txBody>
+      </p:sp>
+      <p:sp>
+        <p:nvSpPr>
+          <p:cNvPr id="11" name="Rounded Rectangle 10"/>
           <p:cNvSpPr/>
           <p:nvPr/>
         </p:nvSpPr>
         <p:spPr>
           <a:xfrm>
-            <a:off x="731520" y="4663440"/>
-            <a:ext cx="10881360" cy="1005840"/>
+            <a:off x="4297680" y="1828800"/>
+            <a:ext cx="3584448" cy="2971800"/>
+          </a:xfrm>
+          <a:prstGeom prst="roundRect">
+            <a:avLst/>
+          </a:prstGeom>
+          <a:solidFill>
+            <a:srgbClr val="FFFFFF"/>
+          </a:solidFill>
+          <a:ln>
+            <a:noFill/>
+          </a:ln>
+        </p:spPr>
+        <p:style>
+          <a:lnRef idx="1">
+            <a:schemeClr val="accent1"/>
+          </a:lnRef>
+          <a:fillRef idx="3">
+            <a:schemeClr val="accent1"/>
+          </a:fillRef>
+          <a:effectRef idx="2">
+            <a:schemeClr val="accent1"/>
+          </a:effectRef>
+          <a:fontRef idx="minor">
+            <a:schemeClr val="lt1"/>
+          </a:fontRef>
+        </p:style>
+        <p:txBody>
+          <a:bodyPr rtlCol="0" anchor="ctr"/>
+          <a:lstStyle/>
+          <a:p>
+            <a:pPr algn="ctr"/>
+            <a:endParaRPr/>
+          </a:p>
+        </p:txBody>
+      </p:sp>
+      <p:sp>
+        <p:nvSpPr>
+          <p:cNvPr id="12" name="Rounded Rectangle 11"/>
+          <p:cNvSpPr/>
+          <p:nvPr/>
+        </p:nvSpPr>
+        <p:spPr>
+          <a:xfrm>
+            <a:off x="4297680" y="1828800"/>
+            <a:ext cx="50292" cy="2971800"/>
+          </a:xfrm>
+          <a:prstGeom prst="roundRect">
+            <a:avLst/>
+          </a:prstGeom>
+          <a:solidFill>
+            <a:srgbClr val="47858A"/>
+          </a:solidFill>
+          <a:ln>
+            <a:noFill/>
+          </a:ln>
+        </p:spPr>
+        <p:style>
+          <a:lnRef idx="1">
+            <a:schemeClr val="accent1"/>
+          </a:lnRef>
+          <a:fillRef idx="3">
+            <a:schemeClr val="accent1"/>
+          </a:fillRef>
+          <a:effectRef idx="2">
+            <a:schemeClr val="accent1"/>
+          </a:effectRef>
+          <a:fontRef idx="minor">
+            <a:schemeClr val="lt1"/>
+          </a:fontRef>
+        </p:style>
+        <p:txBody>
+          <a:bodyPr rtlCol="0" anchor="ctr"/>
+          <a:lstStyle/>
+          <a:p>
+            <a:pPr algn="ctr"/>
+            <a:endParaRPr/>
+          </a:p>
+        </p:txBody>
+      </p:sp>
+      <p:sp>
+        <p:nvSpPr>
+          <p:cNvPr id="13" name="TextBox 12"/>
+          <p:cNvSpPr txBox="1"/>
+          <p:nvPr/>
+        </p:nvSpPr>
+        <p:spPr>
+          <a:xfrm>
+            <a:off x="4498848" y="2011680"/>
+            <a:ext cx="3218688" cy="548640"/>
+          </a:xfrm>
+          <a:prstGeom prst="rect">
+            <a:avLst/>
+          </a:prstGeom>
+          <a:noFill/>
+        </p:spPr>
+        <p:txBody>
+          <a:bodyPr wrap="square" lIns="18288" tIns="18288" rIns="18288">
+            <a:spAutoFit/>
+          </a:bodyPr>
+          <a:lstStyle/>
+          <a:p>
+            <a:pPr>
+              <a:spcAft>
+                <a:spcPts val="1000"/>
+              </a:spcAft>
+              <a:defRPr sz="2100" b="1">
+                <a:solidFill>
+                  <a:srgbClr val="20304B"/>
+                </a:solidFill>
+                <a:latin typeface="맑은 고딕"/>
+              </a:defRPr>
+            </a:pPr>
+            <a:r>
+              <a:t>무엇을 먹을까?</a:t>
+            </a:r>
+          </a:p>
+        </p:txBody>
+      </p:sp>
+      <p:sp>
+        <p:nvSpPr>
+          <p:cNvPr id="14" name="TextBox 13"/>
+          <p:cNvSpPr txBox="1"/>
+          <p:nvPr/>
+        </p:nvSpPr>
+        <p:spPr>
+          <a:xfrm>
+            <a:off x="4498848" y="2697480"/>
+            <a:ext cx="3172968" cy="2103120"/>
+          </a:xfrm>
+          <a:prstGeom prst="rect">
+            <a:avLst/>
+          </a:prstGeom>
+          <a:noFill/>
+        </p:spPr>
+        <p:txBody>
+          <a:bodyPr wrap="square" lIns="18288" tIns="18288" rIns="18288">
+            <a:spAutoFit/>
+          </a:bodyPr>
+          <a:lstStyle/>
+          <a:p>
+            <a:pPr>
+              <a:spcAft>
+                <a:spcPts val="1000"/>
+              </a:spcAft>
+              <a:defRPr sz="1700" b="0">
+                <a:solidFill>
+                  <a:srgbClr val="708097"/>
+                </a:solidFill>
+                <a:latin typeface="맑은 고딕"/>
+              </a:defRPr>
+            </a:pPr>
+            <a:r>
+              <a:t>음식 가격과 입점 브랜드,</a:t>
+            </a:r>
+          </a:p>
+          <a:p>
+            <a:pPr>
+              <a:spcAft>
+                <a:spcPts val="1000"/>
+              </a:spcAft>
+              <a:defRPr sz="1700" b="0">
+                <a:solidFill>
+                  <a:srgbClr val="708097"/>
+                </a:solidFill>
+                <a:latin typeface="맑은 고딕"/>
+              </a:defRPr>
+            </a:pPr>
+            <a:r>
+              <a:t>등록 운영시간 확인</a:t>
+            </a:r>
+          </a:p>
+        </p:txBody>
+      </p:sp>
+      <p:sp>
+        <p:nvSpPr>
+          <p:cNvPr id="15" name="Rounded Rectangle 14"/>
+          <p:cNvSpPr/>
+          <p:nvPr/>
+        </p:nvSpPr>
+        <p:spPr>
+          <a:xfrm>
+            <a:off x="8092440" y="1828800"/>
+            <a:ext cx="3584448" cy="2971800"/>
+          </a:xfrm>
+          <a:prstGeom prst="roundRect">
+            <a:avLst/>
+          </a:prstGeom>
+          <a:solidFill>
+            <a:srgbClr val="FFFFFF"/>
+          </a:solidFill>
+          <a:ln>
+            <a:noFill/>
+          </a:ln>
+        </p:spPr>
+        <p:style>
+          <a:lnRef idx="1">
+            <a:schemeClr val="accent1"/>
+          </a:lnRef>
+          <a:fillRef idx="3">
+            <a:schemeClr val="accent1"/>
+          </a:fillRef>
+          <a:effectRef idx="2">
+            <a:schemeClr val="accent1"/>
+          </a:effectRef>
+          <a:fontRef idx="minor">
+            <a:schemeClr val="lt1"/>
+          </a:fontRef>
+        </p:style>
+        <p:txBody>
+          <a:bodyPr rtlCol="0" anchor="ctr"/>
+          <a:lstStyle/>
+          <a:p>
+            <a:pPr algn="ctr"/>
+            <a:endParaRPr/>
+          </a:p>
+        </p:txBody>
+      </p:sp>
+      <p:sp>
+        <p:nvSpPr>
+          <p:cNvPr id="16" name="Rounded Rectangle 15"/>
+          <p:cNvSpPr/>
+          <p:nvPr/>
+        </p:nvSpPr>
+        <p:spPr>
+          <a:xfrm>
+            <a:off x="8092440" y="1828800"/>
+            <a:ext cx="50292" cy="2971800"/>
+          </a:xfrm>
+          <a:prstGeom prst="roundRect">
+            <a:avLst/>
+          </a:prstGeom>
+          <a:solidFill>
+            <a:srgbClr val="47858A"/>
+          </a:solidFill>
+          <a:ln>
+            <a:noFill/>
+          </a:ln>
+        </p:spPr>
+        <p:style>
+          <a:lnRef idx="1">
+            <a:schemeClr val="accent1"/>
+          </a:lnRef>
+          <a:fillRef idx="3">
+            <a:schemeClr val="accent1"/>
+          </a:fillRef>
+          <a:effectRef idx="2">
+            <a:schemeClr val="accent1"/>
+          </a:effectRef>
+          <a:fontRef idx="minor">
+            <a:schemeClr val="lt1"/>
+          </a:fontRef>
+        </p:style>
+        <p:txBody>
+          <a:bodyPr rtlCol="0" anchor="ctr"/>
+          <a:lstStyle/>
+          <a:p>
+            <a:pPr algn="ctr"/>
+            <a:endParaRPr/>
+          </a:p>
+        </p:txBody>
+      </p:sp>
+      <p:sp>
+        <p:nvSpPr>
+          <p:cNvPr id="17" name="TextBox 16"/>
+          <p:cNvSpPr txBox="1"/>
+          <p:nvPr/>
+        </p:nvSpPr>
+        <p:spPr>
+          <a:xfrm>
+            <a:off x="8293608" y="2011680"/>
+            <a:ext cx="3218688" cy="548640"/>
+          </a:xfrm>
+          <a:prstGeom prst="rect">
+            <a:avLst/>
+          </a:prstGeom>
+          <a:noFill/>
+        </p:spPr>
+        <p:txBody>
+          <a:bodyPr wrap="square" lIns="18288" tIns="18288" rIns="18288">
+            <a:spAutoFit/>
+          </a:bodyPr>
+          <a:lstStyle/>
+          <a:p>
+            <a:pPr>
+              <a:spcAft>
+                <a:spcPts val="1000"/>
+              </a:spcAft>
+              <a:defRPr sz="2100" b="1">
+                <a:solidFill>
+                  <a:srgbClr val="20304B"/>
+                </a:solidFill>
+                <a:latin typeface="맑은 고딕"/>
+              </a:defRPr>
+            </a:pPr>
+            <a:r>
+              <a:t>어느 곳이 나을까?</a:t>
+            </a:r>
+          </a:p>
+        </p:txBody>
+      </p:sp>
+      <p:sp>
+        <p:nvSpPr>
+          <p:cNvPr id="18" name="TextBox 17"/>
+          <p:cNvSpPr txBox="1"/>
+          <p:nvPr/>
+        </p:nvSpPr>
+        <p:spPr>
+          <a:xfrm>
+            <a:off x="8293608" y="2697480"/>
+            <a:ext cx="3172968" cy="2103120"/>
+          </a:xfrm>
+          <a:prstGeom prst="rect">
+            <a:avLst/>
+          </a:prstGeom>
+          <a:noFill/>
+        </p:spPr>
+        <p:txBody>
+          <a:bodyPr wrap="square" lIns="18288" tIns="18288" rIns="18288">
+            <a:spAutoFit/>
+          </a:bodyPr>
+          <a:lstStyle/>
+          <a:p>
+            <a:pPr>
+              <a:spcAft>
+                <a:spcPts val="1000"/>
+              </a:spcAft>
+              <a:defRPr sz="1700" b="0">
+                <a:solidFill>
+                  <a:srgbClr val="708097"/>
+                </a:solidFill>
+                <a:latin typeface="맑은 고딕"/>
+              </a:defRPr>
+            </a:pPr>
+            <a:r>
+              <a:t>같은 음식 가격과 주차 규모,</a:t>
+            </a:r>
+          </a:p>
+          <a:p>
+            <a:pPr>
+              <a:spcAft>
+                <a:spcPts val="1000"/>
+              </a:spcAft>
+              <a:defRPr sz="1700" b="0">
+                <a:solidFill>
+                  <a:srgbClr val="708097"/>
+                </a:solidFill>
+                <a:latin typeface="맑은 고딕"/>
+              </a:defRPr>
+            </a:pPr>
+            <a:r>
+              <a:t>과거 이용량을 나란히 비교</a:t>
+            </a:r>
+          </a:p>
+        </p:txBody>
+      </p:sp>
+      <p:sp>
+        <p:nvSpPr>
+          <p:cNvPr id="19" name="Rounded Rectangle 18"/>
+          <p:cNvSpPr/>
+          <p:nvPr/>
+        </p:nvSpPr>
+        <p:spPr>
+          <a:xfrm>
+            <a:off x="502920" y="5166360"/>
+            <a:ext cx="11155680" cy="777240"/>
           </a:xfrm>
           <a:prstGeom prst="roundRect">
             <a:avLst/>
@@ -4922,19 +5337,20 @@
           <a:lstStyle/>
           <a:p>
             <a:pPr algn="ctr"/>
-          </a:p>
-        </p:txBody>
-      </p:sp>
-      <p:sp>
-        <p:nvSpPr>
-          <p:cNvPr id="11" name="TextBox 10"/>
+            <a:endParaRPr/>
+          </a:p>
+        </p:txBody>
+      </p:sp>
+      <p:sp>
+        <p:nvSpPr>
+          <p:cNvPr id="20" name="TextBox 19"/>
           <p:cNvSpPr txBox="1"/>
           <p:nvPr/>
         </p:nvSpPr>
         <p:spPr>
           <a:xfrm>
-            <a:off x="1051560" y="4892040"/>
-            <a:ext cx="2743200" cy="548640"/>
+            <a:off x="777240" y="5349240"/>
+            <a:ext cx="10607040" cy="411480"/>
           </a:xfrm>
           <a:prstGeom prst="rect">
             <a:avLst/>
@@ -4942,7 +5358,7 @@
           <a:noFill/>
         </p:spPr>
         <p:txBody>
-          <a:bodyPr wrap="square" lIns="18288" rIns="18288" tIns="18288">
+          <a:bodyPr wrap="square" lIns="18288" tIns="18288" rIns="18288">
             <a:spAutoFit/>
           </a:bodyPr>
           <a:lstStyle/>
@@ -4951,7 +5367,7 @@
               <a:spcAft>
                 <a:spcPts val="1000"/>
               </a:spcAft>
-              <a:defRPr sz="2900" b="1">
+              <a:defRPr sz="2300" b="1">
                 <a:solidFill>
                   <a:srgbClr val="FFFFFF"/>
                 </a:solidFill>
@@ -4959,46 +5375,7 @@
               </a:defRPr>
             </a:pPr>
             <a:r>
-              <a:t>Q&amp;A</a:t>
-            </a:r>
-          </a:p>
-        </p:txBody>
-      </p:sp>
-      <p:sp>
-        <p:nvSpPr>
-          <p:cNvPr id="12" name="TextBox 11"/>
-          <p:cNvSpPr txBox="1"/>
-          <p:nvPr/>
-        </p:nvSpPr>
-        <p:spPr>
-          <a:xfrm>
-            <a:off x="7498079" y="4983480"/>
-            <a:ext cx="3749039" cy="457200"/>
-          </a:xfrm>
-          <a:prstGeom prst="rect">
-            <a:avLst/>
-          </a:prstGeom>
-          <a:noFill/>
-        </p:spPr>
-        <p:txBody>
-          <a:bodyPr wrap="square" lIns="18288" rIns="18288" tIns="18288">
-            <a:spAutoFit/>
-          </a:bodyPr>
-          <a:lstStyle/>
-          <a:p>
-            <a:pPr>
-              <a:spcAft>
-                <a:spcPts val="1000"/>
-              </a:spcAft>
-              <a:defRPr sz="1900" b="0">
-                <a:solidFill>
-                  <a:srgbClr val="FFFFFF"/>
-                </a:solidFill>
-                <a:latin typeface="맑은 고딕"/>
-              </a:defRPr>
-            </a:pPr>
-            <a:r>
-              <a:t>김수종  /  202395007</a:t>
+              <a:t>출발 전 탐색 → 이동 중 휴식 계획 → 방문할 곳 선택</a:t>
             </a:r>
           </a:p>
         </p:txBody>
@@ -5011,8 +5388,8 @@
 </p:sld>
 </file>
 
-<file path=ppt/slides/slide2.xml><?xml version="1.0" encoding="utf-8"?>
-<p:sld xmlns:a="http://schemas.openxmlformats.org/drawingml/2006/main" xmlns:p="http://schemas.openxmlformats.org/presentationml/2006/main" xmlns:r="http://schemas.openxmlformats.org/officeDocument/2006/relationships">
+<file path=ppt/slides/slide3.xml><?xml version="1.0" encoding="utf-8"?>
+<p:sld xmlns:a="http://schemas.openxmlformats.org/drawingml/2006/main" xmlns:r="http://schemas.openxmlformats.org/officeDocument/2006/relationships" xmlns:p="http://schemas.openxmlformats.org/presentationml/2006/main">
   <p:cSld>
     <p:bg>
       <p:bgPr>
@@ -5028,7 +5405,14 @@
         <p:cNvGrpSpPr/>
         <p:nvPr/>
       </p:nvGrpSpPr>
-      <p:grpSpPr/>
+      <p:grpSpPr>
+        <a:xfrm>
+          <a:off x="0" y="0"/>
+          <a:ext cx="0" cy="0"/>
+          <a:chOff x="0" y="0"/>
+          <a:chExt cx="0" cy="0"/>
+        </a:xfrm>
+      </p:grpSpPr>
       <p:sp>
         <p:nvSpPr>
           <p:cNvPr id="2" name="TextBox 1"/>
@@ -5046,7 +5430,7 @@
           <a:noFill/>
         </p:spPr>
         <p:txBody>
-          <a:bodyPr wrap="square" lIns="18288" rIns="18288" tIns="18288">
+          <a:bodyPr wrap="square" lIns="18288" tIns="18288" rIns="18288">
             <a:spAutoFit/>
           </a:bodyPr>
           <a:lstStyle/>
@@ -5063,7 +5447,7 @@
               </a:defRPr>
             </a:pPr>
             <a:r>
-              <a:t>01 / PROBLEM &amp; USER VALUE</a:t>
+              <a:t>02 / DATA SOURCES</a:t>
             </a:r>
           </a:p>
         </p:txBody>
@@ -5085,7 +5469,7 @@
           <a:noFill/>
         </p:spPr>
         <p:txBody>
-          <a:bodyPr wrap="square" lIns="18288" rIns="18288" tIns="18288">
+          <a:bodyPr wrap="square" lIns="18288" tIns="18288" rIns="18288">
             <a:spAutoFit/>
           </a:bodyPr>
           <a:lstStyle/>
@@ -5102,7 +5486,7 @@
               </a:defRPr>
             </a:pPr>
             <a:r>
-              <a:t>운전자는 장소보다 ‘가는 방향의 정보’가 필요합니다</a:t>
+              <a:t>흩어진 공공데이터를 휴게소 단위로 연결했습니다</a:t>
             </a:r>
           </a:p>
         </p:txBody>
@@ -5147,6 +5531,7 @@
           <a:lstStyle/>
           <a:p>
             <a:pPr algn="ctr"/>
+            <a:endParaRPr/>
           </a:p>
         </p:txBody>
       </p:sp>
@@ -5167,7 +5552,7 @@
           <a:noFill/>
         </p:spPr>
         <p:txBody>
-          <a:bodyPr wrap="square" lIns="18288" rIns="18288" tIns="18288">
+          <a:bodyPr wrap="square" lIns="18288" tIns="18288" rIns="18288">
             <a:spAutoFit/>
           </a:bodyPr>
           <a:lstStyle/>
@@ -5206,7 +5591,7 @@
           <a:noFill/>
         </p:spPr>
         <p:txBody>
-          <a:bodyPr wrap="square" lIns="18288" rIns="18288" tIns="18288">
+          <a:bodyPr wrap="square" lIns="18288" tIns="18288" rIns="18288">
             <a:spAutoFit/>
           </a:bodyPr>
           <a:lstStyle/>
@@ -5223,7 +5608,7 @@
               </a:defRPr>
             </a:pPr>
             <a:r>
-              <a:t>02</a:t>
+              <a:t>03</a:t>
             </a:r>
           </a:p>
         </p:txBody>
@@ -5236,8 +5621,8 @@
         </p:nvSpPr>
         <p:spPr>
           <a:xfrm>
-            <a:off x="502920" y="1828800"/>
-            <a:ext cx="3584448" cy="2971800"/>
+            <a:off x="502920" y="1691640"/>
+            <a:ext cx="2103120" cy="1234440"/>
           </a:xfrm>
           <a:prstGeom prst="roundRect">
             <a:avLst/>
@@ -5268,49 +5653,46 @@
           <a:lstStyle/>
           <a:p>
             <a:pPr algn="ctr"/>
-          </a:p>
-        </p:txBody>
-      </p:sp>
-      <p:sp>
-        <p:nvSpPr>
-          <p:cNvPr id="8" name="Rounded Rectangle 7"/>
-          <p:cNvSpPr/>
-          <p:nvPr/>
-        </p:nvSpPr>
-        <p:spPr>
-          <a:xfrm>
-            <a:off x="502920" y="1828800"/>
-            <a:ext cx="50292" cy="2971800"/>
-          </a:xfrm>
-          <a:prstGeom prst="roundRect">
-            <a:avLst/>
-          </a:prstGeom>
-          <a:solidFill>
-            <a:srgbClr val="47858A"/>
-          </a:solidFill>
-          <a:ln>
-            <a:noFill/>
-          </a:ln>
-        </p:spPr>
-        <p:style>
-          <a:lnRef idx="1">
-            <a:schemeClr val="accent1"/>
-          </a:lnRef>
-          <a:fillRef idx="3">
-            <a:schemeClr val="accent1"/>
-          </a:fillRef>
-          <a:effectRef idx="2">
-            <a:schemeClr val="accent1"/>
-          </a:effectRef>
-          <a:fontRef idx="minor">
-            <a:schemeClr val="lt1"/>
-          </a:fontRef>
-        </p:style>
-        <p:txBody>
-          <a:bodyPr rtlCol="0" anchor="ctr"/>
-          <a:lstStyle/>
-          <a:p>
-            <a:pPr algn="ctr"/>
+            <a:endParaRPr/>
+          </a:p>
+        </p:txBody>
+      </p:sp>
+      <p:sp>
+        <p:nvSpPr>
+          <p:cNvPr id="8" name="TextBox 7"/>
+          <p:cNvSpPr txBox="1"/>
+          <p:nvPr/>
+        </p:nvSpPr>
+        <p:spPr>
+          <a:xfrm>
+            <a:off x="649224" y="1828800"/>
+            <a:ext cx="1828800" cy="548640"/>
+          </a:xfrm>
+          <a:prstGeom prst="rect">
+            <a:avLst/>
+          </a:prstGeom>
+          <a:noFill/>
+        </p:spPr>
+        <p:txBody>
+          <a:bodyPr wrap="square" lIns="18288" tIns="18288" rIns="18288">
+            <a:spAutoFit/>
+          </a:bodyPr>
+          <a:lstStyle/>
+          <a:p>
+            <a:pPr>
+              <a:spcAft>
+                <a:spcPts val="1000"/>
+              </a:spcAft>
+              <a:defRPr sz="3200" b="1">
+                <a:solidFill>
+                  <a:srgbClr val="47858A"/>
+                </a:solidFill>
+                <a:latin typeface="맑은 고딕"/>
+              </a:defRPr>
+            </a:pPr>
+            <a:r>
+              <a:t>243</a:t>
+            </a:r>
           </a:p>
         </p:txBody>
       </p:sp>
@@ -5322,8 +5704,8 @@
         </p:nvSpPr>
         <p:spPr>
           <a:xfrm>
-            <a:off x="704088" y="2011680"/>
-            <a:ext cx="3218688" cy="548640"/>
+            <a:off x="649224" y="2468880"/>
+            <a:ext cx="1828800" cy="320040"/>
           </a:xfrm>
           <a:prstGeom prst="rect">
             <a:avLst/>
@@ -5331,7 +5713,7 @@
           <a:noFill/>
         </p:spPr>
         <p:txBody>
-          <a:bodyPr wrap="square" lIns="18288" rIns="18288" tIns="18288">
+          <a:bodyPr wrap="square" lIns="18288" tIns="18288" rIns="18288">
             <a:spAutoFit/>
           </a:bodyPr>
           <a:lstStyle/>
@@ -5340,46 +5722,7 @@
               <a:spcAft>
                 <a:spcPts val="1000"/>
               </a:spcAft>
-              <a:defRPr sz="2100" b="1">
-                <a:solidFill>
-                  <a:srgbClr val="20304B"/>
-                </a:solidFill>
-                <a:latin typeface="맑은 고딕"/>
-              </a:defRPr>
-            </a:pPr>
-            <a:r>
-              <a:t>어디서 쉴까?</a:t>
-            </a:r>
-          </a:p>
-        </p:txBody>
-      </p:sp>
-      <p:sp>
-        <p:nvSpPr>
-          <p:cNvPr id="10" name="TextBox 9"/>
-          <p:cNvSpPr txBox="1"/>
-          <p:nvPr/>
-        </p:nvSpPr>
-        <p:spPr>
-          <a:xfrm>
-            <a:off x="704088" y="2697480"/>
-            <a:ext cx="3172968" cy="2103120"/>
-          </a:xfrm>
-          <a:prstGeom prst="rect">
-            <a:avLst/>
-          </a:prstGeom>
-          <a:noFill/>
-        </p:spPr>
-        <p:txBody>
-          <a:bodyPr wrap="square" lIns="18288" rIns="18288" tIns="18288">
-            <a:spAutoFit/>
-          </a:bodyPr>
-          <a:lstStyle/>
-          <a:p>
-            <a:pPr>
-              <a:spcAft>
-                <a:spcPts val="1000"/>
-              </a:spcAft>
-              <a:defRPr sz="1700" b="0">
+              <a:defRPr sz="1400" b="0">
                 <a:solidFill>
                   <a:srgbClr val="708097"/>
                 </a:solidFill>
@@ -5387,37 +5730,21 @@
               </a:defRPr>
             </a:pPr>
             <a:r>
-              <a:t>노선과 진행 방향에 맞는</a:t>
-            </a:r>
-          </a:p>
-          <a:p>
-            <a:pPr>
-              <a:spcAft>
-                <a:spcPts val="1000"/>
-              </a:spcAft>
-              <a:defRPr sz="1700" b="0">
-                <a:solidFill>
-                  <a:srgbClr val="708097"/>
-                </a:solidFill>
-                <a:latin typeface="맑은 고딕"/>
-              </a:defRPr>
-            </a:pPr>
-            <a:r>
-              <a:t>휴게소 · 졸음쉼터 탐색</a:t>
-            </a:r>
-          </a:p>
-        </p:txBody>
-      </p:sp>
-      <p:sp>
-        <p:nvSpPr>
-          <p:cNvPr id="11" name="Rounded Rectangle 10"/>
+              <a:t>휴게소</a:t>
+            </a:r>
+          </a:p>
+        </p:txBody>
+      </p:sp>
+      <p:sp>
+        <p:nvSpPr>
+          <p:cNvPr id="10" name="Rounded Rectangle 9"/>
           <p:cNvSpPr/>
           <p:nvPr/>
         </p:nvSpPr>
         <p:spPr>
           <a:xfrm>
-            <a:off x="4297680" y="1828800"/>
-            <a:ext cx="3584448" cy="2971800"/>
+            <a:off x="2834640" y="1691640"/>
+            <a:ext cx="2103120" cy="1234440"/>
           </a:xfrm>
           <a:prstGeom prst="roundRect">
             <a:avLst/>
@@ -5448,62 +5775,20 @@
           <a:lstStyle/>
           <a:p>
             <a:pPr algn="ctr"/>
-          </a:p>
-        </p:txBody>
-      </p:sp>
-      <p:sp>
-        <p:nvSpPr>
-          <p:cNvPr id="12" name="Rounded Rectangle 11"/>
-          <p:cNvSpPr/>
-          <p:nvPr/>
-        </p:nvSpPr>
-        <p:spPr>
-          <a:xfrm>
-            <a:off x="4297680" y="1828800"/>
-            <a:ext cx="50292" cy="2971800"/>
-          </a:xfrm>
-          <a:prstGeom prst="roundRect">
-            <a:avLst/>
-          </a:prstGeom>
-          <a:solidFill>
-            <a:srgbClr val="47858A"/>
-          </a:solidFill>
-          <a:ln>
-            <a:noFill/>
-          </a:ln>
-        </p:spPr>
-        <p:style>
-          <a:lnRef idx="1">
-            <a:schemeClr val="accent1"/>
-          </a:lnRef>
-          <a:fillRef idx="3">
-            <a:schemeClr val="accent1"/>
-          </a:fillRef>
-          <a:effectRef idx="2">
-            <a:schemeClr val="accent1"/>
-          </a:effectRef>
-          <a:fontRef idx="minor">
-            <a:schemeClr val="lt1"/>
-          </a:fontRef>
-        </p:style>
-        <p:txBody>
-          <a:bodyPr rtlCol="0" anchor="ctr"/>
-          <a:lstStyle/>
-          <a:p>
-            <a:pPr algn="ctr"/>
-          </a:p>
-        </p:txBody>
-      </p:sp>
-      <p:sp>
-        <p:nvSpPr>
-          <p:cNvPr id="13" name="TextBox 12"/>
+            <a:endParaRPr/>
+          </a:p>
+        </p:txBody>
+      </p:sp>
+      <p:sp>
+        <p:nvSpPr>
+          <p:cNvPr id="11" name="TextBox 10"/>
           <p:cNvSpPr txBox="1"/>
           <p:nvPr/>
         </p:nvSpPr>
         <p:spPr>
           <a:xfrm>
-            <a:off x="4498848" y="2011680"/>
-            <a:ext cx="3218688" cy="548640"/>
+            <a:off x="2980944" y="1828800"/>
+            <a:ext cx="1828800" cy="548640"/>
           </a:xfrm>
           <a:prstGeom prst="rect">
             <a:avLst/>
@@ -5511,7 +5796,7 @@
           <a:noFill/>
         </p:spPr>
         <p:txBody>
-          <a:bodyPr wrap="square" lIns="18288" rIns="18288" tIns="18288">
+          <a:bodyPr wrap="square" lIns="18288" tIns="18288" rIns="18288">
             <a:spAutoFit/>
           </a:bodyPr>
           <a:lstStyle/>
@@ -5520,29 +5805,29 @@
               <a:spcAft>
                 <a:spcPts val="1000"/>
               </a:spcAft>
-              <a:defRPr sz="2100" b="1">
-                <a:solidFill>
-                  <a:srgbClr val="20304B"/>
-                </a:solidFill>
-                <a:latin typeface="맑은 고딕"/>
-              </a:defRPr>
-            </a:pPr>
-            <a:r>
-              <a:t>무엇을 먹을까?</a:t>
-            </a:r>
-          </a:p>
-        </p:txBody>
-      </p:sp>
-      <p:sp>
-        <p:nvSpPr>
-          <p:cNvPr id="14" name="TextBox 13"/>
+              <a:defRPr sz="3200" b="1">
+                <a:solidFill>
+                  <a:srgbClr val="47858A"/>
+                </a:solidFill>
+                <a:latin typeface="맑은 고딕"/>
+              </a:defRPr>
+            </a:pPr>
+            <a:r>
+              <a:t>7,259</a:t>
+            </a:r>
+          </a:p>
+        </p:txBody>
+      </p:sp>
+      <p:sp>
+        <p:nvSpPr>
+          <p:cNvPr id="12" name="TextBox 11"/>
           <p:cNvSpPr txBox="1"/>
           <p:nvPr/>
         </p:nvSpPr>
         <p:spPr>
           <a:xfrm>
-            <a:off x="4498848" y="2697480"/>
-            <a:ext cx="3172968" cy="2103120"/>
+            <a:off x="2980944" y="2468880"/>
+            <a:ext cx="1828800" cy="320040"/>
           </a:xfrm>
           <a:prstGeom prst="rect">
             <a:avLst/>
@@ -5550,7 +5835,7 @@
           <a:noFill/>
         </p:spPr>
         <p:txBody>
-          <a:bodyPr wrap="square" lIns="18288" rIns="18288" tIns="18288">
+          <a:bodyPr wrap="square" lIns="18288" tIns="18288" rIns="18288">
             <a:spAutoFit/>
           </a:bodyPr>
           <a:lstStyle/>
@@ -5559,7 +5844,7 @@
               <a:spcAft>
                 <a:spcPts val="1000"/>
               </a:spcAft>
-              <a:defRPr sz="1700" b="0">
+              <a:defRPr sz="1400" b="0">
                 <a:solidFill>
                   <a:srgbClr val="708097"/>
                 </a:solidFill>
@@ -5567,37 +5852,21 @@
               </a:defRPr>
             </a:pPr>
             <a:r>
-              <a:t>음식 가격과 입점 브랜드,</a:t>
-            </a:r>
-          </a:p>
-          <a:p>
-            <a:pPr>
-              <a:spcAft>
-                <a:spcPts val="1000"/>
-              </a:spcAft>
-              <a:defRPr sz="1700" b="0">
-                <a:solidFill>
-                  <a:srgbClr val="708097"/>
-                </a:solidFill>
-                <a:latin typeface="맑은 고딕"/>
-              </a:defRPr>
-            </a:pPr>
-            <a:r>
-              <a:t>등록 운영시간 확인</a:t>
-            </a:r>
-          </a:p>
-        </p:txBody>
-      </p:sp>
-      <p:sp>
-        <p:nvSpPr>
-          <p:cNvPr id="15" name="Rounded Rectangle 14"/>
+              <a:t>음식 메뉴</a:t>
+            </a:r>
+          </a:p>
+        </p:txBody>
+      </p:sp>
+      <p:sp>
+        <p:nvSpPr>
+          <p:cNvPr id="13" name="Rounded Rectangle 12"/>
           <p:cNvSpPr/>
           <p:nvPr/>
         </p:nvSpPr>
         <p:spPr>
           <a:xfrm>
-            <a:off x="8092440" y="1828800"/>
-            <a:ext cx="3584448" cy="2971800"/>
+            <a:off x="5166360" y="1691640"/>
+            <a:ext cx="2103120" cy="1234440"/>
           </a:xfrm>
           <a:prstGeom prst="roundRect">
             <a:avLst/>
@@ -5628,62 +5897,20 @@
           <a:lstStyle/>
           <a:p>
             <a:pPr algn="ctr"/>
-          </a:p>
-        </p:txBody>
-      </p:sp>
-      <p:sp>
-        <p:nvSpPr>
-          <p:cNvPr id="16" name="Rounded Rectangle 15"/>
-          <p:cNvSpPr/>
-          <p:nvPr/>
-        </p:nvSpPr>
-        <p:spPr>
-          <a:xfrm>
-            <a:off x="8092440" y="1828800"/>
-            <a:ext cx="50292" cy="2971800"/>
-          </a:xfrm>
-          <a:prstGeom prst="roundRect">
-            <a:avLst/>
-          </a:prstGeom>
-          <a:solidFill>
-            <a:srgbClr val="47858A"/>
-          </a:solidFill>
-          <a:ln>
-            <a:noFill/>
-          </a:ln>
-        </p:spPr>
-        <p:style>
-          <a:lnRef idx="1">
-            <a:schemeClr val="accent1"/>
-          </a:lnRef>
-          <a:fillRef idx="3">
-            <a:schemeClr val="accent1"/>
-          </a:fillRef>
-          <a:effectRef idx="2">
-            <a:schemeClr val="accent1"/>
-          </a:effectRef>
-          <a:fontRef idx="minor">
-            <a:schemeClr val="lt1"/>
-          </a:fontRef>
-        </p:style>
-        <p:txBody>
-          <a:bodyPr rtlCol="0" anchor="ctr"/>
-          <a:lstStyle/>
-          <a:p>
-            <a:pPr algn="ctr"/>
-          </a:p>
-        </p:txBody>
-      </p:sp>
-      <p:sp>
-        <p:nvSpPr>
-          <p:cNvPr id="17" name="TextBox 16"/>
+            <a:endParaRPr/>
+          </a:p>
+        </p:txBody>
+      </p:sp>
+      <p:sp>
+        <p:nvSpPr>
+          <p:cNvPr id="14" name="TextBox 13"/>
           <p:cNvSpPr txBox="1"/>
           <p:nvPr/>
         </p:nvSpPr>
         <p:spPr>
           <a:xfrm>
-            <a:off x="8293608" y="2011680"/>
-            <a:ext cx="3218688" cy="548640"/>
+            <a:off x="5312664" y="1828800"/>
+            <a:ext cx="1828800" cy="548640"/>
           </a:xfrm>
           <a:prstGeom prst="rect">
             <a:avLst/>
@@ -5691,7 +5918,7 @@
           <a:noFill/>
         </p:spPr>
         <p:txBody>
-          <a:bodyPr wrap="square" lIns="18288" rIns="18288" tIns="18288">
+          <a:bodyPr wrap="square" lIns="18288" tIns="18288" rIns="18288">
             <a:spAutoFit/>
           </a:bodyPr>
           <a:lstStyle/>
@@ -5700,29 +5927,29 @@
               <a:spcAft>
                 <a:spcPts val="1000"/>
               </a:spcAft>
-              <a:defRPr sz="2100" b="1">
-                <a:solidFill>
-                  <a:srgbClr val="20304B"/>
-                </a:solidFill>
-                <a:latin typeface="맑은 고딕"/>
-              </a:defRPr>
-            </a:pPr>
-            <a:r>
-              <a:t>어느 곳이 나을까?</a:t>
-            </a:r>
-          </a:p>
-        </p:txBody>
-      </p:sp>
-      <p:sp>
-        <p:nvSpPr>
-          <p:cNvPr id="18" name="TextBox 17"/>
+              <a:defRPr sz="3200" b="1">
+                <a:solidFill>
+                  <a:srgbClr val="47858A"/>
+                </a:solidFill>
+                <a:latin typeface="맑은 고딕"/>
+              </a:defRPr>
+            </a:pPr>
+            <a:r>
+              <a:t>253</a:t>
+            </a:r>
+          </a:p>
+        </p:txBody>
+      </p:sp>
+      <p:sp>
+        <p:nvSpPr>
+          <p:cNvPr id="15" name="TextBox 14"/>
           <p:cNvSpPr txBox="1"/>
           <p:nvPr/>
         </p:nvSpPr>
         <p:spPr>
           <a:xfrm>
-            <a:off x="8293608" y="2697480"/>
-            <a:ext cx="3172968" cy="2103120"/>
+            <a:off x="5312664" y="2468880"/>
+            <a:ext cx="1828800" cy="320040"/>
           </a:xfrm>
           <a:prstGeom prst="rect">
             <a:avLst/>
@@ -5730,7 +5957,7 @@
           <a:noFill/>
         </p:spPr>
         <p:txBody>
-          <a:bodyPr wrap="square" lIns="18288" rIns="18288" tIns="18288">
+          <a:bodyPr wrap="square" lIns="18288" tIns="18288" rIns="18288">
             <a:spAutoFit/>
           </a:bodyPr>
           <a:lstStyle/>
@@ -5739,7 +5966,7 @@
               <a:spcAft>
                 <a:spcPts val="1000"/>
               </a:spcAft>
-              <a:defRPr sz="1700" b="0">
+              <a:defRPr sz="1400" b="0">
                 <a:solidFill>
                   <a:srgbClr val="708097"/>
                 </a:solidFill>
@@ -5747,37 +5974,92 @@
               </a:defRPr>
             </a:pPr>
             <a:r>
-              <a:t>같은 음식 가격과 주차 규모,</a:t>
-            </a:r>
-          </a:p>
-          <a:p>
-            <a:pPr>
-              <a:spcAft>
-                <a:spcPts val="1000"/>
-              </a:spcAft>
-              <a:defRPr sz="1700" b="0">
-                <a:solidFill>
-                  <a:srgbClr val="708097"/>
-                </a:solidFill>
-                <a:latin typeface="맑은 고딕"/>
-              </a:defRPr>
-            </a:pPr>
-            <a:r>
-              <a:t>과거 이용량을 나란히 비교</a:t>
-            </a:r>
-          </a:p>
-        </p:txBody>
-      </p:sp>
-      <p:sp>
-        <p:nvSpPr>
-          <p:cNvPr id="19" name="Rounded Rectangle 18"/>
+              <a:t>졸음쉼터</a:t>
+            </a:r>
+          </a:p>
+        </p:txBody>
+      </p:sp>
+      <p:sp>
+        <p:nvSpPr>
+          <p:cNvPr id="16" name="TextBox 15"/>
+          <p:cNvSpPr txBox="1"/>
+          <p:nvPr/>
+        </p:nvSpPr>
+        <p:spPr>
+          <a:xfrm>
+            <a:off x="594360" y="3337560"/>
+            <a:ext cx="6766560" cy="1645920"/>
+          </a:xfrm>
+          <a:prstGeom prst="rect">
+            <a:avLst/>
+          </a:prstGeom>
+          <a:noFill/>
+        </p:spPr>
+        <p:txBody>
+          <a:bodyPr wrap="square" lIns="18288" tIns="18288" rIns="18288">
+            <a:spAutoFit/>
+          </a:bodyPr>
+          <a:lstStyle/>
+          <a:p>
+            <a:pPr>
+              <a:spcAft>
+                <a:spcPts val="1000"/>
+              </a:spcAft>
+              <a:defRPr sz="2000" b="0">
+                <a:solidFill>
+                  <a:srgbClr val="26364A"/>
+                </a:solidFill>
+                <a:latin typeface="맑은 고딕"/>
+              </a:defRPr>
+            </a:pPr>
+            <a:r>
+              <a:t>한국도로공사  ·  기준정보 / 음식 / 브랜드 / 시설</a:t>
+            </a:r>
+          </a:p>
+          <a:p>
+            <a:pPr>
+              <a:spcAft>
+                <a:spcPts val="1000"/>
+              </a:spcAft>
+              <a:defRPr sz="2000" b="0">
+                <a:solidFill>
+                  <a:srgbClr val="26364A"/>
+                </a:solidFill>
+                <a:latin typeface="맑은 고딕"/>
+              </a:defRPr>
+            </a:pPr>
+            <a:r>
+              <a:t>공공데이터포털  ·  쉼터 / 주차 / 과거 이용량</a:t>
+            </a:r>
+          </a:p>
+          <a:p>
+            <a:pPr>
+              <a:spcAft>
+                <a:spcPts val="1000"/>
+              </a:spcAft>
+              <a:defRPr sz="2000" b="0">
+                <a:solidFill>
+                  <a:srgbClr val="26364A"/>
+                </a:solidFill>
+                <a:latin typeface="맑은 고딕"/>
+              </a:defRPr>
+            </a:pPr>
+            <a:r>
+              <a:t>카카오  ·  지도 / 장소 검색 / 자동차 경로</a:t>
+            </a:r>
+          </a:p>
+        </p:txBody>
+      </p:sp>
+      <p:sp>
+        <p:nvSpPr>
+          <p:cNvPr id="17" name="Rounded Rectangle 16"/>
           <p:cNvSpPr/>
           <p:nvPr/>
         </p:nvSpPr>
         <p:spPr>
           <a:xfrm>
-            <a:off x="502920" y="5166360"/>
-            <a:ext cx="11155680" cy="777240"/>
+            <a:off x="7543800" y="1691640"/>
+            <a:ext cx="4114800" cy="4480560"/>
           </a:xfrm>
           <a:prstGeom prst="roundRect">
             <a:avLst/>
@@ -5808,6 +6090,163 @@
           <a:lstStyle/>
           <a:p>
             <a:pPr algn="ctr"/>
+            <a:endParaRPr/>
+          </a:p>
+        </p:txBody>
+      </p:sp>
+      <p:sp>
+        <p:nvSpPr>
+          <p:cNvPr id="18" name="TextBox 17"/>
+          <p:cNvSpPr txBox="1"/>
+          <p:nvPr/>
+        </p:nvSpPr>
+        <p:spPr>
+          <a:xfrm>
+            <a:off x="7772400" y="1920240"/>
+            <a:ext cx="3657600" cy="457200"/>
+          </a:xfrm>
+          <a:prstGeom prst="rect">
+            <a:avLst/>
+          </a:prstGeom>
+          <a:noFill/>
+        </p:spPr>
+        <p:txBody>
+          <a:bodyPr wrap="square" lIns="18288" tIns="18288" rIns="18288">
+            <a:spAutoFit/>
+          </a:bodyPr>
+          <a:lstStyle/>
+          <a:p>
+            <a:pPr>
+              <a:spcAft>
+                <a:spcPts val="1000"/>
+              </a:spcAft>
+              <a:defRPr sz="1800" b="1">
+                <a:solidFill>
+                  <a:srgbClr val="FFFFFF"/>
+                </a:solidFill>
+                <a:latin typeface="맑은 고딕"/>
+              </a:defRPr>
+            </a:pPr>
+            <a:r>
+              <a:t>실제 응답 예시 · 죽전(서울)</a:t>
+            </a:r>
+          </a:p>
+        </p:txBody>
+      </p:sp>
+      <p:sp>
+        <p:nvSpPr>
+          <p:cNvPr id="19" name="TextBox 18"/>
+          <p:cNvSpPr txBox="1"/>
+          <p:nvPr/>
+        </p:nvSpPr>
+        <p:spPr>
+          <a:xfrm>
+            <a:off x="7772400" y="2697480"/>
+            <a:ext cx="3657600" cy="2926080"/>
+          </a:xfrm>
+          <a:prstGeom prst="rect">
+            <a:avLst/>
+          </a:prstGeom>
+          <a:noFill/>
+        </p:spPr>
+        <p:txBody>
+          <a:bodyPr wrap="square" lIns="18288" tIns="18288" rIns="18288">
+            <a:spAutoFit/>
+          </a:bodyPr>
+          <a:lstStyle/>
+          <a:p>
+            <a:pPr>
+              <a:spcAft>
+                <a:spcPts val="1000"/>
+              </a:spcAft>
+              <a:defRPr sz="2100" b="0">
+                <a:solidFill>
+                  <a:srgbClr val="FFFFFF"/>
+                </a:solidFill>
+                <a:latin typeface="맑은 고딕"/>
+              </a:defRPr>
+            </a:pPr>
+            <a:r>
+              <a:t>주차면 수  223면</a:t>
+            </a:r>
+          </a:p>
+          <a:p>
+            <a:pPr>
+              <a:spcAft>
+                <a:spcPts val="1000"/>
+              </a:spcAft>
+              <a:defRPr sz="2100" b="0">
+                <a:solidFill>
+                  <a:srgbClr val="FFFFFF"/>
+                </a:solidFill>
+                <a:latin typeface="맑은 고딕"/>
+              </a:defRPr>
+            </a:pPr>
+            <a:r>
+              <a:t>소형  147 / 대형  68</a:t>
+            </a:r>
+          </a:p>
+          <a:p>
+            <a:pPr>
+              <a:spcAft>
+                <a:spcPts val="1000"/>
+              </a:spcAft>
+              <a:defRPr sz="2100" b="0">
+                <a:solidFill>
+                  <a:srgbClr val="FFFFFF"/>
+                </a:solidFill>
+                <a:latin typeface="맑은 고딕"/>
+              </a:defRPr>
+            </a:pPr>
+            <a:r>
+              <a:t>장애인 전용  8</a:t>
+            </a:r>
+          </a:p>
+          <a:p>
+            <a:pPr>
+              <a:spcAft>
+                <a:spcPts val="1000"/>
+              </a:spcAft>
+              <a:defRPr sz="2100" b="0">
+                <a:solidFill>
+                  <a:srgbClr val="FFFFFF"/>
+                </a:solidFill>
+                <a:latin typeface="맑은 고딕"/>
+              </a:defRPr>
+            </a:pPr>
+            <a:endParaRPr/>
+          </a:p>
+          <a:p>
+            <a:pPr>
+              <a:spcAft>
+                <a:spcPts val="1000"/>
+              </a:spcAft>
+              <a:defRPr sz="2100" b="0">
+                <a:solidFill>
+                  <a:srgbClr val="FFFFFF"/>
+                </a:solidFill>
+                <a:latin typeface="맑은 고딕"/>
+              </a:defRPr>
+            </a:pPr>
+            <a:r>
+              <a:t>자료 기준  2026-07-31</a:t>
+            </a:r>
+          </a:p>
+          <a:p>
+            <a:pPr>
+              <a:spcAft>
+                <a:spcPts val="1000"/>
+              </a:spcAft>
+              <a:defRPr sz="2100" b="0">
+                <a:solidFill>
+                  <a:srgbClr val="FFFFFF"/>
+                </a:solidFill>
+                <a:latin typeface="맑은 고딕"/>
+              </a:defRPr>
+            </a:pPr>
+            <a:r>
+              <a:t>조회 확인  2026-10-28</a:t>
+            </a:r>
           </a:p>
         </p:txBody>
       </p:sp>
@@ -5819,8 +6258,8 @@
         </p:nvSpPr>
         <p:spPr>
           <a:xfrm>
-            <a:off x="777240" y="5349240"/>
-            <a:ext cx="10607040" cy="411480"/>
+            <a:off x="594360" y="5623560"/>
+            <a:ext cx="6675120" cy="457200"/>
           </a:xfrm>
           <a:prstGeom prst="rect">
             <a:avLst/>
@@ -5828,7 +6267,7 @@
           <a:noFill/>
         </p:spPr>
         <p:txBody>
-          <a:bodyPr wrap="square" lIns="18288" rIns="18288" tIns="18288">
+          <a:bodyPr wrap="square" lIns="18288" tIns="18288" rIns="18288">
             <a:spAutoFit/>
           </a:bodyPr>
           <a:lstStyle/>
@@ -5837,15 +6276,15 @@
               <a:spcAft>
                 <a:spcPts val="1000"/>
               </a:spcAft>
-              <a:defRPr sz="2300" b="1">
-                <a:solidFill>
-                  <a:srgbClr val="FFFFFF"/>
-                </a:solidFill>
-                <a:latin typeface="맑은 고딕"/>
-              </a:defRPr>
-            </a:pPr>
-            <a:r>
-              <a:t>출발 전 탐색 → 이동 중 휴식 계획 → 방문할 곳 선택</a:t>
+              <a:defRPr sz="1300" b="0">
+                <a:solidFill>
+                  <a:srgbClr val="708097"/>
+                </a:solidFill>
+                <a:latin typeface="맑은 고딕"/>
+              </a:defRPr>
+            </a:pPr>
+            <a:r>
+              <a:t>수량은 조회 시점 기준 · 등록 정보이며 실시간 상태와 다를 수 있습니다.</a:t>
             </a:r>
           </a:p>
         </p:txBody>
@@ -5858,8 +6297,8 @@
 </p:sld>
 </file>
 
-<file path=ppt/slides/slide3.xml><?xml version="1.0" encoding="utf-8"?>
-<p:sld xmlns:a="http://schemas.openxmlformats.org/drawingml/2006/main" xmlns:p="http://schemas.openxmlformats.org/presentationml/2006/main" xmlns:r="http://schemas.openxmlformats.org/officeDocument/2006/relationships">
+<file path=ppt/slides/slide4.xml><?xml version="1.0" encoding="utf-8"?>
+<p:sld xmlns:a="http://schemas.openxmlformats.org/drawingml/2006/main" xmlns:r="http://schemas.openxmlformats.org/officeDocument/2006/relationships" xmlns:p="http://schemas.openxmlformats.org/presentationml/2006/main">
   <p:cSld>
     <p:bg>
       <p:bgPr>
@@ -5875,7 +6314,14 @@
         <p:cNvGrpSpPr/>
         <p:nvPr/>
       </p:nvGrpSpPr>
-      <p:grpSpPr/>
+      <p:grpSpPr>
+        <a:xfrm>
+          <a:off x="0" y="0"/>
+          <a:ext cx="0" cy="0"/>
+          <a:chOff x="0" y="0"/>
+          <a:chExt cx="0" cy="0"/>
+        </a:xfrm>
+      </p:grpSpPr>
       <p:sp>
         <p:nvSpPr>
           <p:cNvPr id="2" name="TextBox 1"/>
@@ -5893,7 +6339,7 @@
           <a:noFill/>
         </p:spPr>
         <p:txBody>
-          <a:bodyPr wrap="square" lIns="18288" rIns="18288" tIns="18288">
+          <a:bodyPr wrap="square" lIns="18288" tIns="18288" rIns="18288">
             <a:spAutoFit/>
           </a:bodyPr>
           <a:lstStyle/>
@@ -5910,7 +6356,7 @@
               </a:defRPr>
             </a:pPr>
             <a:r>
-              <a:t>02 / DATA SOURCES</a:t>
+              <a:t>03 / CORE EXPERIENCE</a:t>
             </a:r>
           </a:p>
         </p:txBody>
@@ -5932,7 +6378,7 @@
           <a:noFill/>
         </p:spPr>
         <p:txBody>
-          <a:bodyPr wrap="square" lIns="18288" rIns="18288" tIns="18288">
+          <a:bodyPr wrap="square" lIns="18288" tIns="18288" rIns="18288">
             <a:spAutoFit/>
           </a:bodyPr>
           <a:lstStyle/>
@@ -5949,7 +6395,7 @@
               </a:defRPr>
             </a:pPr>
             <a:r>
-              <a:t>흩어진 공공데이터를 휴게소 단위로 연결했습니다</a:t>
+              <a:t>찾기 · 확인하기 · 비교하기로 이어지는 사용 흐름</a:t>
             </a:r>
           </a:p>
         </p:txBody>
@@ -5994,6 +6440,7 @@
           <a:lstStyle/>
           <a:p>
             <a:pPr algn="ctr"/>
+            <a:endParaRPr/>
           </a:p>
         </p:txBody>
       </p:sp>
@@ -6014,7 +6461,7 @@
           <a:noFill/>
         </p:spPr>
         <p:txBody>
-          <a:bodyPr wrap="square" lIns="18288" rIns="18288" tIns="18288">
+          <a:bodyPr wrap="square" lIns="18288" tIns="18288" rIns="18288">
             <a:spAutoFit/>
           </a:bodyPr>
           <a:lstStyle/>
@@ -6053,7 +6500,7 @@
           <a:noFill/>
         </p:spPr>
         <p:txBody>
-          <a:bodyPr wrap="square" lIns="18288" rIns="18288" tIns="18288">
+          <a:bodyPr wrap="square" lIns="18288" tIns="18288" rIns="18288">
             <a:spAutoFit/>
           </a:bodyPr>
           <a:lstStyle/>
@@ -6070,21 +6517,45 @@
               </a:defRPr>
             </a:pPr>
             <a:r>
-              <a:t>03</a:t>
-            </a:r>
-          </a:p>
-        </p:txBody>
-      </p:sp>
-      <p:sp>
-        <p:nvSpPr>
-          <p:cNvPr id="7" name="Rounded Rectangle 6"/>
+              <a:t>04</a:t>
+            </a:r>
+          </a:p>
+        </p:txBody>
+      </p:sp>
+      <p:pic>
+        <p:nvPicPr>
+          <p:cNvPr id="7" name="Picture 6" descr="route-result.png"/>
+          <p:cNvPicPr>
+            <a:picLocks noChangeAspect="1"/>
+          </p:cNvPicPr>
+          <p:nvPr/>
+        </p:nvPicPr>
+        <p:blipFill>
+          <a:blip r:embed="rId3"/>
+          <a:stretch>
+            <a:fillRect/>
+          </a:stretch>
+        </p:blipFill>
+        <p:spPr>
+          <a:xfrm>
+            <a:off x="1001312" y="1645920"/>
+            <a:ext cx="6501294" cy="4526280"/>
+          </a:xfrm>
+          <a:prstGeom prst="rect">
+            <a:avLst/>
+          </a:prstGeom>
+        </p:spPr>
+      </p:pic>
+      <p:sp>
+        <p:nvSpPr>
+          <p:cNvPr id="8" name="Rounded Rectangle 7"/>
           <p:cNvSpPr/>
           <p:nvPr/>
         </p:nvSpPr>
         <p:spPr>
           <a:xfrm>
-            <a:off x="502920" y="1691640"/>
-            <a:ext cx="2103120" cy="1234440"/>
+            <a:off x="8229600" y="1737360"/>
+            <a:ext cx="3429000" cy="1280160"/>
           </a:xfrm>
           <a:prstGeom prst="roundRect">
             <a:avLst/>
@@ -6115,19 +6586,64 @@
           <a:lstStyle/>
           <a:p>
             <a:pPr algn="ctr"/>
-          </a:p>
-        </p:txBody>
-      </p:sp>
-      <p:sp>
-        <p:nvSpPr>
-          <p:cNvPr id="8" name="TextBox 7"/>
+            <a:endParaRPr/>
+          </a:p>
+        </p:txBody>
+      </p:sp>
+      <p:sp>
+        <p:nvSpPr>
+          <p:cNvPr id="9" name="Rounded Rectangle 8"/>
+          <p:cNvSpPr/>
+          <p:nvPr/>
+        </p:nvSpPr>
+        <p:spPr>
+          <a:xfrm>
+            <a:off x="8229600" y="1737360"/>
+            <a:ext cx="50292" cy="1280160"/>
+          </a:xfrm>
+          <a:prstGeom prst="roundRect">
+            <a:avLst/>
+          </a:prstGeom>
+          <a:solidFill>
+            <a:srgbClr val="47858A"/>
+          </a:solidFill>
+          <a:ln>
+            <a:noFill/>
+          </a:ln>
+        </p:spPr>
+        <p:style>
+          <a:lnRef idx="1">
+            <a:schemeClr val="accent1"/>
+          </a:lnRef>
+          <a:fillRef idx="3">
+            <a:schemeClr val="accent1"/>
+          </a:fillRef>
+          <a:effectRef idx="2">
+            <a:schemeClr val="accent1"/>
+          </a:effectRef>
+          <a:fontRef idx="minor">
+            <a:schemeClr val="lt1"/>
+          </a:fontRef>
+        </p:style>
+        <p:txBody>
+          <a:bodyPr rtlCol="0" anchor="ctr"/>
+          <a:lstStyle/>
+          <a:p>
+            <a:pPr algn="ctr"/>
+            <a:endParaRPr/>
+          </a:p>
+        </p:txBody>
+      </p:sp>
+      <p:sp>
+        <p:nvSpPr>
+          <p:cNvPr id="10" name="TextBox 9"/>
           <p:cNvSpPr txBox="1"/>
           <p:nvPr/>
         </p:nvSpPr>
         <p:spPr>
           <a:xfrm>
-            <a:off x="649224" y="1828800"/>
-            <a:ext cx="1828800" cy="548640"/>
+            <a:off x="8430768" y="1920240"/>
+            <a:ext cx="3063240" cy="548640"/>
           </a:xfrm>
           <a:prstGeom prst="rect">
             <a:avLst/>
@@ -6135,7 +6651,7 @@
           <a:noFill/>
         </p:spPr>
         <p:txBody>
-          <a:bodyPr wrap="square" lIns="18288" rIns="18288" tIns="18288">
+          <a:bodyPr wrap="square" lIns="18288" tIns="18288" rIns="18288">
             <a:spAutoFit/>
           </a:bodyPr>
           <a:lstStyle/>
@@ -6144,29 +6660,29 @@
               <a:spcAft>
                 <a:spcPts val="1000"/>
               </a:spcAft>
-              <a:defRPr sz="3200" b="1">
-                <a:solidFill>
-                  <a:srgbClr val="47858A"/>
-                </a:solidFill>
-                <a:latin typeface="맑은 고딕"/>
-              </a:defRPr>
-            </a:pPr>
-            <a:r>
-              <a:t>243</a:t>
-            </a:r>
-          </a:p>
-        </p:txBody>
-      </p:sp>
-      <p:sp>
-        <p:nvSpPr>
-          <p:cNvPr id="9" name="TextBox 8"/>
+              <a:defRPr sz="2100" b="1">
+                <a:solidFill>
+                  <a:srgbClr val="20304B"/>
+                </a:solidFill>
+                <a:latin typeface="맑은 고딕"/>
+              </a:defRPr>
+            </a:pPr>
+            <a:r>
+              <a:t>경로에 맞게 찾기</a:t>
+            </a:r>
+          </a:p>
+        </p:txBody>
+      </p:sp>
+      <p:sp>
+        <p:nvSpPr>
+          <p:cNvPr id="11" name="TextBox 10"/>
           <p:cNvSpPr txBox="1"/>
           <p:nvPr/>
         </p:nvSpPr>
         <p:spPr>
           <a:xfrm>
-            <a:off x="649224" y="2468880"/>
-            <a:ext cx="1828800" cy="320040"/>
+            <a:off x="8430768" y="2606039"/>
+            <a:ext cx="3017520" cy="411479"/>
           </a:xfrm>
           <a:prstGeom prst="rect">
             <a:avLst/>
@@ -6174,7 +6690,7 @@
           <a:noFill/>
         </p:spPr>
         <p:txBody>
-          <a:bodyPr wrap="square" lIns="18288" rIns="18288" tIns="18288">
+          <a:bodyPr wrap="square" lIns="18288" tIns="18288" rIns="18288">
             <a:spAutoFit/>
           </a:bodyPr>
           <a:lstStyle/>
@@ -6183,7 +6699,7 @@
               <a:spcAft>
                 <a:spcPts val="1000"/>
               </a:spcAft>
-              <a:defRPr sz="1400" b="0">
+              <a:defRPr sz="1700" b="0">
                 <a:solidFill>
                   <a:srgbClr val="708097"/>
                 </a:solidFill>
@@ -6191,21 +6707,21 @@
               </a:defRPr>
             </a:pPr>
             <a:r>
-              <a:t>휴게소</a:t>
-            </a:r>
-          </a:p>
-        </p:txBody>
-      </p:sp>
-      <p:sp>
-        <p:nvSpPr>
-          <p:cNvPr id="10" name="Rounded Rectangle 9"/>
+              <a:t>고속도로 · 방향 · 휴식 지점</a:t>
+            </a:r>
+          </a:p>
+        </p:txBody>
+      </p:sp>
+      <p:sp>
+        <p:nvSpPr>
+          <p:cNvPr id="12" name="Rounded Rectangle 11"/>
           <p:cNvSpPr/>
           <p:nvPr/>
         </p:nvSpPr>
         <p:spPr>
           <a:xfrm>
-            <a:off x="2834640" y="1691640"/>
-            <a:ext cx="2103120" cy="1234440"/>
+            <a:off x="8229600" y="3200400"/>
+            <a:ext cx="3429000" cy="1280160"/>
           </a:xfrm>
           <a:prstGeom prst="roundRect">
             <a:avLst/>
@@ -6236,19 +6752,64 @@
           <a:lstStyle/>
           <a:p>
             <a:pPr algn="ctr"/>
-          </a:p>
-        </p:txBody>
-      </p:sp>
-      <p:sp>
-        <p:nvSpPr>
-          <p:cNvPr id="11" name="TextBox 10"/>
+            <a:endParaRPr/>
+          </a:p>
+        </p:txBody>
+      </p:sp>
+      <p:sp>
+        <p:nvSpPr>
+          <p:cNvPr id="13" name="Rounded Rectangle 12"/>
+          <p:cNvSpPr/>
+          <p:nvPr/>
+        </p:nvSpPr>
+        <p:spPr>
+          <a:xfrm>
+            <a:off x="8229600" y="3200400"/>
+            <a:ext cx="50292" cy="1280160"/>
+          </a:xfrm>
+          <a:prstGeom prst="roundRect">
+            <a:avLst/>
+          </a:prstGeom>
+          <a:solidFill>
+            <a:srgbClr val="47858A"/>
+          </a:solidFill>
+          <a:ln>
+            <a:noFill/>
+          </a:ln>
+        </p:spPr>
+        <p:style>
+          <a:lnRef idx="1">
+            <a:schemeClr val="accent1"/>
+          </a:lnRef>
+          <a:fillRef idx="3">
+            <a:schemeClr val="accent1"/>
+          </a:fillRef>
+          <a:effectRef idx="2">
+            <a:schemeClr val="accent1"/>
+          </a:effectRef>
+          <a:fontRef idx="minor">
+            <a:schemeClr val="lt1"/>
+          </a:fontRef>
+        </p:style>
+        <p:txBody>
+          <a:bodyPr rtlCol="0" anchor="ctr"/>
+          <a:lstStyle/>
+          <a:p>
+            <a:pPr algn="ctr"/>
+            <a:endParaRPr/>
+          </a:p>
+        </p:txBody>
+      </p:sp>
+      <p:sp>
+        <p:nvSpPr>
+          <p:cNvPr id="14" name="TextBox 13"/>
           <p:cNvSpPr txBox="1"/>
           <p:nvPr/>
         </p:nvSpPr>
         <p:spPr>
           <a:xfrm>
-            <a:off x="2980944" y="1828800"/>
-            <a:ext cx="1828800" cy="548640"/>
+            <a:off x="8430768" y="3383280"/>
+            <a:ext cx="3063240" cy="548640"/>
           </a:xfrm>
           <a:prstGeom prst="rect">
             <a:avLst/>
@@ -6256,7 +6817,7 @@
           <a:noFill/>
         </p:spPr>
         <p:txBody>
-          <a:bodyPr wrap="square" lIns="18288" rIns="18288" tIns="18288">
+          <a:bodyPr wrap="square" lIns="18288" tIns="18288" rIns="18288">
             <a:spAutoFit/>
           </a:bodyPr>
           <a:lstStyle/>
@@ -6265,29 +6826,29 @@
               <a:spcAft>
                 <a:spcPts val="1000"/>
               </a:spcAft>
-              <a:defRPr sz="3200" b="1">
-                <a:solidFill>
-                  <a:srgbClr val="47858A"/>
-                </a:solidFill>
-                <a:latin typeface="맑은 고딕"/>
-              </a:defRPr>
-            </a:pPr>
-            <a:r>
-              <a:t>7,259</a:t>
-            </a:r>
-          </a:p>
-        </p:txBody>
-      </p:sp>
-      <p:sp>
-        <p:nvSpPr>
-          <p:cNvPr id="12" name="TextBox 11"/>
+              <a:defRPr sz="2100" b="1">
+                <a:solidFill>
+                  <a:srgbClr val="20304B"/>
+                </a:solidFill>
+                <a:latin typeface="맑은 고딕"/>
+              </a:defRPr>
+            </a:pPr>
+            <a:r>
+              <a:t>방문 전에 확인하기</a:t>
+            </a:r>
+          </a:p>
+        </p:txBody>
+      </p:sp>
+      <p:sp>
+        <p:nvSpPr>
+          <p:cNvPr id="15" name="TextBox 14"/>
           <p:cNvSpPr txBox="1"/>
           <p:nvPr/>
         </p:nvSpPr>
         <p:spPr>
           <a:xfrm>
-            <a:off x="2980944" y="2468880"/>
-            <a:ext cx="1828800" cy="320040"/>
+            <a:off x="8430768" y="4069080"/>
+            <a:ext cx="3017520" cy="411479"/>
           </a:xfrm>
           <a:prstGeom prst="rect">
             <a:avLst/>
@@ -6295,7 +6856,7 @@
           <a:noFill/>
         </p:spPr>
         <p:txBody>
-          <a:bodyPr wrap="square" lIns="18288" rIns="18288" tIns="18288">
+          <a:bodyPr wrap="square" lIns="18288" tIns="18288" rIns="18288">
             <a:spAutoFit/>
           </a:bodyPr>
           <a:lstStyle/>
@@ -6304,7 +6865,7 @@
               <a:spcAft>
                 <a:spcPts val="1000"/>
               </a:spcAft>
-              <a:defRPr sz="1400" b="0">
+              <a:defRPr sz="1700" b="0">
                 <a:solidFill>
                   <a:srgbClr val="708097"/>
                 </a:solidFill>
@@ -6312,21 +6873,21 @@
               </a:defRPr>
             </a:pPr>
             <a:r>
-              <a:t>음식 메뉴</a:t>
-            </a:r>
-          </a:p>
-        </p:txBody>
-      </p:sp>
-      <p:sp>
-        <p:nvSpPr>
-          <p:cNvPr id="13" name="Rounded Rectangle 12"/>
+              <a:t>음식 · 브랜드 · 시설 · 위치</a:t>
+            </a:r>
+          </a:p>
+        </p:txBody>
+      </p:sp>
+      <p:sp>
+        <p:nvSpPr>
+          <p:cNvPr id="16" name="Rounded Rectangle 15"/>
           <p:cNvSpPr/>
           <p:nvPr/>
         </p:nvSpPr>
         <p:spPr>
           <a:xfrm>
-            <a:off x="5166360" y="1691640"/>
-            <a:ext cx="2103120" cy="1234440"/>
+            <a:off x="8229600" y="4663440"/>
+            <a:ext cx="3429000" cy="1280160"/>
           </a:xfrm>
           <a:prstGeom prst="roundRect">
             <a:avLst/>
@@ -6357,155 +6918,7 @@
           <a:lstStyle/>
           <a:p>
             <a:pPr algn="ctr"/>
-          </a:p>
-        </p:txBody>
-      </p:sp>
-      <p:sp>
-        <p:nvSpPr>
-          <p:cNvPr id="14" name="TextBox 13"/>
-          <p:cNvSpPr txBox="1"/>
-          <p:nvPr/>
-        </p:nvSpPr>
-        <p:spPr>
-          <a:xfrm>
-            <a:off x="5312664" y="1828800"/>
-            <a:ext cx="1828800" cy="548640"/>
-          </a:xfrm>
-          <a:prstGeom prst="rect">
-            <a:avLst/>
-          </a:prstGeom>
-          <a:noFill/>
-        </p:spPr>
-        <p:txBody>
-          <a:bodyPr wrap="square" lIns="18288" rIns="18288" tIns="18288">
-            <a:spAutoFit/>
-          </a:bodyPr>
-          <a:lstStyle/>
-          <a:p>
-            <a:pPr>
-              <a:spcAft>
-                <a:spcPts val="1000"/>
-              </a:spcAft>
-              <a:defRPr sz="3200" b="1">
-                <a:solidFill>
-                  <a:srgbClr val="47858A"/>
-                </a:solidFill>
-                <a:latin typeface="맑은 고딕"/>
-              </a:defRPr>
-            </a:pPr>
-            <a:r>
-              <a:t>253</a:t>
-            </a:r>
-          </a:p>
-        </p:txBody>
-      </p:sp>
-      <p:sp>
-        <p:nvSpPr>
-          <p:cNvPr id="15" name="TextBox 14"/>
-          <p:cNvSpPr txBox="1"/>
-          <p:nvPr/>
-        </p:nvSpPr>
-        <p:spPr>
-          <a:xfrm>
-            <a:off x="5312664" y="2468880"/>
-            <a:ext cx="1828800" cy="320040"/>
-          </a:xfrm>
-          <a:prstGeom prst="rect">
-            <a:avLst/>
-          </a:prstGeom>
-          <a:noFill/>
-        </p:spPr>
-        <p:txBody>
-          <a:bodyPr wrap="square" lIns="18288" rIns="18288" tIns="18288">
-            <a:spAutoFit/>
-          </a:bodyPr>
-          <a:lstStyle/>
-          <a:p>
-            <a:pPr>
-              <a:spcAft>
-                <a:spcPts val="1000"/>
-              </a:spcAft>
-              <a:defRPr sz="1400" b="0">
-                <a:solidFill>
-                  <a:srgbClr val="708097"/>
-                </a:solidFill>
-                <a:latin typeface="맑은 고딕"/>
-              </a:defRPr>
-            </a:pPr>
-            <a:r>
-              <a:t>졸음쉼터</a:t>
-            </a:r>
-          </a:p>
-        </p:txBody>
-      </p:sp>
-      <p:sp>
-        <p:nvSpPr>
-          <p:cNvPr id="16" name="TextBox 15"/>
-          <p:cNvSpPr txBox="1"/>
-          <p:nvPr/>
-        </p:nvSpPr>
-        <p:spPr>
-          <a:xfrm>
-            <a:off x="594360" y="3337560"/>
-            <a:ext cx="6766560" cy="1645920"/>
-          </a:xfrm>
-          <a:prstGeom prst="rect">
-            <a:avLst/>
-          </a:prstGeom>
-          <a:noFill/>
-        </p:spPr>
-        <p:txBody>
-          <a:bodyPr wrap="square" lIns="18288" rIns="18288" tIns="18288">
-            <a:spAutoFit/>
-          </a:bodyPr>
-          <a:lstStyle/>
-          <a:p>
-            <a:pPr>
-              <a:spcAft>
-                <a:spcPts val="1000"/>
-              </a:spcAft>
-              <a:defRPr sz="2000" b="0">
-                <a:solidFill>
-                  <a:srgbClr val="26364A"/>
-                </a:solidFill>
-                <a:latin typeface="맑은 고딕"/>
-              </a:defRPr>
-            </a:pPr>
-            <a:r>
-              <a:t>한국도로공사  ·  기준정보 / 음식 / 브랜드 / 시설</a:t>
-            </a:r>
-          </a:p>
-          <a:p>
-            <a:pPr>
-              <a:spcAft>
-                <a:spcPts val="1000"/>
-              </a:spcAft>
-              <a:defRPr sz="2000" b="0">
-                <a:solidFill>
-                  <a:srgbClr val="26364A"/>
-                </a:solidFill>
-                <a:latin typeface="맑은 고딕"/>
-              </a:defRPr>
-            </a:pPr>
-            <a:r>
-              <a:t>공공데이터포털  ·  쉼터 / 주차 / 과거 이용량</a:t>
-            </a:r>
-          </a:p>
-          <a:p>
-            <a:pPr>
-              <a:spcAft>
-                <a:spcPts val="1000"/>
-              </a:spcAft>
-              <a:defRPr sz="2000" b="0">
-                <a:solidFill>
-                  <a:srgbClr val="26364A"/>
-                </a:solidFill>
-                <a:latin typeface="맑은 고딕"/>
-              </a:defRPr>
-            </a:pPr>
-            <a:r>
-              <a:t>카카오  ·  지도 / 장소 검색 / 자동차 경로</a:t>
-            </a:r>
+            <a:endParaRPr/>
           </a:p>
         </p:txBody>
       </p:sp>
@@ -6517,14 +6930,14 @@
         </p:nvSpPr>
         <p:spPr>
           <a:xfrm>
-            <a:off x="7543800" y="1691640"/>
-            <a:ext cx="4114800" cy="4480560"/>
+            <a:off x="8229600" y="4663440"/>
+            <a:ext cx="50292" cy="1280160"/>
           </a:xfrm>
           <a:prstGeom prst="roundRect">
             <a:avLst/>
           </a:prstGeom>
           <a:solidFill>
-            <a:srgbClr val="20304B"/>
+            <a:srgbClr val="47858A"/>
           </a:solidFill>
           <a:ln>
             <a:noFill/>
@@ -6549,6 +6962,7 @@
           <a:lstStyle/>
           <a:p>
             <a:pPr algn="ctr"/>
+            <a:endParaRPr/>
           </a:p>
         </p:txBody>
       </p:sp>
@@ -6560,8 +6974,8 @@
         </p:nvSpPr>
         <p:spPr>
           <a:xfrm>
-            <a:off x="7772400" y="1920240"/>
-            <a:ext cx="3657600" cy="457200"/>
+            <a:off x="8430768" y="4846320"/>
+            <a:ext cx="3063240" cy="548640"/>
           </a:xfrm>
           <a:prstGeom prst="rect">
             <a:avLst/>
@@ -6569,7 +6983,7 @@
           <a:noFill/>
         </p:spPr>
         <p:txBody>
-          <a:bodyPr wrap="square" lIns="18288" rIns="18288" tIns="18288">
+          <a:bodyPr wrap="square" lIns="18288" tIns="18288" rIns="18288">
             <a:spAutoFit/>
           </a:bodyPr>
           <a:lstStyle/>
@@ -6578,15 +6992,15 @@
               <a:spcAft>
                 <a:spcPts val="1000"/>
               </a:spcAft>
-              <a:defRPr sz="1800" b="1">
-                <a:solidFill>
-                  <a:srgbClr val="FFFFFF"/>
-                </a:solidFill>
-                <a:latin typeface="맑은 고딕"/>
-              </a:defRPr>
-            </a:pPr>
-            <a:r>
-              <a:t>실제 응답 예시 · 죽전(서울)</a:t>
+              <a:defRPr sz="2100" b="1">
+                <a:solidFill>
+                  <a:srgbClr val="20304B"/>
+                </a:solidFill>
+                <a:latin typeface="맑은 고딕"/>
+              </a:defRPr>
+            </a:pPr>
+            <a:r>
+              <a:t>같은 기준으로 비교하기</a:t>
             </a:r>
           </a:p>
         </p:txBody>
@@ -6599,8 +7013,8 @@
         </p:nvSpPr>
         <p:spPr>
           <a:xfrm>
-            <a:off x="7772400" y="2697480"/>
-            <a:ext cx="3657600" cy="2926080"/>
+            <a:off x="8430768" y="5532120"/>
+            <a:ext cx="3017520" cy="411479"/>
           </a:xfrm>
           <a:prstGeom prst="rect">
             <a:avLst/>
@@ -6608,7 +7022,7 @@
           <a:noFill/>
         </p:spPr>
         <p:txBody>
-          <a:bodyPr wrap="square" lIns="18288" rIns="18288" tIns="18288">
+          <a:bodyPr wrap="square" lIns="18288" tIns="18288" rIns="18288">
             <a:spAutoFit/>
           </a:bodyPr>
           <a:lstStyle/>
@@ -6617,123 +7031,7 @@
               <a:spcAft>
                 <a:spcPts val="1000"/>
               </a:spcAft>
-              <a:defRPr sz="2100" b="0">
-                <a:solidFill>
-                  <a:srgbClr val="FFFFFF"/>
-                </a:solidFill>
-                <a:latin typeface="맑은 고딕"/>
-              </a:defRPr>
-            </a:pPr>
-            <a:r>
-              <a:t>주차면 수  223면</a:t>
-            </a:r>
-          </a:p>
-          <a:p>
-            <a:pPr>
-              <a:spcAft>
-                <a:spcPts val="1000"/>
-              </a:spcAft>
-              <a:defRPr sz="2100" b="0">
-                <a:solidFill>
-                  <a:srgbClr val="FFFFFF"/>
-                </a:solidFill>
-                <a:latin typeface="맑은 고딕"/>
-              </a:defRPr>
-            </a:pPr>
-            <a:r>
-              <a:t>소형  147 / 대형  68</a:t>
-            </a:r>
-          </a:p>
-          <a:p>
-            <a:pPr>
-              <a:spcAft>
-                <a:spcPts val="1000"/>
-              </a:spcAft>
-              <a:defRPr sz="2100" b="0">
-                <a:solidFill>
-                  <a:srgbClr val="FFFFFF"/>
-                </a:solidFill>
-                <a:latin typeface="맑은 고딕"/>
-              </a:defRPr>
-            </a:pPr>
-            <a:r>
-              <a:t>장애인 전용  8</a:t>
-            </a:r>
-          </a:p>
-          <a:p>
-            <a:pPr>
-              <a:spcAft>
-                <a:spcPts val="1000"/>
-              </a:spcAft>
-              <a:defRPr sz="2100" b="0">
-                <a:solidFill>
-                  <a:srgbClr val="FFFFFF"/>
-                </a:solidFill>
-                <a:latin typeface="맑은 고딕"/>
-              </a:defRPr>
-            </a:pPr>
-          </a:p>
-          <a:p>
-            <a:pPr>
-              <a:spcAft>
-                <a:spcPts val="1000"/>
-              </a:spcAft>
-              <a:defRPr sz="2100" b="0">
-                <a:solidFill>
-                  <a:srgbClr val="FFFFFF"/>
-                </a:solidFill>
-                <a:latin typeface="맑은 고딕"/>
-              </a:defRPr>
-            </a:pPr>
-            <a:r>
-              <a:t>자료 기준  2026-07-31</a:t>
-            </a:r>
-          </a:p>
-          <a:p>
-            <a:pPr>
-              <a:spcAft>
-                <a:spcPts val="1000"/>
-              </a:spcAft>
-              <a:defRPr sz="2100" b="0">
-                <a:solidFill>
-                  <a:srgbClr val="FFFFFF"/>
-                </a:solidFill>
-                <a:latin typeface="맑은 고딕"/>
-              </a:defRPr>
-            </a:pPr>
-            <a:r>
-              <a:t>조회 확인  2026-10-28</a:t>
-            </a:r>
-          </a:p>
-        </p:txBody>
-      </p:sp>
-      <p:sp>
-        <p:nvSpPr>
-          <p:cNvPr id="20" name="TextBox 19"/>
-          <p:cNvSpPr txBox="1"/>
-          <p:nvPr/>
-        </p:nvSpPr>
-        <p:spPr>
-          <a:xfrm>
-            <a:off x="594360" y="5623560"/>
-            <a:ext cx="6675120" cy="457200"/>
-          </a:xfrm>
-          <a:prstGeom prst="rect">
-            <a:avLst/>
-          </a:prstGeom>
-          <a:noFill/>
-        </p:spPr>
-        <p:txBody>
-          <a:bodyPr wrap="square" lIns="18288" rIns="18288" tIns="18288">
-            <a:spAutoFit/>
-          </a:bodyPr>
-          <a:lstStyle/>
-          <a:p>
-            <a:pPr>
-              <a:spcAft>
-                <a:spcPts val="1000"/>
-              </a:spcAft>
-              <a:defRPr sz="1300" b="0">
+              <a:defRPr sz="1700" b="0">
                 <a:solidFill>
                   <a:srgbClr val="708097"/>
                 </a:solidFill>
@@ -6741,7 +7039,7 @@
               </a:defRPr>
             </a:pPr>
             <a:r>
-              <a:t>수량은 조회 시점 기준 · 등록 정보이며 실시간 상태와 다를 수 있습니다.</a:t>
+              <a:t>동일 음식 가격 · 주차 규모</a:t>
             </a:r>
           </a:p>
         </p:txBody>
@@ -6754,8 +7052,8 @@
 </p:sld>
 </file>
 
-<file path=ppt/slides/slide4.xml><?xml version="1.0" encoding="utf-8"?>
-<p:sld xmlns:a="http://schemas.openxmlformats.org/drawingml/2006/main" xmlns:p="http://schemas.openxmlformats.org/presentationml/2006/main" xmlns:r="http://schemas.openxmlformats.org/officeDocument/2006/relationships">
+<file path=ppt/slides/slide5.xml><?xml version="1.0" encoding="utf-8"?>
+<p:sld xmlns:a="http://schemas.openxmlformats.org/drawingml/2006/main" xmlns:r="http://schemas.openxmlformats.org/officeDocument/2006/relationships" xmlns:p="http://schemas.openxmlformats.org/presentationml/2006/main">
   <p:cSld>
     <p:bg>
       <p:bgPr>
@@ -6771,7 +7069,14 @@
         <p:cNvGrpSpPr/>
         <p:nvPr/>
       </p:nvGrpSpPr>
-      <p:grpSpPr/>
+      <p:grpSpPr>
+        <a:xfrm>
+          <a:off x="0" y="0"/>
+          <a:ext cx="0" cy="0"/>
+          <a:chOff x="0" y="0"/>
+          <a:chExt cx="0" cy="0"/>
+        </a:xfrm>
+      </p:grpSpPr>
       <p:sp>
         <p:nvSpPr>
           <p:cNvPr id="2" name="TextBox 1"/>
@@ -6789,7 +7094,7 @@
           <a:noFill/>
         </p:spPr>
         <p:txBody>
-          <a:bodyPr wrap="square" lIns="18288" rIns="18288" tIns="18288">
+          <a:bodyPr wrap="square" lIns="18288" tIns="18288" rIns="18288">
             <a:spAutoFit/>
           </a:bodyPr>
           <a:lstStyle/>
@@ -6806,7 +7111,7 @@
               </a:defRPr>
             </a:pPr>
             <a:r>
-              <a:t>03 / CORE EXPERIENCE</a:t>
+              <a:t>04 / AI USE &amp; VERIFICATION</a:t>
             </a:r>
           </a:p>
         </p:txBody>
@@ -6828,7 +7133,7 @@
           <a:noFill/>
         </p:spPr>
         <p:txBody>
-          <a:bodyPr wrap="square" lIns="18288" rIns="18288" tIns="18288">
+          <a:bodyPr wrap="square" lIns="18288" tIns="18288" rIns="18288">
             <a:spAutoFit/>
           </a:bodyPr>
           <a:lstStyle/>
@@ -6845,7 +7150,7 @@
               </a:defRPr>
             </a:pPr>
             <a:r>
-              <a:t>찾기 · 확인하기 · 비교하기로 이어지는 사용 흐름</a:t>
+              <a:t>생성형 AI는 개발 보조에 활용했습니다</a:t>
             </a:r>
           </a:p>
         </p:txBody>
@@ -6890,6 +7195,7 @@
           <a:lstStyle/>
           <a:p>
             <a:pPr algn="ctr"/>
+            <a:endParaRPr/>
           </a:p>
         </p:txBody>
       </p:sp>
@@ -6910,7 +7216,7 @@
           <a:noFill/>
         </p:spPr>
         <p:txBody>
-          <a:bodyPr wrap="square" lIns="18288" rIns="18288" tIns="18288">
+          <a:bodyPr wrap="square" lIns="18288" tIns="18288" rIns="18288">
             <a:spAutoFit/>
           </a:bodyPr>
           <a:lstStyle/>
@@ -6949,7 +7255,7 @@
           <a:noFill/>
         </p:spPr>
         <p:txBody>
-          <a:bodyPr wrap="square" lIns="18288" rIns="18288" tIns="18288">
+          <a:bodyPr wrap="square" lIns="18288" tIns="18288" rIns="18288">
             <a:spAutoFit/>
           </a:bodyPr>
           <a:lstStyle/>
@@ -6966,45 +7272,21 @@
               </a:defRPr>
             </a:pPr>
             <a:r>
-              <a:t>04</a:t>
-            </a:r>
-          </a:p>
-        </p:txBody>
-      </p:sp>
-      <p:pic>
-        <p:nvPicPr>
-          <p:cNvPr id="7" name="Picture 6" descr="route-result.png"/>
-          <p:cNvPicPr>
-            <a:picLocks noChangeAspect="1"/>
-          </p:cNvPicPr>
-          <p:nvPr/>
-        </p:nvPicPr>
-        <p:blipFill>
-          <a:blip r:embed="rId3"/>
-          <a:stretch>
-            <a:fillRect/>
-          </a:stretch>
-        </p:blipFill>
-        <p:spPr>
-          <a:xfrm>
-            <a:off x="1001312" y="1645920"/>
-            <a:ext cx="6501294" cy="4526280"/>
-          </a:xfrm>
-          <a:prstGeom prst="rect">
-            <a:avLst/>
-          </a:prstGeom>
-        </p:spPr>
-      </p:pic>
-      <p:sp>
-        <p:nvSpPr>
-          <p:cNvPr id="8" name="Rounded Rectangle 7"/>
+              <a:t>05</a:t>
+            </a:r>
+          </a:p>
+        </p:txBody>
+      </p:sp>
+      <p:sp>
+        <p:nvSpPr>
+          <p:cNvPr id="7" name="Rounded Rectangle 6"/>
           <p:cNvSpPr/>
           <p:nvPr/>
         </p:nvSpPr>
         <p:spPr>
           <a:xfrm>
-            <a:off x="8229600" y="1737360"/>
-            <a:ext cx="3429000" cy="1280160"/>
+            <a:off x="502920" y="1737360"/>
+            <a:ext cx="6812280" cy="1828800"/>
           </a:xfrm>
           <a:prstGeom prst="roundRect">
             <a:avLst/>
@@ -7035,19 +7317,20 @@
           <a:lstStyle/>
           <a:p>
             <a:pPr algn="ctr"/>
-          </a:p>
-        </p:txBody>
-      </p:sp>
-      <p:sp>
-        <p:nvSpPr>
-          <p:cNvPr id="9" name="Rounded Rectangle 8"/>
+            <a:endParaRPr/>
+          </a:p>
+        </p:txBody>
+      </p:sp>
+      <p:sp>
+        <p:nvSpPr>
+          <p:cNvPr id="8" name="Rounded Rectangle 7"/>
           <p:cNvSpPr/>
           <p:nvPr/>
         </p:nvSpPr>
         <p:spPr>
           <a:xfrm>
-            <a:off x="8229600" y="1737360"/>
-            <a:ext cx="50292" cy="1280160"/>
+            <a:off x="502920" y="1737360"/>
+            <a:ext cx="50292" cy="1828800"/>
           </a:xfrm>
           <a:prstGeom prst="roundRect">
             <a:avLst/>
@@ -7078,6 +7361,46 @@
           <a:lstStyle/>
           <a:p>
             <a:pPr algn="ctr"/>
+            <a:endParaRPr/>
+          </a:p>
+        </p:txBody>
+      </p:sp>
+      <p:sp>
+        <p:nvSpPr>
+          <p:cNvPr id="9" name="TextBox 8"/>
+          <p:cNvSpPr txBox="1"/>
+          <p:nvPr/>
+        </p:nvSpPr>
+        <p:spPr>
+          <a:xfrm>
+            <a:off x="704088" y="1920240"/>
+            <a:ext cx="6446520" cy="548640"/>
+          </a:xfrm>
+          <a:prstGeom prst="rect">
+            <a:avLst/>
+          </a:prstGeom>
+          <a:noFill/>
+        </p:spPr>
+        <p:txBody>
+          <a:bodyPr wrap="square" lIns="18288" tIns="18288" rIns="18288">
+            <a:spAutoFit/>
+          </a:bodyPr>
+          <a:lstStyle/>
+          <a:p>
+            <a:pPr>
+              <a:spcAft>
+                <a:spcPts val="1000"/>
+              </a:spcAft>
+              <a:defRPr sz="2100" b="1">
+                <a:solidFill>
+                  <a:srgbClr val="20304B"/>
+                </a:solidFill>
+                <a:latin typeface="맑은 고딕"/>
+              </a:defRPr>
+            </a:pPr>
+            <a:r>
+              <a:t>실제 개발 요청 ①</a:t>
+            </a:r>
           </a:p>
         </p:txBody>
       </p:sp>
@@ -7089,8 +7412,8 @@
         </p:nvSpPr>
         <p:spPr>
           <a:xfrm>
-            <a:off x="8430768" y="1920240"/>
-            <a:ext cx="3063240" cy="548640"/>
+            <a:off x="704088" y="2606039"/>
+            <a:ext cx="6400800" cy="960120"/>
           </a:xfrm>
           <a:prstGeom prst="rect">
             <a:avLst/>
@@ -7098,7 +7421,7 @@
           <a:noFill/>
         </p:spPr>
         <p:txBody>
-          <a:bodyPr wrap="square" lIns="18288" rIns="18288" tIns="18288">
+          <a:bodyPr wrap="square" lIns="18288" tIns="18288" rIns="18288">
             <a:spAutoFit/>
           </a:bodyPr>
           <a:lstStyle/>
@@ -7107,45 +7430,6 @@
               <a:spcAft>
                 <a:spcPts val="1000"/>
               </a:spcAft>
-              <a:defRPr sz="2100" b="1">
-                <a:solidFill>
-                  <a:srgbClr val="20304B"/>
-                </a:solidFill>
-                <a:latin typeface="맑은 고딕"/>
-              </a:defRPr>
-            </a:pPr>
-            <a:r>
-              <a:t>경로에 맞게 찾기</a:t>
-            </a:r>
-          </a:p>
-        </p:txBody>
-      </p:sp>
-      <p:sp>
-        <p:nvSpPr>
-          <p:cNvPr id="11" name="TextBox 10"/>
-          <p:cNvSpPr txBox="1"/>
-          <p:nvPr/>
-        </p:nvSpPr>
-        <p:spPr>
-          <a:xfrm>
-            <a:off x="8430768" y="2606039"/>
-            <a:ext cx="3017520" cy="411479"/>
-          </a:xfrm>
-          <a:prstGeom prst="rect">
-            <a:avLst/>
-          </a:prstGeom>
-          <a:noFill/>
-        </p:spPr>
-        <p:txBody>
-          <a:bodyPr wrap="square" lIns="18288" rIns="18288" tIns="18288">
-            <a:spAutoFit/>
-          </a:bodyPr>
-          <a:lstStyle/>
-          <a:p>
-            <a:pPr>
-              <a:spcAft>
-                <a:spcPts val="1000"/>
-              </a:spcAft>
               <a:defRPr sz="1700" b="0">
                 <a:solidFill>
                   <a:srgbClr val="708097"/>
@@ -7154,21 +7438,21 @@
               </a:defRPr>
             </a:pPr>
             <a:r>
-              <a:t>고속도로 · 방향 · 휴식 지점</a:t>
-            </a:r>
-          </a:p>
-        </p:txBody>
-      </p:sp>
-      <p:sp>
-        <p:nvSpPr>
-          <p:cNvPr id="12" name="Rounded Rectangle 11"/>
+              <a:t>“사용자가 사용하기 쉽도록 … 무조건 반응형으로 만들어야 해.”</a:t>
+            </a:r>
+          </a:p>
+        </p:txBody>
+      </p:sp>
+      <p:sp>
+        <p:nvSpPr>
+          <p:cNvPr id="11" name="Rounded Rectangle 10"/>
           <p:cNvSpPr/>
           <p:nvPr/>
         </p:nvSpPr>
         <p:spPr>
           <a:xfrm>
-            <a:off x="8229600" y="3200400"/>
-            <a:ext cx="3429000" cy="1280160"/>
+            <a:off x="502920" y="3749039"/>
+            <a:ext cx="6812280" cy="1920240"/>
           </a:xfrm>
           <a:prstGeom prst="roundRect">
             <a:avLst/>
@@ -7199,19 +7483,20 @@
           <a:lstStyle/>
           <a:p>
             <a:pPr algn="ctr"/>
-          </a:p>
-        </p:txBody>
-      </p:sp>
-      <p:sp>
-        <p:nvSpPr>
-          <p:cNvPr id="13" name="Rounded Rectangle 12"/>
+            <a:endParaRPr/>
+          </a:p>
+        </p:txBody>
+      </p:sp>
+      <p:sp>
+        <p:nvSpPr>
+          <p:cNvPr id="12" name="Rounded Rectangle 11"/>
           <p:cNvSpPr/>
           <p:nvPr/>
         </p:nvSpPr>
         <p:spPr>
           <a:xfrm>
-            <a:off x="8229600" y="3200400"/>
-            <a:ext cx="50292" cy="1280160"/>
+            <a:off x="502920" y="3749039"/>
+            <a:ext cx="50292" cy="1920240"/>
           </a:xfrm>
           <a:prstGeom prst="roundRect">
             <a:avLst/>
@@ -7242,6 +7527,46 @@
           <a:lstStyle/>
           <a:p>
             <a:pPr algn="ctr"/>
+            <a:endParaRPr/>
+          </a:p>
+        </p:txBody>
+      </p:sp>
+      <p:sp>
+        <p:nvSpPr>
+          <p:cNvPr id="13" name="TextBox 12"/>
+          <p:cNvSpPr txBox="1"/>
+          <p:nvPr/>
+        </p:nvSpPr>
+        <p:spPr>
+          <a:xfrm>
+            <a:off x="704088" y="3931920"/>
+            <a:ext cx="6446520" cy="548640"/>
+          </a:xfrm>
+          <a:prstGeom prst="rect">
+            <a:avLst/>
+          </a:prstGeom>
+          <a:noFill/>
+        </p:spPr>
+        <p:txBody>
+          <a:bodyPr wrap="square" lIns="18288" tIns="18288" rIns="18288">
+            <a:spAutoFit/>
+          </a:bodyPr>
+          <a:lstStyle/>
+          <a:p>
+            <a:pPr>
+              <a:spcAft>
+                <a:spcPts val="1000"/>
+              </a:spcAft>
+              <a:defRPr sz="2100" b="1">
+                <a:solidFill>
+                  <a:srgbClr val="20304B"/>
+                </a:solidFill>
+                <a:latin typeface="맑은 고딕"/>
+              </a:defRPr>
+            </a:pPr>
+            <a:r>
+              <a:t>실제 개발 요청 ②</a:t>
+            </a:r>
           </a:p>
         </p:txBody>
       </p:sp>
@@ -7253,8 +7578,8 @@
         </p:nvSpPr>
         <p:spPr>
           <a:xfrm>
-            <a:off x="8430768" y="3383280"/>
-            <a:ext cx="3063240" cy="548640"/>
+            <a:off x="704088" y="4617720"/>
+            <a:ext cx="6400800" cy="1051560"/>
           </a:xfrm>
           <a:prstGeom prst="rect">
             <a:avLst/>
@@ -7262,7 +7587,7 @@
           <a:noFill/>
         </p:spPr>
         <p:txBody>
-          <a:bodyPr wrap="square" lIns="18288" rIns="18288" tIns="18288">
+          <a:bodyPr wrap="square" lIns="18288" tIns="18288" rIns="18288">
             <a:spAutoFit/>
           </a:bodyPr>
           <a:lstStyle/>
@@ -7271,45 +7596,6 @@
               <a:spcAft>
                 <a:spcPts val="1000"/>
               </a:spcAft>
-              <a:defRPr sz="2100" b="1">
-                <a:solidFill>
-                  <a:srgbClr val="20304B"/>
-                </a:solidFill>
-                <a:latin typeface="맑은 고딕"/>
-              </a:defRPr>
-            </a:pPr>
-            <a:r>
-              <a:t>방문 전에 확인하기</a:t>
-            </a:r>
-          </a:p>
-        </p:txBody>
-      </p:sp>
-      <p:sp>
-        <p:nvSpPr>
-          <p:cNvPr id="15" name="TextBox 14"/>
-          <p:cNvSpPr txBox="1"/>
-          <p:nvPr/>
-        </p:nvSpPr>
-        <p:spPr>
-          <a:xfrm>
-            <a:off x="8430768" y="4069080"/>
-            <a:ext cx="3017520" cy="411479"/>
-          </a:xfrm>
-          <a:prstGeom prst="rect">
-            <a:avLst/>
-          </a:prstGeom>
-          <a:noFill/>
-        </p:spPr>
-        <p:txBody>
-          <a:bodyPr wrap="square" lIns="18288" rIns="18288" tIns="18288">
-            <a:spAutoFit/>
-          </a:bodyPr>
-          <a:lstStyle/>
-          <a:p>
-            <a:pPr>
-              <a:spcAft>
-                <a:spcPts val="1000"/>
-              </a:spcAft>
               <a:defRPr sz="1700" b="0">
                 <a:solidFill>
                   <a:srgbClr val="708097"/>
@@ -7318,27 +7604,43 @@
               </a:defRPr>
             </a:pPr>
             <a:r>
-              <a:t>음식 · 브랜드 · 시설 · 위치</a:t>
-            </a:r>
-          </a:p>
-        </p:txBody>
-      </p:sp>
-      <p:sp>
-        <p:nvSpPr>
-          <p:cNvPr id="16" name="Rounded Rectangle 15"/>
+              <a:t>“출발-도착을 입력하면 어떤 고속도로를 타는지 …</a:t>
+            </a:r>
+          </a:p>
+          <a:p>
+            <a:pPr>
+              <a:spcAft>
+                <a:spcPts val="1000"/>
+              </a:spcAft>
+              <a:defRPr sz="1700" b="0">
+                <a:solidFill>
+                  <a:srgbClr val="708097"/>
+                </a:solidFill>
+                <a:latin typeface="맑은 고딕"/>
+              </a:defRPr>
+            </a:pPr>
+            <a:r>
+              <a:t>휴게소 … 졸음쉼터 … 정보를 출력해줘.”</a:t>
+            </a:r>
+          </a:p>
+        </p:txBody>
+      </p:sp>
+      <p:sp>
+        <p:nvSpPr>
+          <p:cNvPr id="15" name="Rounded Rectangle 14"/>
           <p:cNvSpPr/>
           <p:nvPr/>
         </p:nvSpPr>
         <p:spPr>
           <a:xfrm>
-            <a:off x="8229600" y="4663440"/>
-            <a:ext cx="3429000" cy="1280160"/>
+            <a:off x="7589520" y="1737360"/>
+            <a:ext cx="4069080" cy="3931920"/>
           </a:xfrm>
           <a:prstGeom prst="roundRect">
             <a:avLst/>
           </a:prstGeom>
           <a:solidFill>
-            <a:srgbClr val="FFFFFF"/>
+            <a:srgbClr val="20304B"/>
           </a:solidFill>
           <a:ln>
             <a:noFill/>
@@ -7363,62 +7665,20 @@
           <a:lstStyle/>
           <a:p>
             <a:pPr algn="ctr"/>
-          </a:p>
-        </p:txBody>
-      </p:sp>
-      <p:sp>
-        <p:nvSpPr>
-          <p:cNvPr id="17" name="Rounded Rectangle 16"/>
-          <p:cNvSpPr/>
-          <p:nvPr/>
-        </p:nvSpPr>
-        <p:spPr>
-          <a:xfrm>
-            <a:off x="8229600" y="4663440"/>
-            <a:ext cx="50292" cy="1280160"/>
-          </a:xfrm>
-          <a:prstGeom prst="roundRect">
-            <a:avLst/>
-          </a:prstGeom>
-          <a:solidFill>
-            <a:srgbClr val="47858A"/>
-          </a:solidFill>
-          <a:ln>
-            <a:noFill/>
-          </a:ln>
-        </p:spPr>
-        <p:style>
-          <a:lnRef idx="1">
-            <a:schemeClr val="accent1"/>
-          </a:lnRef>
-          <a:fillRef idx="3">
-            <a:schemeClr val="accent1"/>
-          </a:fillRef>
-          <a:effectRef idx="2">
-            <a:schemeClr val="accent1"/>
-          </a:effectRef>
-          <a:fontRef idx="minor">
-            <a:schemeClr val="lt1"/>
-          </a:fontRef>
-        </p:style>
-        <p:txBody>
-          <a:bodyPr rtlCol="0" anchor="ctr"/>
-          <a:lstStyle/>
-          <a:p>
-            <a:pPr algn="ctr"/>
-          </a:p>
-        </p:txBody>
-      </p:sp>
-      <p:sp>
-        <p:nvSpPr>
-          <p:cNvPr id="18" name="TextBox 17"/>
+            <a:endParaRPr/>
+          </a:p>
+        </p:txBody>
+      </p:sp>
+      <p:sp>
+        <p:nvSpPr>
+          <p:cNvPr id="16" name="TextBox 15"/>
           <p:cNvSpPr txBox="1"/>
           <p:nvPr/>
         </p:nvSpPr>
         <p:spPr>
           <a:xfrm>
-            <a:off x="8430768" y="4846320"/>
-            <a:ext cx="3063240" cy="548640"/>
+            <a:off x="7863840" y="2057400"/>
+            <a:ext cx="3520440" cy="2560320"/>
           </a:xfrm>
           <a:prstGeom prst="rect">
             <a:avLst/>
@@ -7426,7 +7686,7 @@
           <a:noFill/>
         </p:spPr>
         <p:txBody>
-          <a:bodyPr wrap="square" lIns="18288" rIns="18288" tIns="18288">
+          <a:bodyPr wrap="square" lIns="18288" tIns="18288" rIns="18288">
             <a:spAutoFit/>
           </a:bodyPr>
           <a:lstStyle/>
@@ -7435,29 +7695,93 @@
               <a:spcAft>
                 <a:spcPts val="1000"/>
               </a:spcAft>
-              <a:defRPr sz="2100" b="1">
-                <a:solidFill>
-                  <a:srgbClr val="20304B"/>
-                </a:solidFill>
-                <a:latin typeface="맑은 고딕"/>
-              </a:defRPr>
-            </a:pPr>
-            <a:r>
-              <a:t>같은 기준으로 비교하기</a:t>
-            </a:r>
-          </a:p>
-        </p:txBody>
-      </p:sp>
-      <p:sp>
-        <p:nvSpPr>
-          <p:cNvPr id="19" name="TextBox 18"/>
+              <a:defRPr sz="2300" b="1">
+                <a:solidFill>
+                  <a:srgbClr val="FFFFFF"/>
+                </a:solidFill>
+                <a:latin typeface="맑은 고딕"/>
+              </a:defRPr>
+            </a:pPr>
+            <a:r>
+              <a:t>요구사항 입력</a:t>
+            </a:r>
+          </a:p>
+          <a:p>
+            <a:pPr>
+              <a:spcAft>
+                <a:spcPts val="1000"/>
+              </a:spcAft>
+              <a:defRPr sz="2300" b="1">
+                <a:solidFill>
+                  <a:srgbClr val="FFFFFF"/>
+                </a:solidFill>
+                <a:latin typeface="맑은 고딕"/>
+              </a:defRPr>
+            </a:pPr>
+            <a:r>
+              <a:t>↓</a:t>
+            </a:r>
+          </a:p>
+          <a:p>
+            <a:pPr>
+              <a:spcAft>
+                <a:spcPts val="1000"/>
+              </a:spcAft>
+              <a:defRPr sz="2300" b="1">
+                <a:solidFill>
+                  <a:srgbClr val="FFFFFF"/>
+                </a:solidFill>
+                <a:latin typeface="맑은 고딕"/>
+              </a:defRPr>
+            </a:pPr>
+            <a:r>
+              <a:t>Codex · 코드 / UI 수정</a:t>
+            </a:r>
+          </a:p>
+          <a:p>
+            <a:pPr>
+              <a:spcAft>
+                <a:spcPts val="1000"/>
+              </a:spcAft>
+              <a:defRPr sz="2300" b="1">
+                <a:solidFill>
+                  <a:srgbClr val="FFFFFF"/>
+                </a:solidFill>
+                <a:latin typeface="맑은 고딕"/>
+              </a:defRPr>
+            </a:pPr>
+            <a:r>
+              <a:t>↓</a:t>
+            </a:r>
+          </a:p>
+          <a:p>
+            <a:pPr>
+              <a:spcAft>
+                <a:spcPts val="1000"/>
+              </a:spcAft>
+              <a:defRPr sz="2300" b="1">
+                <a:solidFill>
+                  <a:srgbClr val="FFFFFF"/>
+                </a:solidFill>
+                <a:latin typeface="맑은 고딕"/>
+              </a:defRPr>
+            </a:pPr>
+            <a:r>
+              <a:t>실제 응답 · 테스트 확인</a:t>
+            </a:r>
+          </a:p>
+        </p:txBody>
+      </p:sp>
+      <p:sp>
+        <p:nvSpPr>
+          <p:cNvPr id="17" name="TextBox 16"/>
           <p:cNvSpPr txBox="1"/>
           <p:nvPr/>
         </p:nvSpPr>
         <p:spPr>
           <a:xfrm>
-            <a:off x="8430768" y="5532120"/>
-            <a:ext cx="3017520" cy="411479"/>
+            <a:off x="7863840" y="5029200"/>
+            <a:ext cx="3566160" cy="457200"/>
           </a:xfrm>
           <a:prstGeom prst="rect">
             <a:avLst/>
@@ -7465,7 +7789,7 @@
           <a:noFill/>
         </p:spPr>
         <p:txBody>
-          <a:bodyPr wrap="square" lIns="18288" rIns="18288" tIns="18288">
+          <a:bodyPr wrap="square" lIns="18288" tIns="18288" rIns="18288">
             <a:spAutoFit/>
           </a:bodyPr>
           <a:lstStyle/>
@@ -7474,15 +7798,15 @@
               <a:spcAft>
                 <a:spcPts val="1000"/>
               </a:spcAft>
-              <a:defRPr sz="1700" b="0">
-                <a:solidFill>
-                  <a:srgbClr val="708097"/>
-                </a:solidFill>
-                <a:latin typeface="맑은 고딕"/>
-              </a:defRPr>
-            </a:pPr>
-            <a:r>
-              <a:t>동일 음식 가격 · 주차 규모</a:t>
+              <a:defRPr sz="1500" b="1">
+                <a:solidFill>
+                  <a:srgbClr val="F0BC5E"/>
+                </a:solidFill>
+                <a:latin typeface="맑은 고딕"/>
+              </a:defRPr>
+            </a:pPr>
+            <a:r>
+              <a:t>앱 내부 AI 추천 기능은 미구현</a:t>
             </a:r>
           </a:p>
         </p:txBody>
@@ -7495,8 +7819,8 @@
 </p:sld>
 </file>
 
-<file path=ppt/slides/slide5.xml><?xml version="1.0" encoding="utf-8"?>
-<p:sld xmlns:a="http://schemas.openxmlformats.org/drawingml/2006/main" xmlns:p="http://schemas.openxmlformats.org/presentationml/2006/main" xmlns:r="http://schemas.openxmlformats.org/officeDocument/2006/relationships">
+<file path=ppt/slides/slide6.xml><?xml version="1.0" encoding="utf-8"?>
+<p:sld xmlns:a="http://schemas.openxmlformats.org/drawingml/2006/main" xmlns:r="http://schemas.openxmlformats.org/officeDocument/2006/relationships" xmlns:p="http://schemas.openxmlformats.org/presentationml/2006/main">
   <p:cSld>
     <p:bg>
       <p:bgPr>
@@ -7512,7 +7836,14 @@
         <p:cNvGrpSpPr/>
         <p:nvPr/>
       </p:nvGrpSpPr>
-      <p:grpSpPr/>
+      <p:grpSpPr>
+        <a:xfrm>
+          <a:off x="0" y="0"/>
+          <a:ext cx="0" cy="0"/>
+          <a:chOff x="0" y="0"/>
+          <a:chExt cx="0" cy="0"/>
+        </a:xfrm>
+      </p:grpSpPr>
       <p:sp>
         <p:nvSpPr>
           <p:cNvPr id="2" name="TextBox 1"/>
@@ -7530,7 +7861,7 @@
           <a:noFill/>
         </p:spPr>
         <p:txBody>
-          <a:bodyPr wrap="square" lIns="18288" rIns="18288" tIns="18288">
+          <a:bodyPr wrap="square" lIns="18288" tIns="18288" rIns="18288">
             <a:spAutoFit/>
           </a:bodyPr>
           <a:lstStyle/>
@@ -7547,7 +7878,7 @@
               </a:defRPr>
             </a:pPr>
             <a:r>
-              <a:t>04 / AI USE &amp; VERIFICATION</a:t>
+              <a:t>05 / UI DESIGN</a:t>
             </a:r>
           </a:p>
         </p:txBody>
@@ -7569,7 +7900,7 @@
           <a:noFill/>
         </p:spPr>
         <p:txBody>
-          <a:bodyPr wrap="square" lIns="18288" rIns="18288" tIns="18288">
+          <a:bodyPr wrap="square" lIns="18288" tIns="18288" rIns="18288">
             <a:spAutoFit/>
           </a:bodyPr>
           <a:lstStyle/>
@@ -7586,7 +7917,7 @@
               </a:defRPr>
             </a:pPr>
             <a:r>
-              <a:t>생성형 AI는 개발 보조에 활용했습니다</a:t>
+              <a:t>정보의 우선순위를 정리하고 모바일까지 맞췄습니다</a:t>
             </a:r>
           </a:p>
         </p:txBody>
@@ -7631,6 +7962,7 @@
           <a:lstStyle/>
           <a:p>
             <a:pPr algn="ctr"/>
+            <a:endParaRPr/>
           </a:p>
         </p:txBody>
       </p:sp>
@@ -7651,7 +7983,7 @@
           <a:noFill/>
         </p:spPr>
         <p:txBody>
-          <a:bodyPr wrap="square" lIns="18288" rIns="18288" tIns="18288">
+          <a:bodyPr wrap="square" lIns="18288" tIns="18288" rIns="18288">
             <a:spAutoFit/>
           </a:bodyPr>
           <a:lstStyle/>
@@ -7690,7 +8022,7 @@
           <a:noFill/>
         </p:spPr>
         <p:txBody>
-          <a:bodyPr wrap="square" lIns="18288" rIns="18288" tIns="18288">
+          <a:bodyPr wrap="square" lIns="18288" tIns="18288" rIns="18288">
             <a:spAutoFit/>
           </a:bodyPr>
           <a:lstStyle/>
@@ -7707,107 +8039,21 @@
               </a:defRPr>
             </a:pPr>
             <a:r>
-              <a:t>05</a:t>
-            </a:r>
-          </a:p>
-        </p:txBody>
-      </p:sp>
-      <p:sp>
-        <p:nvSpPr>
-          <p:cNvPr id="7" name="Rounded Rectangle 6"/>
-          <p:cNvSpPr/>
-          <p:nvPr/>
-        </p:nvSpPr>
-        <p:spPr>
-          <a:xfrm>
-            <a:off x="502920" y="1737360"/>
-            <a:ext cx="6812280" cy="1828800"/>
-          </a:xfrm>
-          <a:prstGeom prst="roundRect">
-            <a:avLst/>
-          </a:prstGeom>
-          <a:solidFill>
-            <a:srgbClr val="FFFFFF"/>
-          </a:solidFill>
-          <a:ln>
-            <a:noFill/>
-          </a:ln>
-        </p:spPr>
-        <p:style>
-          <a:lnRef idx="1">
-            <a:schemeClr val="accent1"/>
-          </a:lnRef>
-          <a:fillRef idx="3">
-            <a:schemeClr val="accent1"/>
-          </a:fillRef>
-          <a:effectRef idx="2">
-            <a:schemeClr val="accent1"/>
-          </a:effectRef>
-          <a:fontRef idx="minor">
-            <a:schemeClr val="lt1"/>
-          </a:fontRef>
-        </p:style>
-        <p:txBody>
-          <a:bodyPr rtlCol="0" anchor="ctr"/>
-          <a:lstStyle/>
-          <a:p>
-            <a:pPr algn="ctr"/>
-          </a:p>
-        </p:txBody>
-      </p:sp>
-      <p:sp>
-        <p:nvSpPr>
-          <p:cNvPr id="8" name="Rounded Rectangle 7"/>
-          <p:cNvSpPr/>
-          <p:nvPr/>
-        </p:nvSpPr>
-        <p:spPr>
-          <a:xfrm>
-            <a:off x="502920" y="1737360"/>
-            <a:ext cx="50292" cy="1828800"/>
-          </a:xfrm>
-          <a:prstGeom prst="roundRect">
-            <a:avLst/>
-          </a:prstGeom>
-          <a:solidFill>
-            <a:srgbClr val="47858A"/>
-          </a:solidFill>
-          <a:ln>
-            <a:noFill/>
-          </a:ln>
-        </p:spPr>
-        <p:style>
-          <a:lnRef idx="1">
-            <a:schemeClr val="accent1"/>
-          </a:lnRef>
-          <a:fillRef idx="3">
-            <a:schemeClr val="accent1"/>
-          </a:fillRef>
-          <a:effectRef idx="2">
-            <a:schemeClr val="accent1"/>
-          </a:effectRef>
-          <a:fontRef idx="minor">
-            <a:schemeClr val="lt1"/>
-          </a:fontRef>
-        </p:style>
-        <p:txBody>
-          <a:bodyPr rtlCol="0" anchor="ctr"/>
-          <a:lstStyle/>
-          <a:p>
-            <a:pPr algn="ctr"/>
-          </a:p>
-        </p:txBody>
-      </p:sp>
-      <p:sp>
-        <p:nvSpPr>
-          <p:cNvPr id="9" name="TextBox 8"/>
+              <a:t>06</a:t>
+            </a:r>
+          </a:p>
+        </p:txBody>
+      </p:sp>
+      <p:sp>
+        <p:nvSpPr>
+          <p:cNvPr id="7" name="TextBox 6"/>
           <p:cNvSpPr txBox="1"/>
           <p:nvPr/>
         </p:nvSpPr>
         <p:spPr>
           <a:xfrm>
-            <a:off x="704088" y="1920240"/>
-            <a:ext cx="6446520" cy="548640"/>
+            <a:off x="562057" y="1368343"/>
+            <a:ext cx="2743200" cy="295466"/>
           </a:xfrm>
           <a:prstGeom prst="rect">
             <a:avLst/>
@@ -7815,7 +8061,7 @@
           <a:noFill/>
         </p:spPr>
         <p:txBody>
-          <a:bodyPr wrap="square" lIns="18288" rIns="18288" tIns="18288">
+          <a:bodyPr wrap="square" lIns="18288" tIns="18288" rIns="18288">
             <a:spAutoFit/>
           </a:bodyPr>
           <a:lstStyle/>
@@ -7824,29 +8070,39 @@
               <a:spcAft>
                 <a:spcPts val="1000"/>
               </a:spcAft>
-              <a:defRPr sz="2100" b="1">
-                <a:solidFill>
-                  <a:srgbClr val="20304B"/>
-                </a:solidFill>
-                <a:latin typeface="맑은 고딕"/>
-              </a:defRPr>
-            </a:pPr>
-            <a:r>
-              <a:t>실제 개발 요청 ①</a:t>
-            </a:r>
-          </a:p>
-        </p:txBody>
-      </p:sp>
-      <p:sp>
-        <p:nvSpPr>
-          <p:cNvPr id="10" name="TextBox 9"/>
+              <a:defRPr sz="1500" b="1">
+                <a:solidFill>
+                  <a:srgbClr val="708097"/>
+                </a:solidFill>
+                <a:latin typeface="맑은 고딕"/>
+              </a:defRPr>
+            </a:pPr>
+            <a:r>
+              <a:rPr dirty="0" err="1"/>
+              <a:t>초기</a:t>
+            </a:r>
+            <a:r>
+              <a:rPr dirty="0"/>
+              <a:t> </a:t>
+            </a:r>
+            <a:r>
+              <a:rPr dirty="0" err="1"/>
+              <a:t>구조</a:t>
+            </a:r>
+            <a:endParaRPr lang="en-US" dirty="0"/>
+          </a:p>
+        </p:txBody>
+      </p:sp>
+      <p:sp>
+        <p:nvSpPr>
+          <p:cNvPr id="14" name="TextBox 13"/>
           <p:cNvSpPr txBox="1"/>
           <p:nvPr/>
         </p:nvSpPr>
         <p:spPr>
           <a:xfrm>
-            <a:off x="704088" y="2606039"/>
-            <a:ext cx="6400800" cy="960120"/>
+            <a:off x="5677088" y="1358401"/>
+            <a:ext cx="5486400" cy="365760"/>
           </a:xfrm>
           <a:prstGeom prst="rect">
             <a:avLst/>
@@ -7854,7 +8110,7 @@
           <a:noFill/>
         </p:spPr>
         <p:txBody>
-          <a:bodyPr wrap="square" lIns="18288" rIns="18288" tIns="18288">
+          <a:bodyPr wrap="square" lIns="18288" tIns="18288" rIns="18288">
             <a:spAutoFit/>
           </a:bodyPr>
           <a:lstStyle/>
@@ -7863,384 +8119,129 @@
               <a:spcAft>
                 <a:spcPts val="1000"/>
               </a:spcAft>
-              <a:defRPr sz="1700" b="0">
-                <a:solidFill>
-                  <a:srgbClr val="708097"/>
-                </a:solidFill>
-                <a:latin typeface="맑은 고딕"/>
-              </a:defRPr>
-            </a:pPr>
-            <a:r>
-              <a:t>“사용자가 사용하기 쉽도록 … 무조건 반응형으로 만들어야 해.”</a:t>
-            </a:r>
-          </a:p>
-        </p:txBody>
-      </p:sp>
-      <p:sp>
-        <p:nvSpPr>
-          <p:cNvPr id="11" name="Rounded Rectangle 10"/>
-          <p:cNvSpPr/>
-          <p:nvPr/>
-        </p:nvSpPr>
-        <p:spPr>
-          <a:xfrm>
-            <a:off x="502920" y="3749039"/>
-            <a:ext cx="6812280" cy="1920240"/>
-          </a:xfrm>
-          <a:prstGeom prst="roundRect">
-            <a:avLst/>
-          </a:prstGeom>
-          <a:solidFill>
-            <a:srgbClr val="FFFFFF"/>
-          </a:solidFill>
-          <a:ln>
-            <a:noFill/>
-          </a:ln>
-        </p:spPr>
-        <p:style>
-          <a:lnRef idx="1">
-            <a:schemeClr val="accent1"/>
-          </a:lnRef>
-          <a:fillRef idx="3">
-            <a:schemeClr val="accent1"/>
-          </a:fillRef>
-          <a:effectRef idx="2">
-            <a:schemeClr val="accent1"/>
-          </a:effectRef>
-          <a:fontRef idx="minor">
-            <a:schemeClr val="lt1"/>
-          </a:fontRef>
-        </p:style>
-        <p:txBody>
-          <a:bodyPr rtlCol="0" anchor="ctr"/>
-          <a:lstStyle/>
-          <a:p>
-            <a:pPr algn="ctr"/>
-          </a:p>
-        </p:txBody>
-      </p:sp>
-      <p:sp>
-        <p:nvSpPr>
-          <p:cNvPr id="12" name="Rounded Rectangle 11"/>
-          <p:cNvSpPr/>
-          <p:nvPr/>
-        </p:nvSpPr>
-        <p:spPr>
-          <a:xfrm>
-            <a:off x="502920" y="3749039"/>
-            <a:ext cx="50292" cy="1920240"/>
-          </a:xfrm>
-          <a:prstGeom prst="roundRect">
-            <a:avLst/>
-          </a:prstGeom>
-          <a:solidFill>
-            <a:srgbClr val="47858A"/>
-          </a:solidFill>
-          <a:ln>
-            <a:noFill/>
-          </a:ln>
-        </p:spPr>
-        <p:style>
-          <a:lnRef idx="1">
-            <a:schemeClr val="accent1"/>
-          </a:lnRef>
-          <a:fillRef idx="3">
-            <a:schemeClr val="accent1"/>
-          </a:fillRef>
-          <a:effectRef idx="2">
-            <a:schemeClr val="accent1"/>
-          </a:effectRef>
-          <a:fontRef idx="minor">
-            <a:schemeClr val="lt1"/>
-          </a:fontRef>
-        </p:style>
-        <p:txBody>
-          <a:bodyPr rtlCol="0" anchor="ctr"/>
-          <a:lstStyle/>
-          <a:p>
-            <a:pPr algn="ctr"/>
-          </a:p>
-        </p:txBody>
-      </p:sp>
-      <p:sp>
-        <p:nvSpPr>
-          <p:cNvPr id="13" name="TextBox 12"/>
-          <p:cNvSpPr txBox="1"/>
-          <p:nvPr/>
-        </p:nvSpPr>
-        <p:spPr>
-          <a:xfrm>
-            <a:off x="704088" y="3931920"/>
-            <a:ext cx="6446520" cy="548640"/>
+              <a:defRPr sz="1500" b="1">
+                <a:solidFill>
+                  <a:srgbClr val="47858A"/>
+                </a:solidFill>
+                <a:latin typeface="맑은 고딕"/>
+              </a:defRPr>
+            </a:pPr>
+            <a:r>
+              <a:rPr dirty="0" err="1"/>
+              <a:t>현재</a:t>
+            </a:r>
+            <a:r>
+              <a:rPr dirty="0"/>
+              <a:t> </a:t>
+            </a:r>
+            <a:r>
+              <a:rPr dirty="0" err="1"/>
+              <a:t>화면</a:t>
+            </a:r>
+            <a:r>
+              <a:rPr dirty="0"/>
+              <a:t> · </a:t>
+            </a:r>
+            <a:r>
+              <a:rPr dirty="0" err="1"/>
+              <a:t>브랜드</a:t>
+            </a:r>
+            <a:r>
+              <a:rPr dirty="0"/>
+              <a:t> </a:t>
+            </a:r>
+            <a:r>
+              <a:rPr dirty="0" err="1"/>
+              <a:t>정보</a:t>
+            </a:r>
+            <a:endParaRPr dirty="0"/>
+          </a:p>
+        </p:txBody>
+      </p:sp>
+      <p:pic>
+        <p:nvPicPr>
+          <p:cNvPr id="16" name="Picture 15" descr="mobile.png"/>
+          <p:cNvPicPr>
+            <a:picLocks noChangeAspect="1"/>
+          </p:cNvPicPr>
+          <p:nvPr/>
+        </p:nvPicPr>
+        <p:blipFill>
+          <a:blip r:embed="rId3"/>
+          <a:stretch>
+            <a:fillRect/>
+          </a:stretch>
+        </p:blipFill>
+        <p:spPr>
+          <a:xfrm>
+            <a:off x="9265677" y="1636820"/>
+            <a:ext cx="2203716" cy="4769069"/>
           </a:xfrm>
           <a:prstGeom prst="rect">
             <a:avLst/>
           </a:prstGeom>
-          <a:noFill/>
-        </p:spPr>
-        <p:txBody>
-          <a:bodyPr wrap="square" lIns="18288" rIns="18288" tIns="18288">
-            <a:spAutoFit/>
-          </a:bodyPr>
-          <a:lstStyle/>
-          <a:p>
-            <a:pPr>
-              <a:spcAft>
-                <a:spcPts val="1000"/>
-              </a:spcAft>
-              <a:defRPr sz="2100" b="1">
-                <a:solidFill>
-                  <a:srgbClr val="20304B"/>
-                </a:solidFill>
-                <a:latin typeface="맑은 고딕"/>
-              </a:defRPr>
-            </a:pPr>
-            <a:r>
-              <a:t>실제 개발 요청 ②</a:t>
-            </a:r>
-          </a:p>
-        </p:txBody>
-      </p:sp>
-      <p:sp>
-        <p:nvSpPr>
-          <p:cNvPr id="14" name="TextBox 13"/>
-          <p:cNvSpPr txBox="1"/>
-          <p:nvPr/>
-        </p:nvSpPr>
-        <p:spPr>
-          <a:xfrm>
-            <a:off x="704088" y="4617720"/>
-            <a:ext cx="6400800" cy="1051560"/>
+        </p:spPr>
+      </p:pic>
+      <p:pic>
+        <p:nvPicPr>
+          <p:cNvPr id="17" name="Picture 1">
+            <a:extLst>
+              <a:ext uri="{FF2B5EF4-FFF2-40B4-BE49-F238E27FC236}">
+                <a16:creationId xmlns:a16="http://schemas.microsoft.com/office/drawing/2014/main" id="{BC106D33-8F3F-3615-354D-43C2A01C9539}"/>
+              </a:ext>
+            </a:extLst>
+          </p:cNvPr>
+          <p:cNvPicPr>
+            <a:picLocks noChangeAspect="1"/>
+          </p:cNvPicPr>
+          <p:nvPr/>
+        </p:nvPicPr>
+        <p:blipFill>
+          <a:blip r:embed="rId4"/>
+          <a:stretch>
+            <a:fillRect/>
+          </a:stretch>
+        </p:blipFill>
+        <p:spPr>
+          <a:xfrm>
+            <a:off x="562057" y="1655064"/>
+            <a:ext cx="4452766" cy="4854840"/>
           </a:xfrm>
           <a:prstGeom prst="rect">
             <a:avLst/>
           </a:prstGeom>
-          <a:noFill/>
-        </p:spPr>
-        <p:txBody>
-          <a:bodyPr wrap="square" lIns="18288" rIns="18288" tIns="18288">
-            <a:spAutoFit/>
-          </a:bodyPr>
-          <a:lstStyle/>
-          <a:p>
-            <a:pPr>
-              <a:spcAft>
-                <a:spcPts val="1000"/>
-              </a:spcAft>
-              <a:defRPr sz="1700" b="0">
-                <a:solidFill>
-                  <a:srgbClr val="708097"/>
-                </a:solidFill>
-                <a:latin typeface="맑은 고딕"/>
-              </a:defRPr>
-            </a:pPr>
-            <a:r>
-              <a:t>“출발-도착을 입력하면 어떤 고속도로를 타는지 …</a:t>
-            </a:r>
-          </a:p>
-          <a:p>
-            <a:pPr>
-              <a:spcAft>
-                <a:spcPts val="1000"/>
-              </a:spcAft>
-              <a:defRPr sz="1700" b="0">
-                <a:solidFill>
-                  <a:srgbClr val="708097"/>
-                </a:solidFill>
-                <a:latin typeface="맑은 고딕"/>
-              </a:defRPr>
-            </a:pPr>
-            <a:r>
-              <a:t>휴게소 … 졸음쉼터 … 정보를 출력해줘.”</a:t>
-            </a:r>
-          </a:p>
-        </p:txBody>
-      </p:sp>
-      <p:sp>
-        <p:nvSpPr>
-          <p:cNvPr id="15" name="Rounded Rectangle 14"/>
-          <p:cNvSpPr/>
-          <p:nvPr/>
-        </p:nvSpPr>
-        <p:spPr>
-          <a:xfrm>
-            <a:off x="7589520" y="1737360"/>
-            <a:ext cx="4069080" cy="3931920"/>
-          </a:xfrm>
-          <a:prstGeom prst="roundRect">
-            <a:avLst/>
-          </a:prstGeom>
-          <a:solidFill>
-            <a:srgbClr val="20304B"/>
-          </a:solidFill>
-          <a:ln>
-            <a:noFill/>
-          </a:ln>
-        </p:spPr>
-        <p:style>
-          <a:lnRef idx="1">
-            <a:schemeClr val="accent1"/>
-          </a:lnRef>
-          <a:fillRef idx="3">
-            <a:schemeClr val="accent1"/>
-          </a:fillRef>
-          <a:effectRef idx="2">
-            <a:schemeClr val="accent1"/>
-          </a:effectRef>
-          <a:fontRef idx="minor">
-            <a:schemeClr val="lt1"/>
-          </a:fontRef>
-        </p:style>
-        <p:txBody>
-          <a:bodyPr rtlCol="0" anchor="ctr"/>
-          <a:lstStyle/>
-          <a:p>
-            <a:pPr algn="ctr"/>
-          </a:p>
-        </p:txBody>
-      </p:sp>
-      <p:sp>
-        <p:nvSpPr>
-          <p:cNvPr id="16" name="TextBox 15"/>
-          <p:cNvSpPr txBox="1"/>
-          <p:nvPr/>
-        </p:nvSpPr>
-        <p:spPr>
-          <a:xfrm>
-            <a:off x="7863840" y="2057400"/>
-            <a:ext cx="3520440" cy="2560320"/>
+        </p:spPr>
+      </p:pic>
+      <p:pic>
+        <p:nvPicPr>
+          <p:cNvPr id="19" name="그림 18">
+            <a:extLst>
+              <a:ext uri="{FF2B5EF4-FFF2-40B4-BE49-F238E27FC236}">
+                <a16:creationId xmlns:a16="http://schemas.microsoft.com/office/drawing/2014/main" id="{C6ED0841-08D7-9320-8740-2A189AAAF7FA}"/>
+              </a:ext>
+            </a:extLst>
+          </p:cNvPr>
+          <p:cNvPicPr>
+            <a:picLocks noChangeAspect="1"/>
+          </p:cNvPicPr>
+          <p:nvPr/>
+        </p:nvPicPr>
+        <p:blipFill>
+          <a:blip r:embed="rId5"/>
+          <a:stretch>
+            <a:fillRect/>
+          </a:stretch>
+        </p:blipFill>
+        <p:spPr>
+          <a:xfrm>
+            <a:off x="5677088" y="1655064"/>
+            <a:ext cx="3453730" cy="4715092"/>
           </a:xfrm>
           <a:prstGeom prst="rect">
             <a:avLst/>
           </a:prstGeom>
-          <a:noFill/>
-        </p:spPr>
-        <p:txBody>
-          <a:bodyPr wrap="square" lIns="18288" rIns="18288" tIns="18288">
-            <a:spAutoFit/>
-          </a:bodyPr>
-          <a:lstStyle/>
-          <a:p>
-            <a:pPr>
-              <a:spcAft>
-                <a:spcPts val="1000"/>
-              </a:spcAft>
-              <a:defRPr sz="2300" b="1">
-                <a:solidFill>
-                  <a:srgbClr val="FFFFFF"/>
-                </a:solidFill>
-                <a:latin typeface="맑은 고딕"/>
-              </a:defRPr>
-            </a:pPr>
-            <a:r>
-              <a:t>요구사항 입력</a:t>
-            </a:r>
-          </a:p>
-          <a:p>
-            <a:pPr>
-              <a:spcAft>
-                <a:spcPts val="1000"/>
-              </a:spcAft>
-              <a:defRPr sz="2300" b="1">
-                <a:solidFill>
-                  <a:srgbClr val="FFFFFF"/>
-                </a:solidFill>
-                <a:latin typeface="맑은 고딕"/>
-              </a:defRPr>
-            </a:pPr>
-            <a:r>
-              <a:t>↓</a:t>
-            </a:r>
-          </a:p>
-          <a:p>
-            <a:pPr>
-              <a:spcAft>
-                <a:spcPts val="1000"/>
-              </a:spcAft>
-              <a:defRPr sz="2300" b="1">
-                <a:solidFill>
-                  <a:srgbClr val="FFFFFF"/>
-                </a:solidFill>
-                <a:latin typeface="맑은 고딕"/>
-              </a:defRPr>
-            </a:pPr>
-            <a:r>
-              <a:t>Codex · 코드 / UI 수정</a:t>
-            </a:r>
-          </a:p>
-          <a:p>
-            <a:pPr>
-              <a:spcAft>
-                <a:spcPts val="1000"/>
-              </a:spcAft>
-              <a:defRPr sz="2300" b="1">
-                <a:solidFill>
-                  <a:srgbClr val="FFFFFF"/>
-                </a:solidFill>
-                <a:latin typeface="맑은 고딕"/>
-              </a:defRPr>
-            </a:pPr>
-            <a:r>
-              <a:t>↓</a:t>
-            </a:r>
-          </a:p>
-          <a:p>
-            <a:pPr>
-              <a:spcAft>
-                <a:spcPts val="1000"/>
-              </a:spcAft>
-              <a:defRPr sz="2300" b="1">
-                <a:solidFill>
-                  <a:srgbClr val="FFFFFF"/>
-                </a:solidFill>
-                <a:latin typeface="맑은 고딕"/>
-              </a:defRPr>
-            </a:pPr>
-            <a:r>
-              <a:t>실제 응답 · 테스트 확인</a:t>
-            </a:r>
-          </a:p>
-        </p:txBody>
-      </p:sp>
-      <p:sp>
-        <p:nvSpPr>
-          <p:cNvPr id="17" name="TextBox 16"/>
-          <p:cNvSpPr txBox="1"/>
-          <p:nvPr/>
-        </p:nvSpPr>
-        <p:spPr>
-          <a:xfrm>
-            <a:off x="7863840" y="5029200"/>
-            <a:ext cx="3566160" cy="457200"/>
-          </a:xfrm>
-          <a:prstGeom prst="rect">
-            <a:avLst/>
-          </a:prstGeom>
-          <a:noFill/>
-        </p:spPr>
-        <p:txBody>
-          <a:bodyPr wrap="square" lIns="18288" rIns="18288" tIns="18288">
-            <a:spAutoFit/>
-          </a:bodyPr>
-          <a:lstStyle/>
-          <a:p>
-            <a:pPr>
-              <a:spcAft>
-                <a:spcPts val="1000"/>
-              </a:spcAft>
-              <a:defRPr sz="1500" b="1">
-                <a:solidFill>
-                  <a:srgbClr val="F0BC5E"/>
-                </a:solidFill>
-                <a:latin typeface="맑은 고딕"/>
-              </a:defRPr>
-            </a:pPr>
-            <a:r>
-              <a:t>앱 내부 AI 추천 기능은 미구현</a:t>
-            </a:r>
-          </a:p>
-        </p:txBody>
-      </p:sp>
+        </p:spPr>
+      </p:pic>
     </p:spTree>
   </p:cSld>
   <p:clrMapOvr>
@@ -8249,8 +8250,8 @@
 </p:sld>
 </file>
 
-<file path=ppt/slides/slide6.xml><?xml version="1.0" encoding="utf-8"?>
-<p:sld xmlns:a="http://schemas.openxmlformats.org/drawingml/2006/main" xmlns:p="http://schemas.openxmlformats.org/presentationml/2006/main" xmlns:r="http://schemas.openxmlformats.org/officeDocument/2006/relationships">
+<file path=ppt/slides/slide7.xml><?xml version="1.0" encoding="utf-8"?>
+<p:sld xmlns:a="http://schemas.openxmlformats.org/drawingml/2006/main" xmlns:r="http://schemas.openxmlformats.org/officeDocument/2006/relationships" xmlns:p="http://schemas.openxmlformats.org/presentationml/2006/main">
   <p:cSld>
     <p:bg>
       <p:bgPr>
@@ -8266,7 +8267,14 @@
         <p:cNvGrpSpPr/>
         <p:nvPr/>
       </p:nvGrpSpPr>
-      <p:grpSpPr/>
+      <p:grpSpPr>
+        <a:xfrm>
+          <a:off x="0" y="0"/>
+          <a:ext cx="0" cy="0"/>
+          <a:chOff x="0" y="0"/>
+          <a:chExt cx="0" cy="0"/>
+        </a:xfrm>
+      </p:grpSpPr>
       <p:sp>
         <p:nvSpPr>
           <p:cNvPr id="2" name="TextBox 1"/>
@@ -8284,7 +8292,7 @@
           <a:noFill/>
         </p:spPr>
         <p:txBody>
-          <a:bodyPr wrap="square" lIns="18288" rIns="18288" tIns="18288">
+          <a:bodyPr wrap="square" lIns="18288" tIns="18288" rIns="18288">
             <a:spAutoFit/>
           </a:bodyPr>
           <a:lstStyle/>
@@ -8301,7 +8309,7 @@
               </a:defRPr>
             </a:pPr>
             <a:r>
-              <a:t>05 / UI DESIGN</a:t>
+              <a:t>06 / LIVE DEMO · 2분 30초</a:t>
             </a:r>
           </a:p>
         </p:txBody>
@@ -8323,7 +8331,7 @@
           <a:noFill/>
         </p:spPr>
         <p:txBody>
-          <a:bodyPr wrap="square" lIns="18288" rIns="18288" tIns="18288">
+          <a:bodyPr wrap="square" lIns="18288" tIns="18288" rIns="18288">
             <a:spAutoFit/>
           </a:bodyPr>
           <a:lstStyle/>
@@ -8340,7 +8348,7 @@
               </a:defRPr>
             </a:pPr>
             <a:r>
-              <a:t>정보의 우선순위를 정리하고 모바일까지 맞췄습니다</a:t>
+              <a:t>실제 사용 흐름을 시연하겠습니다</a:t>
             </a:r>
           </a:p>
         </p:txBody>
@@ -8385,6 +8393,7 @@
           <a:lstStyle/>
           <a:p>
             <a:pPr algn="ctr"/>
+            <a:endParaRPr/>
           </a:p>
         </p:txBody>
       </p:sp>
@@ -8405,7 +8414,7 @@
           <a:noFill/>
         </p:spPr>
         <p:txBody>
-          <a:bodyPr wrap="square" lIns="18288" rIns="18288" tIns="18288">
+          <a:bodyPr wrap="square" lIns="18288" tIns="18288" rIns="18288">
             <a:spAutoFit/>
           </a:bodyPr>
           <a:lstStyle/>
@@ -8444,7 +8453,7 @@
           <a:noFill/>
         </p:spPr>
         <p:txBody>
-          <a:bodyPr wrap="square" lIns="18288" rIns="18288" tIns="18288">
+          <a:bodyPr wrap="square" lIns="18288" tIns="18288" rIns="18288">
             <a:spAutoFit/>
           </a:bodyPr>
           <a:lstStyle/>
@@ -8461,404 +8470,14 @@
               </a:defRPr>
             </a:pPr>
             <a:r>
-              <a:t>06</a:t>
-            </a:r>
-          </a:p>
-        </p:txBody>
-      </p:sp>
-      <p:sp>
-        <p:nvSpPr>
-          <p:cNvPr id="7" name="TextBox 6"/>
-          <p:cNvSpPr txBox="1"/>
-          <p:nvPr/>
-        </p:nvSpPr>
-        <p:spPr>
-          <a:xfrm>
-            <a:off x="594360" y="1554480"/>
-            <a:ext cx="2743200" cy="365760"/>
-          </a:xfrm>
-          <a:prstGeom prst="rect">
-            <a:avLst/>
-          </a:prstGeom>
-          <a:noFill/>
-        </p:spPr>
-        <p:txBody>
-          <a:bodyPr wrap="square" lIns="18288" rIns="18288" tIns="18288">
-            <a:spAutoFit/>
-          </a:bodyPr>
-          <a:lstStyle/>
-          <a:p>
-            <a:pPr>
-              <a:spcAft>
-                <a:spcPts val="1000"/>
-              </a:spcAft>
-              <a:defRPr sz="1500" b="1">
-                <a:solidFill>
-                  <a:srgbClr val="708097"/>
-                </a:solidFill>
-                <a:latin typeface="맑은 고딕"/>
-              </a:defRPr>
-            </a:pPr>
-            <a:r>
-              <a:t>초기 구조 재구성</a:t>
-            </a:r>
-          </a:p>
-        </p:txBody>
-      </p:sp>
-      <p:sp>
-        <p:nvSpPr>
-          <p:cNvPr id="8" name="Rounded Rectangle 7"/>
-          <p:cNvSpPr/>
-          <p:nvPr/>
-        </p:nvSpPr>
-        <p:spPr>
-          <a:xfrm>
-            <a:off x="594360" y="2057400"/>
-            <a:ext cx="2834640" cy="3840480"/>
-          </a:xfrm>
-          <a:prstGeom prst="roundRect">
-            <a:avLst/>
-          </a:prstGeom>
-          <a:solidFill>
-            <a:srgbClr val="E3E8ED"/>
-          </a:solidFill>
-          <a:ln>
-            <a:noFill/>
-          </a:ln>
-        </p:spPr>
-        <p:style>
-          <a:lnRef idx="1">
-            <a:schemeClr val="accent1"/>
-          </a:lnRef>
-          <a:fillRef idx="3">
-            <a:schemeClr val="accent1"/>
-          </a:fillRef>
-          <a:effectRef idx="2">
-            <a:schemeClr val="accent1"/>
-          </a:effectRef>
-          <a:fontRef idx="minor">
-            <a:schemeClr val="lt1"/>
-          </a:fontRef>
-        </p:style>
-        <p:txBody>
-          <a:bodyPr rtlCol="0" anchor="ctr"/>
-          <a:lstStyle/>
-          <a:p>
-            <a:pPr algn="ctr"/>
-          </a:p>
-        </p:txBody>
-      </p:sp>
-      <p:sp>
-        <p:nvSpPr>
-          <p:cNvPr id="9" name="Rounded Rectangle 8"/>
-          <p:cNvSpPr/>
-          <p:nvPr/>
-        </p:nvSpPr>
-        <p:spPr>
-          <a:xfrm>
-            <a:off x="777240" y="2286000"/>
-            <a:ext cx="2468880" cy="457200"/>
-          </a:xfrm>
-          <a:prstGeom prst="roundRect">
-            <a:avLst/>
-          </a:prstGeom>
-          <a:solidFill>
-            <a:srgbClr val="BDC8D2"/>
-          </a:solidFill>
-          <a:ln>
-            <a:noFill/>
-          </a:ln>
-        </p:spPr>
-        <p:style>
-          <a:lnRef idx="1">
-            <a:schemeClr val="accent1"/>
-          </a:lnRef>
-          <a:fillRef idx="3">
-            <a:schemeClr val="accent1"/>
-          </a:fillRef>
-          <a:effectRef idx="2">
-            <a:schemeClr val="accent1"/>
-          </a:effectRef>
-          <a:fontRef idx="minor">
-            <a:schemeClr val="lt1"/>
-          </a:fontRef>
-        </p:style>
-        <p:txBody>
-          <a:bodyPr rtlCol="0" anchor="ctr"/>
-          <a:lstStyle/>
-          <a:p>
-            <a:pPr algn="ctr"/>
-          </a:p>
-        </p:txBody>
-      </p:sp>
-      <p:sp>
-        <p:nvSpPr>
-          <p:cNvPr id="10" name="Rounded Rectangle 9"/>
-          <p:cNvSpPr/>
-          <p:nvPr/>
-        </p:nvSpPr>
-        <p:spPr>
-          <a:xfrm>
-            <a:off x="777240" y="2971800"/>
-            <a:ext cx="2468880" cy="548640"/>
-          </a:xfrm>
-          <a:prstGeom prst="roundRect">
-            <a:avLst/>
-          </a:prstGeom>
-          <a:solidFill>
-            <a:srgbClr val="CDD6DF"/>
-          </a:solidFill>
-          <a:ln>
-            <a:noFill/>
-          </a:ln>
-        </p:spPr>
-        <p:style>
-          <a:lnRef idx="1">
-            <a:schemeClr val="accent1"/>
-          </a:lnRef>
-          <a:fillRef idx="3">
-            <a:schemeClr val="accent1"/>
-          </a:fillRef>
-          <a:effectRef idx="2">
-            <a:schemeClr val="accent1"/>
-          </a:effectRef>
-          <a:fontRef idx="minor">
-            <a:schemeClr val="lt1"/>
-          </a:fontRef>
-        </p:style>
-        <p:txBody>
-          <a:bodyPr rtlCol="0" anchor="ctr"/>
-          <a:lstStyle/>
-          <a:p>
-            <a:pPr algn="ctr"/>
-          </a:p>
-        </p:txBody>
-      </p:sp>
-      <p:sp>
-        <p:nvSpPr>
-          <p:cNvPr id="11" name="Rounded Rectangle 10"/>
-          <p:cNvSpPr/>
-          <p:nvPr/>
-        </p:nvSpPr>
-        <p:spPr>
-          <a:xfrm>
-            <a:off x="777240" y="3749039"/>
-            <a:ext cx="2468880" cy="548640"/>
-          </a:xfrm>
-          <a:prstGeom prst="roundRect">
-            <a:avLst/>
-          </a:prstGeom>
-          <a:solidFill>
-            <a:srgbClr val="CDD6DF"/>
-          </a:solidFill>
-          <a:ln>
-            <a:noFill/>
-          </a:ln>
-        </p:spPr>
-        <p:style>
-          <a:lnRef idx="1">
-            <a:schemeClr val="accent1"/>
-          </a:lnRef>
-          <a:fillRef idx="3">
-            <a:schemeClr val="accent1"/>
-          </a:fillRef>
-          <a:effectRef idx="2">
-            <a:schemeClr val="accent1"/>
-          </a:effectRef>
-          <a:fontRef idx="minor">
-            <a:schemeClr val="lt1"/>
-          </a:fontRef>
-        </p:style>
-        <p:txBody>
-          <a:bodyPr rtlCol="0" anchor="ctr"/>
-          <a:lstStyle/>
-          <a:p>
-            <a:pPr algn="ctr"/>
-          </a:p>
-        </p:txBody>
-      </p:sp>
-      <p:sp>
-        <p:nvSpPr>
-          <p:cNvPr id="12" name="Rounded Rectangle 11"/>
-          <p:cNvSpPr/>
-          <p:nvPr/>
-        </p:nvSpPr>
-        <p:spPr>
-          <a:xfrm>
-            <a:off x="777240" y="4526280"/>
-            <a:ext cx="2468880" cy="548640"/>
-          </a:xfrm>
-          <a:prstGeom prst="roundRect">
-            <a:avLst/>
-          </a:prstGeom>
-          <a:solidFill>
-            <a:srgbClr val="CDD6DF"/>
-          </a:solidFill>
-          <a:ln>
-            <a:noFill/>
-          </a:ln>
-        </p:spPr>
-        <p:style>
-          <a:lnRef idx="1">
-            <a:schemeClr val="accent1"/>
-          </a:lnRef>
-          <a:fillRef idx="3">
-            <a:schemeClr val="accent1"/>
-          </a:fillRef>
-          <a:effectRef idx="2">
-            <a:schemeClr val="accent1"/>
-          </a:effectRef>
-          <a:fontRef idx="minor">
-            <a:schemeClr val="lt1"/>
-          </a:fontRef>
-        </p:style>
-        <p:txBody>
-          <a:bodyPr rtlCol="0" anchor="ctr"/>
-          <a:lstStyle/>
-          <a:p>
-            <a:pPr algn="ctr"/>
-          </a:p>
-        </p:txBody>
-      </p:sp>
-      <p:sp>
-        <p:nvSpPr>
-          <p:cNvPr id="13" name="TextBox 12"/>
-          <p:cNvSpPr txBox="1"/>
-          <p:nvPr/>
-        </p:nvSpPr>
-        <p:spPr>
-          <a:xfrm>
-            <a:off x="914400" y="2926080"/>
-            <a:ext cx="2103120" cy="2286000"/>
-          </a:xfrm>
-          <a:prstGeom prst="rect">
-            <a:avLst/>
-          </a:prstGeom>
-          <a:noFill/>
-        </p:spPr>
-        <p:txBody>
-          <a:bodyPr wrap="square" lIns="18288" rIns="18288" tIns="18288">
-            <a:spAutoFit/>
-          </a:bodyPr>
-          <a:lstStyle/>
-          <a:p>
-            <a:pPr>
-              <a:spcAft>
-                <a:spcPts val="1000"/>
-              </a:spcAft>
-              <a:defRPr sz="1600" b="0">
-                <a:solidFill>
-                  <a:srgbClr val="708097"/>
-                </a:solidFill>
-                <a:latin typeface="맑은 고딕"/>
-              </a:defRPr>
-            </a:pPr>
-            <a:r>
-              <a:t>검색</a:t>
-            </a:r>
-          </a:p>
-          <a:p>
-            <a:pPr>
-              <a:spcAft>
-                <a:spcPts val="1000"/>
-              </a:spcAft>
-              <a:defRPr sz="1600" b="0">
-                <a:solidFill>
-                  <a:srgbClr val="708097"/>
-                </a:solidFill>
-                <a:latin typeface="맑은 고딕"/>
-              </a:defRPr>
-            </a:pPr>
-          </a:p>
-          <a:p>
-            <a:pPr>
-              <a:spcAft>
-                <a:spcPts val="1000"/>
-              </a:spcAft>
-              <a:defRPr sz="1600" b="0">
-                <a:solidFill>
-                  <a:srgbClr val="708097"/>
-                </a:solidFill>
-                <a:latin typeface="맑은 고딕"/>
-              </a:defRPr>
-            </a:pPr>
-            <a:r>
-              <a:t>정보 목록</a:t>
-            </a:r>
-          </a:p>
-          <a:p>
-            <a:pPr>
-              <a:spcAft>
-                <a:spcPts val="1000"/>
-              </a:spcAft>
-              <a:defRPr sz="1600" b="0">
-                <a:solidFill>
-                  <a:srgbClr val="708097"/>
-                </a:solidFill>
-                <a:latin typeface="맑은 고딕"/>
-              </a:defRPr>
-            </a:pPr>
-          </a:p>
-          <a:p>
-            <a:pPr>
-              <a:spcAft>
-                <a:spcPts val="1000"/>
-              </a:spcAft>
-              <a:defRPr sz="1600" b="0">
-                <a:solidFill>
-                  <a:srgbClr val="708097"/>
-                </a:solidFill>
-                <a:latin typeface="맑은 고딕"/>
-              </a:defRPr>
-            </a:pPr>
-            <a:r>
-              <a:t>상세 정보</a:t>
-            </a:r>
-          </a:p>
-        </p:txBody>
-      </p:sp>
-      <p:sp>
-        <p:nvSpPr>
-          <p:cNvPr id="14" name="TextBox 13"/>
-          <p:cNvSpPr txBox="1"/>
-          <p:nvPr/>
-        </p:nvSpPr>
-        <p:spPr>
-          <a:xfrm>
-            <a:off x="3749039" y="1554480"/>
-            <a:ext cx="5486400" cy="365760"/>
-          </a:xfrm>
-          <a:prstGeom prst="rect">
-            <a:avLst/>
-          </a:prstGeom>
-          <a:noFill/>
-        </p:spPr>
-        <p:txBody>
-          <a:bodyPr wrap="square" lIns="18288" rIns="18288" tIns="18288">
-            <a:spAutoFit/>
-          </a:bodyPr>
-          <a:lstStyle/>
-          <a:p>
-            <a:pPr>
-              <a:spcAft>
-                <a:spcPts val="1000"/>
-              </a:spcAft>
-              <a:defRPr sz="1500" b="1">
-                <a:solidFill>
-                  <a:srgbClr val="47858A"/>
-                </a:solidFill>
-                <a:latin typeface="맑은 고딕"/>
-              </a:defRPr>
-            </a:pPr>
-            <a:r>
-              <a:t>현재 화면 · 브랜드 정보</a:t>
+              <a:t>07</a:t>
             </a:r>
           </a:p>
         </p:txBody>
       </p:sp>
       <p:pic>
         <p:nvPicPr>
-          <p:cNvPr id="15" name="Picture 14" descr="brands.png"/>
+          <p:cNvPr id="7" name="Picture 6" descr="route-result.png"/>
           <p:cNvPicPr>
             <a:picLocks noChangeAspect="1"/>
           </p:cNvPicPr>
@@ -8872,38 +8491,186 @@
         </p:blipFill>
         <p:spPr>
           <a:xfrm>
-            <a:off x="4394633" y="2011680"/>
-            <a:ext cx="4195212" cy="4023360"/>
+            <a:off x="1106881" y="1691640"/>
+            <a:ext cx="6107276" cy="4251960"/>
           </a:xfrm>
           <a:prstGeom prst="rect">
             <a:avLst/>
           </a:prstGeom>
         </p:spPr>
       </p:pic>
-      <p:pic>
-        <p:nvPicPr>
-          <p:cNvPr id="16" name="Picture 15" descr="mobile.png"/>
-          <p:cNvPicPr>
-            <a:picLocks noChangeAspect="1"/>
-          </p:cNvPicPr>
-          <p:nvPr/>
-        </p:nvPicPr>
-        <p:blipFill>
-          <a:blip r:embed="rId4"/>
-          <a:stretch>
-            <a:fillRect/>
-          </a:stretch>
-        </p:blipFill>
-        <p:spPr>
-          <a:xfrm>
-            <a:off x="9538416" y="1554480"/>
-            <a:ext cx="2091527" cy="4526280"/>
+      <p:sp>
+        <p:nvSpPr>
+          <p:cNvPr id="8" name="TextBox 7"/>
+          <p:cNvSpPr txBox="1"/>
+          <p:nvPr/>
+        </p:nvSpPr>
+        <p:spPr>
+          <a:xfrm>
+            <a:off x="8138160" y="1828800"/>
+            <a:ext cx="3520440" cy="3200400"/>
           </a:xfrm>
           <a:prstGeom prst="rect">
             <a:avLst/>
           </a:prstGeom>
-        </p:spPr>
-      </p:pic>
+          <a:noFill/>
+        </p:spPr>
+        <p:txBody>
+          <a:bodyPr wrap="square" lIns="18288" tIns="18288" rIns="18288">
+            <a:spAutoFit/>
+          </a:bodyPr>
+          <a:lstStyle/>
+          <a:p>
+            <a:pPr>
+              <a:spcAft>
+                <a:spcPts val="1000"/>
+              </a:spcAft>
+              <a:defRPr sz="2100" b="1">
+                <a:solidFill>
+                  <a:srgbClr val="26364A"/>
+                </a:solidFill>
+                <a:latin typeface="맑은 고딕"/>
+              </a:defRPr>
+            </a:pPr>
+            <a:r>
+              <a:t>01  출발 · 도착 → 경로 검색</a:t>
+            </a:r>
+          </a:p>
+          <a:p>
+            <a:pPr>
+              <a:spcAft>
+                <a:spcPts val="1000"/>
+              </a:spcAft>
+              <a:defRPr sz="2100" b="1">
+                <a:solidFill>
+                  <a:srgbClr val="26364A"/>
+                </a:solidFill>
+                <a:latin typeface="맑은 고딕"/>
+              </a:defRPr>
+            </a:pPr>
+            <a:r>
+              <a:t>02  휴게소 상세 정보 확인</a:t>
+            </a:r>
+          </a:p>
+          <a:p>
+            <a:pPr>
+              <a:spcAft>
+                <a:spcPts val="1000"/>
+              </a:spcAft>
+              <a:defRPr sz="2100" b="1">
+                <a:solidFill>
+                  <a:srgbClr val="26364A"/>
+                </a:solidFill>
+                <a:latin typeface="맑은 고딕"/>
+              </a:defRPr>
+            </a:pPr>
+            <a:r>
+              <a:t>03  두 휴게소 비교</a:t>
+            </a:r>
+          </a:p>
+          <a:p>
+            <a:pPr>
+              <a:spcAft>
+                <a:spcPts val="1000"/>
+              </a:spcAft>
+              <a:defRPr sz="2100" b="1">
+                <a:solidFill>
+                  <a:srgbClr val="26364A"/>
+                </a:solidFill>
+                <a:latin typeface="맑은 고딕"/>
+              </a:defRPr>
+            </a:pPr>
+            <a:r>
+              <a:t>04  쉼터 위치 · 처음 화면</a:t>
+            </a:r>
+          </a:p>
+        </p:txBody>
+      </p:sp>
+      <p:sp>
+        <p:nvSpPr>
+          <p:cNvPr id="9" name="Rounded Rectangle 8"/>
+          <p:cNvSpPr/>
+          <p:nvPr/>
+        </p:nvSpPr>
+        <p:spPr>
+          <a:xfrm>
+            <a:off x="8019403" y="5100524"/>
+            <a:ext cx="3840480" cy="822960"/>
+          </a:xfrm>
+          <a:prstGeom prst="roundRect">
+            <a:avLst/>
+          </a:prstGeom>
+          <a:solidFill>
+            <a:srgbClr val="47858A"/>
+          </a:solidFill>
+          <a:ln>
+            <a:noFill/>
+          </a:ln>
+        </p:spPr>
+        <p:style>
+          <a:lnRef idx="1">
+            <a:schemeClr val="accent1"/>
+          </a:lnRef>
+          <a:fillRef idx="3">
+            <a:schemeClr val="accent1"/>
+          </a:fillRef>
+          <a:effectRef idx="2">
+            <a:schemeClr val="accent1"/>
+          </a:effectRef>
+          <a:fontRef idx="minor">
+            <a:schemeClr val="lt1"/>
+          </a:fontRef>
+        </p:style>
+        <p:txBody>
+          <a:bodyPr rtlCol="0" anchor="ctr"/>
+          <a:lstStyle/>
+          <a:p>
+            <a:pPr algn="ctr"/>
+            <a:endParaRPr/>
+          </a:p>
+        </p:txBody>
+      </p:sp>
+      <p:sp>
+        <p:nvSpPr>
+          <p:cNvPr id="10" name="TextBox 9"/>
+          <p:cNvSpPr txBox="1"/>
+          <p:nvPr/>
+        </p:nvSpPr>
+        <p:spPr>
+          <a:xfrm>
+            <a:off x="8176979" y="5366968"/>
+            <a:ext cx="4337074" cy="341632"/>
+          </a:xfrm>
+          <a:prstGeom prst="rect">
+            <a:avLst/>
+          </a:prstGeom>
+          <a:noFill/>
+        </p:spPr>
+        <p:txBody>
+          <a:bodyPr wrap="square" lIns="18288" tIns="18288" rIns="18288">
+            <a:spAutoFit/>
+          </a:bodyPr>
+          <a:lstStyle/>
+          <a:p>
+            <a:pPr>
+              <a:spcAft>
+                <a:spcPts val="1000"/>
+              </a:spcAft>
+              <a:defRPr sz="1800" b="1">
+                <a:solidFill>
+                  <a:srgbClr val="FFFFFF"/>
+                </a:solidFill>
+                <a:latin typeface="맑은 고딕"/>
+              </a:defRPr>
+            </a:pPr>
+            <a:r>
+              <a:rPr lang="en-US" altLang="ko-KR" dirty="0"/>
+              <a:t>https://rest-area-info.vercel.app</a:t>
+            </a:r>
+            <a:endParaRPr dirty="0"/>
+          </a:p>
+        </p:txBody>
+      </p:sp>
     </p:spTree>
   </p:cSld>
   <p:clrMapOvr>
@@ -8912,8 +8679,8 @@
 </p:sld>
 </file>
 
-<file path=ppt/slides/slide7.xml><?xml version="1.0" encoding="utf-8"?>
-<p:sld xmlns:a="http://schemas.openxmlformats.org/drawingml/2006/main" xmlns:p="http://schemas.openxmlformats.org/presentationml/2006/main" xmlns:r="http://schemas.openxmlformats.org/officeDocument/2006/relationships">
+<file path=ppt/slides/slide8.xml><?xml version="1.0" encoding="utf-8"?>
+<p:sld xmlns:a="http://schemas.openxmlformats.org/drawingml/2006/main" xmlns:r="http://schemas.openxmlformats.org/officeDocument/2006/relationships" xmlns:p="http://schemas.openxmlformats.org/presentationml/2006/main">
   <p:cSld>
     <p:bg>
       <p:bgPr>
@@ -8929,7 +8696,14 @@
         <p:cNvGrpSpPr/>
         <p:nvPr/>
       </p:nvGrpSpPr>
-      <p:grpSpPr/>
+      <p:grpSpPr>
+        <a:xfrm>
+          <a:off x="0" y="0"/>
+          <a:ext cx="0" cy="0"/>
+          <a:chOff x="0" y="0"/>
+          <a:chExt cx="0" cy="0"/>
+        </a:xfrm>
+      </p:grpSpPr>
       <p:sp>
         <p:nvSpPr>
           <p:cNvPr id="2" name="TextBox 1"/>
@@ -8947,7 +8721,7 @@
           <a:noFill/>
         </p:spPr>
         <p:txBody>
-          <a:bodyPr wrap="square" lIns="18288" rIns="18288" tIns="18288">
+          <a:bodyPr wrap="square" lIns="18288" tIns="18288" rIns="18288">
             <a:spAutoFit/>
           </a:bodyPr>
           <a:lstStyle/>
@@ -8964,7 +8738,7 @@
               </a:defRPr>
             </a:pPr>
             <a:r>
-              <a:t>06 / LIVE DEMO · 2분 30초</a:t>
+              <a:t>07 / STACK &amp; DEPLOYMENT</a:t>
             </a:r>
           </a:p>
         </p:txBody>
@@ -8986,7 +8760,7 @@
           <a:noFill/>
         </p:spPr>
         <p:txBody>
-          <a:bodyPr wrap="square" lIns="18288" rIns="18288" tIns="18288">
+          <a:bodyPr wrap="square" lIns="18288" tIns="18288" rIns="18288">
             <a:spAutoFit/>
           </a:bodyPr>
           <a:lstStyle/>
@@ -9003,7 +8777,7 @@
               </a:defRPr>
             </a:pPr>
             <a:r>
-              <a:t>실제 사용 흐름을 시연하겠습니다</a:t>
+              <a:t>화면과 API를 분리해 운영할 수 있도록 구성했습니다</a:t>
             </a:r>
           </a:p>
         </p:txBody>
@@ -9048,6 +8822,7 @@
           <a:lstStyle/>
           <a:p>
             <a:pPr algn="ctr"/>
+            <a:endParaRPr/>
           </a:p>
         </p:txBody>
       </p:sp>
@@ -9068,7 +8843,7 @@
           <a:noFill/>
         </p:spPr>
         <p:txBody>
-          <a:bodyPr wrap="square" lIns="18288" rIns="18288" tIns="18288">
+          <a:bodyPr wrap="square" lIns="18288" tIns="18288" rIns="18288">
             <a:spAutoFit/>
           </a:bodyPr>
           <a:lstStyle/>
@@ -9107,7 +8882,7 @@
           <a:noFill/>
         </p:spPr>
         <p:txBody>
-          <a:bodyPr wrap="square" lIns="18288" rIns="18288" tIns="18288">
+          <a:bodyPr wrap="square" lIns="18288" tIns="18288" rIns="18288">
             <a:spAutoFit/>
           </a:bodyPr>
           <a:lstStyle/>
@@ -9124,132 +8899,65 @@
               </a:defRPr>
             </a:pPr>
             <a:r>
-              <a:t>07</a:t>
-            </a:r>
-          </a:p>
-        </p:txBody>
-      </p:sp>
-      <p:pic>
-        <p:nvPicPr>
-          <p:cNvPr id="7" name="Picture 6" descr="route-result.png"/>
-          <p:cNvPicPr>
-            <a:picLocks noChangeAspect="1"/>
-          </p:cNvPicPr>
-          <p:nvPr/>
-        </p:nvPicPr>
-        <p:blipFill>
-          <a:blip r:embed="rId3"/>
-          <a:stretch>
-            <a:fillRect/>
-          </a:stretch>
-        </p:blipFill>
-        <p:spPr>
-          <a:xfrm>
-            <a:off x="1106881" y="1691640"/>
-            <a:ext cx="6107276" cy="4251960"/>
-          </a:xfrm>
-          <a:prstGeom prst="rect">
-            <a:avLst/>
-          </a:prstGeom>
-        </p:spPr>
-      </p:pic>
-      <p:sp>
-        <p:nvSpPr>
-          <p:cNvPr id="8" name="TextBox 7"/>
-          <p:cNvSpPr txBox="1"/>
-          <p:nvPr/>
-        </p:nvSpPr>
-        <p:spPr>
-          <a:xfrm>
-            <a:off x="8138160" y="1828800"/>
-            <a:ext cx="3520440" cy="3200400"/>
-          </a:xfrm>
-          <a:prstGeom prst="rect">
-            <a:avLst/>
-          </a:prstGeom>
-          <a:noFill/>
-        </p:spPr>
-        <p:txBody>
-          <a:bodyPr wrap="square" lIns="18288" rIns="18288" tIns="18288">
-            <a:spAutoFit/>
-          </a:bodyPr>
-          <a:lstStyle/>
-          <a:p>
-            <a:pPr>
-              <a:spcAft>
-                <a:spcPts val="1000"/>
-              </a:spcAft>
-              <a:defRPr sz="2100" b="1">
-                <a:solidFill>
-                  <a:srgbClr val="26364A"/>
-                </a:solidFill>
-                <a:latin typeface="맑은 고딕"/>
-              </a:defRPr>
-            </a:pPr>
-            <a:r>
-              <a:t>01  출발 · 도착 → 경로 검색</a:t>
-            </a:r>
-          </a:p>
-          <a:p>
-            <a:pPr>
-              <a:spcAft>
-                <a:spcPts val="1000"/>
-              </a:spcAft>
-              <a:defRPr sz="2100" b="1">
-                <a:solidFill>
-                  <a:srgbClr val="26364A"/>
-                </a:solidFill>
-                <a:latin typeface="맑은 고딕"/>
-              </a:defRPr>
-            </a:pPr>
-            <a:r>
-              <a:t>02  휴게소 상세 정보 확인</a:t>
-            </a:r>
-          </a:p>
-          <a:p>
-            <a:pPr>
-              <a:spcAft>
-                <a:spcPts val="1000"/>
-              </a:spcAft>
-              <a:defRPr sz="2100" b="1">
-                <a:solidFill>
-                  <a:srgbClr val="26364A"/>
-                </a:solidFill>
-                <a:latin typeface="맑은 고딕"/>
-              </a:defRPr>
-            </a:pPr>
-            <a:r>
-              <a:t>03  두 휴게소 비교</a:t>
-            </a:r>
-          </a:p>
-          <a:p>
-            <a:pPr>
-              <a:spcAft>
-                <a:spcPts val="1000"/>
-              </a:spcAft>
-              <a:defRPr sz="2100" b="1">
-                <a:solidFill>
-                  <a:srgbClr val="26364A"/>
-                </a:solidFill>
-                <a:latin typeface="맑은 고딕"/>
-              </a:defRPr>
-            </a:pPr>
-            <a:r>
-              <a:t>04  쉼터 위치 · 처음 화면</a:t>
-            </a:r>
-          </a:p>
-        </p:txBody>
-      </p:sp>
-      <p:sp>
-        <p:nvSpPr>
-          <p:cNvPr id="9" name="Rounded Rectangle 8"/>
+              <a:t>08</a:t>
+            </a:r>
+          </a:p>
+        </p:txBody>
+      </p:sp>
+      <p:sp>
+        <p:nvSpPr>
+          <p:cNvPr id="7" name="Rounded Rectangle 6"/>
           <p:cNvSpPr/>
           <p:nvPr/>
         </p:nvSpPr>
         <p:spPr>
           <a:xfrm>
-            <a:off x="8138160" y="5166360"/>
-            <a:ext cx="3520440" cy="822960"/>
+            <a:off x="502920" y="1874519"/>
+            <a:ext cx="3246120" cy="2331720"/>
+          </a:xfrm>
+          <a:prstGeom prst="roundRect">
+            <a:avLst/>
+          </a:prstGeom>
+          <a:solidFill>
+            <a:srgbClr val="FFFFFF"/>
+          </a:solidFill>
+          <a:ln>
+            <a:noFill/>
+          </a:ln>
+        </p:spPr>
+        <p:style>
+          <a:lnRef idx="1">
+            <a:schemeClr val="accent1"/>
+          </a:lnRef>
+          <a:fillRef idx="3">
+            <a:schemeClr val="accent1"/>
+          </a:fillRef>
+          <a:effectRef idx="2">
+            <a:schemeClr val="accent1"/>
+          </a:effectRef>
+          <a:fontRef idx="minor">
+            <a:schemeClr val="lt1"/>
+          </a:fontRef>
+        </p:style>
+        <p:txBody>
+          <a:bodyPr rtlCol="0" anchor="ctr"/>
+          <a:lstStyle/>
+          <a:p>
+            <a:pPr algn="ctr"/>
+            <a:endParaRPr/>
+          </a:p>
+        </p:txBody>
+      </p:sp>
+      <p:sp>
+        <p:nvSpPr>
+          <p:cNvPr id="8" name="Rounded Rectangle 7"/>
+          <p:cNvSpPr/>
+          <p:nvPr/>
+        </p:nvSpPr>
+        <p:spPr>
+          <a:xfrm>
+            <a:off x="502920" y="1874519"/>
+            <a:ext cx="50292" cy="2331720"/>
           </a:xfrm>
           <a:prstGeom prst="roundRect">
             <a:avLst/>
@@ -9280,6 +8988,46 @@
           <a:lstStyle/>
           <a:p>
             <a:pPr algn="ctr"/>
+            <a:endParaRPr/>
+          </a:p>
+        </p:txBody>
+      </p:sp>
+      <p:sp>
+        <p:nvSpPr>
+          <p:cNvPr id="9" name="TextBox 8"/>
+          <p:cNvSpPr txBox="1"/>
+          <p:nvPr/>
+        </p:nvSpPr>
+        <p:spPr>
+          <a:xfrm>
+            <a:off x="704088" y="2057400"/>
+            <a:ext cx="2880360" cy="548640"/>
+          </a:xfrm>
+          <a:prstGeom prst="rect">
+            <a:avLst/>
+          </a:prstGeom>
+          <a:noFill/>
+        </p:spPr>
+        <p:txBody>
+          <a:bodyPr wrap="square" lIns="18288" tIns="18288" rIns="18288">
+            <a:spAutoFit/>
+          </a:bodyPr>
+          <a:lstStyle/>
+          <a:p>
+            <a:pPr>
+              <a:spcAft>
+                <a:spcPts val="1000"/>
+              </a:spcAft>
+              <a:defRPr sz="2100" b="1">
+                <a:solidFill>
+                  <a:srgbClr val="20304B"/>
+                </a:solidFill>
+                <a:latin typeface="맑은 고딕"/>
+              </a:defRPr>
+            </a:pPr>
+            <a:r>
+              <a:t>React 19 + Vite 7</a:t>
+            </a:r>
           </a:p>
         </p:txBody>
       </p:sp>
@@ -9291,8 +9039,8 @@
         </p:nvSpPr>
         <p:spPr>
           <a:xfrm>
-            <a:off x="8366760" y="5413248"/>
-            <a:ext cx="3063240" cy="365760"/>
+            <a:off x="704088" y="2743200"/>
+            <a:ext cx="2834639" cy="1463039"/>
           </a:xfrm>
           <a:prstGeom prst="rect">
             <a:avLst/>
@@ -9300,7 +9048,7 @@
           <a:noFill/>
         </p:spPr>
         <p:txBody>
-          <a:bodyPr wrap="square" lIns="18288" rIns="18288" tIns="18288">
+          <a:bodyPr wrap="square" lIns="18288" tIns="18288" rIns="18288">
             <a:spAutoFit/>
           </a:bodyPr>
           <a:lstStyle/>
@@ -9309,15 +9057,512 @@
               <a:spcAft>
                 <a:spcPts val="1000"/>
               </a:spcAft>
-              <a:defRPr sz="1800" b="1">
-                <a:solidFill>
-                  <a:srgbClr val="FFFFFF"/>
-                </a:solidFill>
-                <a:latin typeface="맑은 고딕"/>
-              </a:defRPr>
-            </a:pPr>
-            <a:r>
-              <a:t>배포 URL 입력</a:t>
+              <a:defRPr sz="1700" b="0">
+                <a:solidFill>
+                  <a:srgbClr val="708097"/>
+                </a:solidFill>
+                <a:latin typeface="맑은 고딕"/>
+              </a:defRPr>
+            </a:pPr>
+            <a:r>
+              <a:t>반응형 UI · 상태 관리</a:t>
+            </a:r>
+          </a:p>
+          <a:p>
+            <a:pPr>
+              <a:spcAft>
+                <a:spcPts val="1000"/>
+              </a:spcAft>
+              <a:defRPr sz="1700" b="0">
+                <a:solidFill>
+                  <a:srgbClr val="708097"/>
+                </a:solidFill>
+                <a:latin typeface="맑은 고딕"/>
+              </a:defRPr>
+            </a:pPr>
+            <a:r>
+              <a:t>지도 · 비교 · 로딩 안내</a:t>
+            </a:r>
+          </a:p>
+        </p:txBody>
+      </p:sp>
+      <p:sp>
+        <p:nvSpPr>
+          <p:cNvPr id="11" name="TextBox 10"/>
+          <p:cNvSpPr txBox="1"/>
+          <p:nvPr/>
+        </p:nvSpPr>
+        <p:spPr>
+          <a:xfrm>
+            <a:off x="3840480" y="2560320"/>
+            <a:ext cx="457200" cy="548640"/>
+          </a:xfrm>
+          <a:prstGeom prst="rect">
+            <a:avLst/>
+          </a:prstGeom>
+          <a:noFill/>
+        </p:spPr>
+        <p:txBody>
+          <a:bodyPr wrap="square" lIns="18288" tIns="18288" rIns="18288">
+            <a:spAutoFit/>
+          </a:bodyPr>
+          <a:lstStyle/>
+          <a:p>
+            <a:pPr>
+              <a:spcAft>
+                <a:spcPts val="1000"/>
+              </a:spcAft>
+              <a:defRPr sz="3000" b="1">
+                <a:solidFill>
+                  <a:srgbClr val="47858A"/>
+                </a:solidFill>
+                <a:latin typeface="맑은 고딕"/>
+              </a:defRPr>
+            </a:pPr>
+            <a:r>
+              <a:t>→</a:t>
+            </a:r>
+          </a:p>
+        </p:txBody>
+      </p:sp>
+      <p:sp>
+        <p:nvSpPr>
+          <p:cNvPr id="12" name="Rounded Rectangle 11"/>
+          <p:cNvSpPr/>
+          <p:nvPr/>
+        </p:nvSpPr>
+        <p:spPr>
+          <a:xfrm>
+            <a:off x="4434840" y="1874519"/>
+            <a:ext cx="3246120" cy="2331720"/>
+          </a:xfrm>
+          <a:prstGeom prst="roundRect">
+            <a:avLst/>
+          </a:prstGeom>
+          <a:solidFill>
+            <a:srgbClr val="FFFFFF"/>
+          </a:solidFill>
+          <a:ln>
+            <a:noFill/>
+          </a:ln>
+        </p:spPr>
+        <p:style>
+          <a:lnRef idx="1">
+            <a:schemeClr val="accent1"/>
+          </a:lnRef>
+          <a:fillRef idx="3">
+            <a:schemeClr val="accent1"/>
+          </a:fillRef>
+          <a:effectRef idx="2">
+            <a:schemeClr val="accent1"/>
+          </a:effectRef>
+          <a:fontRef idx="minor">
+            <a:schemeClr val="lt1"/>
+          </a:fontRef>
+        </p:style>
+        <p:txBody>
+          <a:bodyPr rtlCol="0" anchor="ctr"/>
+          <a:lstStyle/>
+          <a:p>
+            <a:pPr algn="ctr"/>
+            <a:endParaRPr/>
+          </a:p>
+        </p:txBody>
+      </p:sp>
+      <p:sp>
+        <p:nvSpPr>
+          <p:cNvPr id="13" name="Rounded Rectangle 12"/>
+          <p:cNvSpPr/>
+          <p:nvPr/>
+        </p:nvSpPr>
+        <p:spPr>
+          <a:xfrm>
+            <a:off x="4434840" y="1874519"/>
+            <a:ext cx="50292" cy="2331720"/>
+          </a:xfrm>
+          <a:prstGeom prst="roundRect">
+            <a:avLst/>
+          </a:prstGeom>
+          <a:solidFill>
+            <a:srgbClr val="47858A"/>
+          </a:solidFill>
+          <a:ln>
+            <a:noFill/>
+          </a:ln>
+        </p:spPr>
+        <p:style>
+          <a:lnRef idx="1">
+            <a:schemeClr val="accent1"/>
+          </a:lnRef>
+          <a:fillRef idx="3">
+            <a:schemeClr val="accent1"/>
+          </a:fillRef>
+          <a:effectRef idx="2">
+            <a:schemeClr val="accent1"/>
+          </a:effectRef>
+          <a:fontRef idx="minor">
+            <a:schemeClr val="lt1"/>
+          </a:fontRef>
+        </p:style>
+        <p:txBody>
+          <a:bodyPr rtlCol="0" anchor="ctr"/>
+          <a:lstStyle/>
+          <a:p>
+            <a:pPr algn="ctr"/>
+            <a:endParaRPr/>
+          </a:p>
+        </p:txBody>
+      </p:sp>
+      <p:sp>
+        <p:nvSpPr>
+          <p:cNvPr id="14" name="TextBox 13"/>
+          <p:cNvSpPr txBox="1"/>
+          <p:nvPr/>
+        </p:nvSpPr>
+        <p:spPr>
+          <a:xfrm>
+            <a:off x="4636007" y="2057400"/>
+            <a:ext cx="2880360" cy="548640"/>
+          </a:xfrm>
+          <a:prstGeom prst="rect">
+            <a:avLst/>
+          </a:prstGeom>
+          <a:noFill/>
+        </p:spPr>
+        <p:txBody>
+          <a:bodyPr wrap="square" lIns="18288" tIns="18288" rIns="18288">
+            <a:spAutoFit/>
+          </a:bodyPr>
+          <a:lstStyle/>
+          <a:p>
+            <a:pPr>
+              <a:spcAft>
+                <a:spcPts val="1000"/>
+              </a:spcAft>
+              <a:defRPr sz="2100" b="1">
+                <a:solidFill>
+                  <a:srgbClr val="20304B"/>
+                </a:solidFill>
+                <a:latin typeface="맑은 고딕"/>
+              </a:defRPr>
+            </a:pPr>
+            <a:r>
+              <a:t>Node.js 서버</a:t>
+            </a:r>
+          </a:p>
+        </p:txBody>
+      </p:sp>
+      <p:sp>
+        <p:nvSpPr>
+          <p:cNvPr id="15" name="TextBox 14"/>
+          <p:cNvSpPr txBox="1"/>
+          <p:nvPr/>
+        </p:nvSpPr>
+        <p:spPr>
+          <a:xfrm>
+            <a:off x="4636007" y="2743200"/>
+            <a:ext cx="2834639" cy="1463039"/>
+          </a:xfrm>
+          <a:prstGeom prst="rect">
+            <a:avLst/>
+          </a:prstGeom>
+          <a:noFill/>
+        </p:spPr>
+        <p:txBody>
+          <a:bodyPr wrap="square" lIns="18288" tIns="18288" rIns="18288">
+            <a:spAutoFit/>
+          </a:bodyPr>
+          <a:lstStyle/>
+          <a:p>
+            <a:pPr>
+              <a:spcAft>
+                <a:spcPts val="1000"/>
+              </a:spcAft>
+              <a:defRPr sz="1700" b="0">
+                <a:solidFill>
+                  <a:srgbClr val="708097"/>
+                </a:solidFill>
+                <a:latin typeface="맑은 고딕"/>
+              </a:defRPr>
+            </a:pPr>
+            <a:r>
+              <a:t>API 중계 · 데이터 정규화</a:t>
+            </a:r>
+          </a:p>
+          <a:p>
+            <a:pPr>
+              <a:spcAft>
+                <a:spcPts val="1000"/>
+              </a:spcAft>
+              <a:defRPr sz="1700" b="0">
+                <a:solidFill>
+                  <a:srgbClr val="708097"/>
+                </a:solidFill>
+                <a:latin typeface="맑은 고딕"/>
+              </a:defRPr>
+            </a:pPr>
+            <a:r>
+              <a:t>환경변수 · 좌표 캐시</a:t>
+            </a:r>
+          </a:p>
+        </p:txBody>
+      </p:sp>
+      <p:sp>
+        <p:nvSpPr>
+          <p:cNvPr id="16" name="TextBox 15"/>
+          <p:cNvSpPr txBox="1"/>
+          <p:nvPr/>
+        </p:nvSpPr>
+        <p:spPr>
+          <a:xfrm>
+            <a:off x="7772400" y="2560320"/>
+            <a:ext cx="457200" cy="548640"/>
+          </a:xfrm>
+          <a:prstGeom prst="rect">
+            <a:avLst/>
+          </a:prstGeom>
+          <a:noFill/>
+        </p:spPr>
+        <p:txBody>
+          <a:bodyPr wrap="square" lIns="18288" tIns="18288" rIns="18288">
+            <a:spAutoFit/>
+          </a:bodyPr>
+          <a:lstStyle/>
+          <a:p>
+            <a:pPr>
+              <a:spcAft>
+                <a:spcPts val="1000"/>
+              </a:spcAft>
+              <a:defRPr sz="3000" b="1">
+                <a:solidFill>
+                  <a:srgbClr val="47858A"/>
+                </a:solidFill>
+                <a:latin typeface="맑은 고딕"/>
+              </a:defRPr>
+            </a:pPr>
+            <a:r>
+              <a:t>→</a:t>
+            </a:r>
+          </a:p>
+        </p:txBody>
+      </p:sp>
+      <p:sp>
+        <p:nvSpPr>
+          <p:cNvPr id="17" name="Rounded Rectangle 16"/>
+          <p:cNvSpPr/>
+          <p:nvPr/>
+        </p:nvSpPr>
+        <p:spPr>
+          <a:xfrm>
+            <a:off x="8412480" y="1874519"/>
+            <a:ext cx="3246120" cy="2331720"/>
+          </a:xfrm>
+          <a:prstGeom prst="roundRect">
+            <a:avLst/>
+          </a:prstGeom>
+          <a:solidFill>
+            <a:srgbClr val="FFFFFF"/>
+          </a:solidFill>
+          <a:ln>
+            <a:noFill/>
+          </a:ln>
+        </p:spPr>
+        <p:style>
+          <a:lnRef idx="1">
+            <a:schemeClr val="accent1"/>
+          </a:lnRef>
+          <a:fillRef idx="3">
+            <a:schemeClr val="accent1"/>
+          </a:fillRef>
+          <a:effectRef idx="2">
+            <a:schemeClr val="accent1"/>
+          </a:effectRef>
+          <a:fontRef idx="minor">
+            <a:schemeClr val="lt1"/>
+          </a:fontRef>
+        </p:style>
+        <p:txBody>
+          <a:bodyPr rtlCol="0" anchor="ctr"/>
+          <a:lstStyle/>
+          <a:p>
+            <a:pPr algn="ctr"/>
+            <a:endParaRPr/>
+          </a:p>
+        </p:txBody>
+      </p:sp>
+      <p:sp>
+        <p:nvSpPr>
+          <p:cNvPr id="18" name="Rounded Rectangle 17"/>
+          <p:cNvSpPr/>
+          <p:nvPr/>
+        </p:nvSpPr>
+        <p:spPr>
+          <a:xfrm>
+            <a:off x="8412480" y="1874519"/>
+            <a:ext cx="50292" cy="2331720"/>
+          </a:xfrm>
+          <a:prstGeom prst="roundRect">
+            <a:avLst/>
+          </a:prstGeom>
+          <a:solidFill>
+            <a:srgbClr val="47858A"/>
+          </a:solidFill>
+          <a:ln>
+            <a:noFill/>
+          </a:ln>
+        </p:spPr>
+        <p:style>
+          <a:lnRef idx="1">
+            <a:schemeClr val="accent1"/>
+          </a:lnRef>
+          <a:fillRef idx="3">
+            <a:schemeClr val="accent1"/>
+          </a:fillRef>
+          <a:effectRef idx="2">
+            <a:schemeClr val="accent1"/>
+          </a:effectRef>
+          <a:fontRef idx="minor">
+            <a:schemeClr val="lt1"/>
+          </a:fontRef>
+        </p:style>
+        <p:txBody>
+          <a:bodyPr rtlCol="0" anchor="ctr"/>
+          <a:lstStyle/>
+          <a:p>
+            <a:pPr algn="ctr"/>
+            <a:endParaRPr/>
+          </a:p>
+        </p:txBody>
+      </p:sp>
+      <p:sp>
+        <p:nvSpPr>
+          <p:cNvPr id="19" name="TextBox 18"/>
+          <p:cNvSpPr txBox="1"/>
+          <p:nvPr/>
+        </p:nvSpPr>
+        <p:spPr>
+          <a:xfrm>
+            <a:off x="8613648" y="2057400"/>
+            <a:ext cx="2880360" cy="548640"/>
+          </a:xfrm>
+          <a:prstGeom prst="rect">
+            <a:avLst/>
+          </a:prstGeom>
+          <a:noFill/>
+        </p:spPr>
+        <p:txBody>
+          <a:bodyPr wrap="square" lIns="18288" tIns="18288" rIns="18288">
+            <a:spAutoFit/>
+          </a:bodyPr>
+          <a:lstStyle/>
+          <a:p>
+            <a:pPr>
+              <a:spcAft>
+                <a:spcPts val="1000"/>
+              </a:spcAft>
+              <a:defRPr sz="2100" b="1">
+                <a:solidFill>
+                  <a:srgbClr val="20304B"/>
+                </a:solidFill>
+                <a:latin typeface="맑은 고딕"/>
+              </a:defRPr>
+            </a:pPr>
+            <a:r>
+              <a:t>외부 데이터</a:t>
+            </a:r>
+          </a:p>
+        </p:txBody>
+      </p:sp>
+      <p:sp>
+        <p:nvSpPr>
+          <p:cNvPr id="20" name="TextBox 19"/>
+          <p:cNvSpPr txBox="1"/>
+          <p:nvPr/>
+        </p:nvSpPr>
+        <p:spPr>
+          <a:xfrm>
+            <a:off x="8613648" y="2743200"/>
+            <a:ext cx="2834639" cy="1463039"/>
+          </a:xfrm>
+          <a:prstGeom prst="rect">
+            <a:avLst/>
+          </a:prstGeom>
+          <a:noFill/>
+        </p:spPr>
+        <p:txBody>
+          <a:bodyPr wrap="square" lIns="18288" tIns="18288" rIns="18288">
+            <a:spAutoFit/>
+          </a:bodyPr>
+          <a:lstStyle/>
+          <a:p>
+            <a:pPr>
+              <a:spcAft>
+                <a:spcPts val="1000"/>
+              </a:spcAft>
+              <a:defRPr sz="1700" b="0">
+                <a:solidFill>
+                  <a:srgbClr val="708097"/>
+                </a:solidFill>
+                <a:latin typeface="맑은 고딕"/>
+              </a:defRPr>
+            </a:pPr>
+            <a:r>
+              <a:t>한국도로공사 · 공공데이터</a:t>
+            </a:r>
+          </a:p>
+          <a:p>
+            <a:pPr>
+              <a:spcAft>
+                <a:spcPts val="1000"/>
+              </a:spcAft>
+              <a:defRPr sz="1700" b="0">
+                <a:solidFill>
+                  <a:srgbClr val="708097"/>
+                </a:solidFill>
+                <a:latin typeface="맑은 고딕"/>
+              </a:defRPr>
+            </a:pPr>
+            <a:r>
+              <a:t>Kakao Maps / Mobility</a:t>
+            </a:r>
+          </a:p>
+        </p:txBody>
+      </p:sp>
+      <p:sp>
+        <p:nvSpPr>
+          <p:cNvPr id="24" name="TextBox 23"/>
+          <p:cNvSpPr txBox="1"/>
+          <p:nvPr/>
+        </p:nvSpPr>
+        <p:spPr>
+          <a:xfrm>
+            <a:off x="640080" y="5943600"/>
+            <a:ext cx="10972800" cy="320040"/>
+          </a:xfrm>
+          <a:prstGeom prst="rect">
+            <a:avLst/>
+          </a:prstGeom>
+          <a:noFill/>
+        </p:spPr>
+        <p:txBody>
+          <a:bodyPr wrap="square" lIns="18288" tIns="18288" rIns="18288">
+            <a:spAutoFit/>
+          </a:bodyPr>
+          <a:lstStyle/>
+          <a:p>
+            <a:pPr>
+              <a:spcAft>
+                <a:spcPts val="1000"/>
+              </a:spcAft>
+              <a:defRPr sz="1200" b="0">
+                <a:solidFill>
+                  <a:srgbClr val="708097"/>
+                </a:solidFill>
+                <a:latin typeface="맑은 고딕"/>
+              </a:defRPr>
+            </a:pPr>
+            <a:r>
+              <a:t>배포 후 발표용 문구 · 제출 전 공개 URL과 접속 상태 확인</a:t>
             </a:r>
           </a:p>
         </p:txBody>
@@ -9330,8 +9575,8 @@
 </p:sld>
 </file>
 
-<file path=ppt/slides/slide8.xml><?xml version="1.0" encoding="utf-8"?>
-<p:sld xmlns:a="http://schemas.openxmlformats.org/drawingml/2006/main" xmlns:p="http://schemas.openxmlformats.org/presentationml/2006/main" xmlns:r="http://schemas.openxmlformats.org/officeDocument/2006/relationships">
+<file path=ppt/slides/slide9.xml><?xml version="1.0" encoding="utf-8"?>
+<p:sld xmlns:a="http://schemas.openxmlformats.org/drawingml/2006/main" xmlns:r="http://schemas.openxmlformats.org/officeDocument/2006/relationships" xmlns:p="http://schemas.openxmlformats.org/presentationml/2006/main">
   <p:cSld>
     <p:bg>
       <p:bgPr>
@@ -9347,7 +9592,14 @@
         <p:cNvGrpSpPr/>
         <p:nvPr/>
       </p:nvGrpSpPr>
-      <p:grpSpPr/>
+      <p:grpSpPr>
+        <a:xfrm>
+          <a:off x="0" y="0"/>
+          <a:ext cx="0" cy="0"/>
+          <a:chOff x="0" y="0"/>
+          <a:chExt cx="0" cy="0"/>
+        </a:xfrm>
+      </p:grpSpPr>
       <p:sp>
         <p:nvSpPr>
           <p:cNvPr id="2" name="TextBox 1"/>
@@ -9365,7 +9617,7 @@
           <a:noFill/>
         </p:spPr>
         <p:txBody>
-          <a:bodyPr wrap="square" lIns="18288" rIns="18288" tIns="18288">
+          <a:bodyPr wrap="square" lIns="18288" tIns="18288" rIns="18288">
             <a:spAutoFit/>
           </a:bodyPr>
           <a:lstStyle/>
@@ -9382,7 +9634,7 @@
               </a:defRPr>
             </a:pPr>
             <a:r>
-              <a:t>07 / STACK &amp; DEPLOYMENT</a:t>
+              <a:t>08 / IMPACT &amp; LIMITS</a:t>
             </a:r>
           </a:p>
         </p:txBody>
@@ -9404,7 +9656,7 @@
           <a:noFill/>
         </p:spPr>
         <p:txBody>
-          <a:bodyPr wrap="square" lIns="18288" rIns="18288" tIns="18288">
+          <a:bodyPr wrap="square" lIns="18288" tIns="18288" rIns="18288">
             <a:spAutoFit/>
           </a:bodyPr>
           <a:lstStyle/>
@@ -9421,7 +9673,7 @@
               </a:defRPr>
             </a:pPr>
             <a:r>
-              <a:t>화면과 API를 분리해 운영할 수 있도록 구성했습니다</a:t>
+              <a:t>많은 탭보다, 결정에 필요한 정보를 선명하게</a:t>
             </a:r>
           </a:p>
         </p:txBody>
@@ -9466,6 +9718,7 @@
           <a:lstStyle/>
           <a:p>
             <a:pPr algn="ctr"/>
+            <a:endParaRPr/>
           </a:p>
         </p:txBody>
       </p:sp>
@@ -9486,7 +9739,7 @@
           <a:noFill/>
         </p:spPr>
         <p:txBody>
-          <a:bodyPr wrap="square" lIns="18288" rIns="18288" tIns="18288">
+          <a:bodyPr wrap="square" lIns="18288" tIns="18288" rIns="18288">
             <a:spAutoFit/>
           </a:bodyPr>
           <a:lstStyle/>
@@ -9525,7 +9778,7 @@
           <a:noFill/>
         </p:spPr>
         <p:txBody>
-          <a:bodyPr wrap="square" lIns="18288" rIns="18288" tIns="18288">
+          <a:bodyPr wrap="square" lIns="18288" tIns="18288" rIns="18288">
             <a:spAutoFit/>
           </a:bodyPr>
           <a:lstStyle/>
@@ -9542,7 +9795,7 @@
               </a:defRPr>
             </a:pPr>
             <a:r>
-              <a:t>08</a:t>
+              <a:t>09</a:t>
             </a:r>
           </a:p>
         </p:txBody>
@@ -9555,8 +9808,8 @@
         </p:nvSpPr>
         <p:spPr>
           <a:xfrm>
-            <a:off x="502920" y="1874519"/>
-            <a:ext cx="3246120" cy="2331720"/>
+            <a:off x="502920" y="1783080"/>
+            <a:ext cx="5394960" cy="1965960"/>
           </a:xfrm>
           <a:prstGeom prst="roundRect">
             <a:avLst/>
@@ -9587,6 +9840,7 @@
           <a:lstStyle/>
           <a:p>
             <a:pPr algn="ctr"/>
+            <a:endParaRPr/>
           </a:p>
         </p:txBody>
       </p:sp>
@@ -9598,8 +9852,8 @@
         </p:nvSpPr>
         <p:spPr>
           <a:xfrm>
-            <a:off x="502920" y="1874519"/>
-            <a:ext cx="50292" cy="2331720"/>
+            <a:off x="502920" y="1783080"/>
+            <a:ext cx="50292" cy="1965960"/>
           </a:xfrm>
           <a:prstGeom prst="roundRect">
             <a:avLst/>
@@ -9630,6 +9884,7 @@
           <a:lstStyle/>
           <a:p>
             <a:pPr algn="ctr"/>
+            <a:endParaRPr/>
           </a:p>
         </p:txBody>
       </p:sp>
@@ -9641,8 +9896,8 @@
         </p:nvSpPr>
         <p:spPr>
           <a:xfrm>
-            <a:off x="704088" y="2057400"/>
-            <a:ext cx="2880360" cy="548640"/>
+            <a:off x="704088" y="1965960"/>
+            <a:ext cx="5029200" cy="548640"/>
           </a:xfrm>
           <a:prstGeom prst="rect">
             <a:avLst/>
@@ -9650,7 +9905,7 @@
           <a:noFill/>
         </p:spPr>
         <p:txBody>
-          <a:bodyPr wrap="square" lIns="18288" rIns="18288" tIns="18288">
+          <a:bodyPr wrap="square" lIns="18288" tIns="18288" rIns="18288">
             <a:spAutoFit/>
           </a:bodyPr>
           <a:lstStyle/>
@@ -9667,7 +9922,7 @@
               </a:defRPr>
             </a:pPr>
             <a:r>
-              <a:t>React 19 + Vite 7</a:t>
+              <a:t>사용자에게 주는 가치</a:t>
             </a:r>
           </a:p>
         </p:txBody>
@@ -9680,8 +9935,8 @@
         </p:nvSpPr>
         <p:spPr>
           <a:xfrm>
-            <a:off x="704088" y="2743200"/>
-            <a:ext cx="2834639" cy="1463039"/>
+            <a:off x="704088" y="2651760"/>
+            <a:ext cx="4983480" cy="1097280"/>
           </a:xfrm>
           <a:prstGeom prst="rect">
             <a:avLst/>
@@ -9689,7 +9944,7 @@
           <a:noFill/>
         </p:spPr>
         <p:txBody>
-          <a:bodyPr wrap="square" lIns="18288" rIns="18288" tIns="18288">
+          <a:bodyPr wrap="square" lIns="18288" tIns="18288" rIns="18288">
             <a:spAutoFit/>
           </a:bodyPr>
           <a:lstStyle/>
@@ -9706,7 +9961,7 @@
               </a:defRPr>
             </a:pPr>
             <a:r>
-              <a:t>반응형 UI · 상태 관리</a:t>
+              <a:t>가는 방향으로 탐색 · 방문 정보 통합</a:t>
             </a:r>
           </a:p>
           <a:p>
@@ -9722,60 +9977,21 @@
               </a:defRPr>
             </a:pPr>
             <a:r>
-              <a:t>지도 · 비교 · 로딩 안내</a:t>
-            </a:r>
-          </a:p>
-        </p:txBody>
-      </p:sp>
-      <p:sp>
-        <p:nvSpPr>
-          <p:cNvPr id="11" name="TextBox 10"/>
-          <p:cNvSpPr txBox="1"/>
-          <p:nvPr/>
-        </p:nvSpPr>
-        <p:spPr>
-          <a:xfrm>
-            <a:off x="3840480" y="2560320"/>
-            <a:ext cx="457200" cy="548640"/>
-          </a:xfrm>
-          <a:prstGeom prst="rect">
-            <a:avLst/>
-          </a:prstGeom>
-          <a:noFill/>
-        </p:spPr>
-        <p:txBody>
-          <a:bodyPr wrap="square" lIns="18288" rIns="18288" tIns="18288">
-            <a:spAutoFit/>
-          </a:bodyPr>
-          <a:lstStyle/>
-          <a:p>
-            <a:pPr>
-              <a:spcAft>
-                <a:spcPts val="1000"/>
-              </a:spcAft>
-              <a:defRPr sz="3000" b="1">
-                <a:solidFill>
-                  <a:srgbClr val="47858A"/>
-                </a:solidFill>
-                <a:latin typeface="맑은 고딕"/>
-              </a:defRPr>
-            </a:pPr>
-            <a:r>
-              <a:t>→</a:t>
-            </a:r>
-          </a:p>
-        </p:txBody>
-      </p:sp>
-      <p:sp>
-        <p:nvSpPr>
-          <p:cNvPr id="12" name="Rounded Rectangle 11"/>
+              <a:t>동일 음식 가격과 주차 규모 비교</a:t>
+            </a:r>
+          </a:p>
+        </p:txBody>
+      </p:sp>
+      <p:sp>
+        <p:nvSpPr>
+          <p:cNvPr id="11" name="Rounded Rectangle 10"/>
           <p:cNvSpPr/>
           <p:nvPr/>
         </p:nvSpPr>
         <p:spPr>
           <a:xfrm>
-            <a:off x="4434840" y="1874519"/>
-            <a:ext cx="3246120" cy="2331720"/>
+            <a:off x="6126480" y="1783080"/>
+            <a:ext cx="5532120" cy="1965960"/>
           </a:xfrm>
           <a:prstGeom prst="roundRect">
             <a:avLst/>
@@ -9806,19 +10022,20 @@
           <a:lstStyle/>
           <a:p>
             <a:pPr algn="ctr"/>
-          </a:p>
-        </p:txBody>
-      </p:sp>
-      <p:sp>
-        <p:nvSpPr>
-          <p:cNvPr id="13" name="Rounded Rectangle 12"/>
+            <a:endParaRPr/>
+          </a:p>
+        </p:txBody>
+      </p:sp>
+      <p:sp>
+        <p:nvSpPr>
+          <p:cNvPr id="12" name="Rounded Rectangle 11"/>
           <p:cNvSpPr/>
           <p:nvPr/>
         </p:nvSpPr>
         <p:spPr>
           <a:xfrm>
-            <a:off x="4434840" y="1874519"/>
-            <a:ext cx="50292" cy="2331720"/>
+            <a:off x="6126480" y="1783080"/>
+            <a:ext cx="50292" cy="1965960"/>
           </a:xfrm>
           <a:prstGeom prst="roundRect">
             <a:avLst/>
@@ -9849,6 +10066,46 @@
           <a:lstStyle/>
           <a:p>
             <a:pPr algn="ctr"/>
+            <a:endParaRPr/>
+          </a:p>
+        </p:txBody>
+      </p:sp>
+      <p:sp>
+        <p:nvSpPr>
+          <p:cNvPr id="13" name="TextBox 12"/>
+          <p:cNvSpPr txBox="1"/>
+          <p:nvPr/>
+        </p:nvSpPr>
+        <p:spPr>
+          <a:xfrm>
+            <a:off x="6327648" y="1965960"/>
+            <a:ext cx="5166359" cy="548640"/>
+          </a:xfrm>
+          <a:prstGeom prst="rect">
+            <a:avLst/>
+          </a:prstGeom>
+          <a:noFill/>
+        </p:spPr>
+        <p:txBody>
+          <a:bodyPr wrap="square" lIns="18288" tIns="18288" rIns="18288">
+            <a:spAutoFit/>
+          </a:bodyPr>
+          <a:lstStyle/>
+          <a:p>
+            <a:pPr>
+              <a:spcAft>
+                <a:spcPts val="1000"/>
+              </a:spcAft>
+              <a:defRPr sz="2100" b="1">
+                <a:solidFill>
+                  <a:srgbClr val="20304B"/>
+                </a:solidFill>
+                <a:latin typeface="맑은 고딕"/>
+              </a:defRPr>
+            </a:pPr>
+            <a:r>
+              <a:t>정보의 신뢰성을 위한 장치</a:t>
+            </a:r>
           </a:p>
         </p:txBody>
       </p:sp>
@@ -9860,8 +10117,8 @@
         </p:nvSpPr>
         <p:spPr>
           <a:xfrm>
-            <a:off x="4636007" y="2057400"/>
-            <a:ext cx="2880360" cy="548640"/>
+            <a:off x="6327648" y="2651760"/>
+            <a:ext cx="5120640" cy="1097280"/>
           </a:xfrm>
           <a:prstGeom prst="rect">
             <a:avLst/>
@@ -9869,7 +10126,7 @@
           <a:noFill/>
         </p:spPr>
         <p:txBody>
-          <a:bodyPr wrap="square" lIns="18288" rIns="18288" tIns="18288">
+          <a:bodyPr wrap="square" lIns="18288" tIns="18288" rIns="18288">
             <a:spAutoFit/>
           </a:bodyPr>
           <a:lstStyle/>
@@ -9878,45 +10135,6 @@
               <a:spcAft>
                 <a:spcPts val="1000"/>
               </a:spcAft>
-              <a:defRPr sz="2100" b="1">
-                <a:solidFill>
-                  <a:srgbClr val="20304B"/>
-                </a:solidFill>
-                <a:latin typeface="맑은 고딕"/>
-              </a:defRPr>
-            </a:pPr>
-            <a:r>
-              <a:t>Node.js 서버</a:t>
-            </a:r>
-          </a:p>
-        </p:txBody>
-      </p:sp>
-      <p:sp>
-        <p:nvSpPr>
-          <p:cNvPr id="15" name="TextBox 14"/>
-          <p:cNvSpPr txBox="1"/>
-          <p:nvPr/>
-        </p:nvSpPr>
-        <p:spPr>
-          <a:xfrm>
-            <a:off x="4636007" y="2743200"/>
-            <a:ext cx="2834639" cy="1463039"/>
-          </a:xfrm>
-          <a:prstGeom prst="rect">
-            <a:avLst/>
-          </a:prstGeom>
-          <a:noFill/>
-        </p:spPr>
-        <p:txBody>
-          <a:bodyPr wrap="square" lIns="18288" rIns="18288" tIns="18288">
-            <a:spAutoFit/>
-          </a:bodyPr>
-          <a:lstStyle/>
-          <a:p>
-            <a:pPr>
-              <a:spcAft>
-                <a:spcPts val="1000"/>
-              </a:spcAft>
               <a:defRPr sz="1700" b="0">
                 <a:solidFill>
                   <a:srgbClr val="708097"/>
@@ -9925,7 +10143,7 @@
               </a:defRPr>
             </a:pPr>
             <a:r>
-              <a:t>API 중계 · 데이터 정규화</a:t>
+              <a:t>자료 기준일 표시 · 미상과 없음 구분</a:t>
             </a:r>
           </a:p>
           <a:p>
@@ -9941,240 +10159,21 @@
               </a:defRPr>
             </a:pPr>
             <a:r>
-              <a:t>환경변수 · 좌표 캐시</a:t>
-            </a:r>
-          </a:p>
-        </p:txBody>
-      </p:sp>
-      <p:sp>
-        <p:nvSpPr>
-          <p:cNvPr id="16" name="TextBox 15"/>
-          <p:cNvSpPr txBox="1"/>
-          <p:nvPr/>
-        </p:nvSpPr>
-        <p:spPr>
-          <a:xfrm>
-            <a:off x="7772400" y="2560320"/>
-            <a:ext cx="457200" cy="548640"/>
-          </a:xfrm>
-          <a:prstGeom prst="rect">
-            <a:avLst/>
-          </a:prstGeom>
-          <a:noFill/>
-        </p:spPr>
-        <p:txBody>
-          <a:bodyPr wrap="square" lIns="18288" rIns="18288" tIns="18288">
-            <a:spAutoFit/>
-          </a:bodyPr>
-          <a:lstStyle/>
-          <a:p>
-            <a:pPr>
-              <a:spcAft>
-                <a:spcPts val="1000"/>
-              </a:spcAft>
-              <a:defRPr sz="3000" b="1">
-                <a:solidFill>
-                  <a:srgbClr val="47858A"/>
-                </a:solidFill>
-                <a:latin typeface="맑은 고딕"/>
-              </a:defRPr>
-            </a:pPr>
-            <a:r>
-              <a:t>→</a:t>
-            </a:r>
-          </a:p>
-        </p:txBody>
-      </p:sp>
-      <p:sp>
-        <p:nvSpPr>
-          <p:cNvPr id="17" name="Rounded Rectangle 16"/>
+              <a:t>로딩 / 오류 / 재시도 상태 안내</a:t>
+            </a:r>
+          </a:p>
+        </p:txBody>
+      </p:sp>
+      <p:sp>
+        <p:nvSpPr>
+          <p:cNvPr id="15" name="Rounded Rectangle 14"/>
           <p:cNvSpPr/>
           <p:nvPr/>
         </p:nvSpPr>
         <p:spPr>
           <a:xfrm>
-            <a:off x="8412480" y="1874519"/>
-            <a:ext cx="3246120" cy="2331720"/>
-          </a:xfrm>
-          <a:prstGeom prst="roundRect">
-            <a:avLst/>
-          </a:prstGeom>
-          <a:solidFill>
-            <a:srgbClr val="FFFFFF"/>
-          </a:solidFill>
-          <a:ln>
-            <a:noFill/>
-          </a:ln>
-        </p:spPr>
-        <p:style>
-          <a:lnRef idx="1">
-            <a:schemeClr val="accent1"/>
-          </a:lnRef>
-          <a:fillRef idx="3">
-            <a:schemeClr val="accent1"/>
-          </a:fillRef>
-          <a:effectRef idx="2">
-            <a:schemeClr val="accent1"/>
-          </a:effectRef>
-          <a:fontRef idx="minor">
-            <a:schemeClr val="lt1"/>
-          </a:fontRef>
-        </p:style>
-        <p:txBody>
-          <a:bodyPr rtlCol="0" anchor="ctr"/>
-          <a:lstStyle/>
-          <a:p>
-            <a:pPr algn="ctr"/>
-          </a:p>
-        </p:txBody>
-      </p:sp>
-      <p:sp>
-        <p:nvSpPr>
-          <p:cNvPr id="18" name="Rounded Rectangle 17"/>
-          <p:cNvSpPr/>
-          <p:nvPr/>
-        </p:nvSpPr>
-        <p:spPr>
-          <a:xfrm>
-            <a:off x="8412480" y="1874519"/>
-            <a:ext cx="50292" cy="2331720"/>
-          </a:xfrm>
-          <a:prstGeom prst="roundRect">
-            <a:avLst/>
-          </a:prstGeom>
-          <a:solidFill>
-            <a:srgbClr val="47858A"/>
-          </a:solidFill>
-          <a:ln>
-            <a:noFill/>
-          </a:ln>
-        </p:spPr>
-        <p:style>
-          <a:lnRef idx="1">
-            <a:schemeClr val="accent1"/>
-          </a:lnRef>
-          <a:fillRef idx="3">
-            <a:schemeClr val="accent1"/>
-          </a:fillRef>
-          <a:effectRef idx="2">
-            <a:schemeClr val="accent1"/>
-          </a:effectRef>
-          <a:fontRef idx="minor">
-            <a:schemeClr val="lt1"/>
-          </a:fontRef>
-        </p:style>
-        <p:txBody>
-          <a:bodyPr rtlCol="0" anchor="ctr"/>
-          <a:lstStyle/>
-          <a:p>
-            <a:pPr algn="ctr"/>
-          </a:p>
-        </p:txBody>
-      </p:sp>
-      <p:sp>
-        <p:nvSpPr>
-          <p:cNvPr id="19" name="TextBox 18"/>
-          <p:cNvSpPr txBox="1"/>
-          <p:nvPr/>
-        </p:nvSpPr>
-        <p:spPr>
-          <a:xfrm>
-            <a:off x="8613648" y="2057400"/>
-            <a:ext cx="2880360" cy="548640"/>
-          </a:xfrm>
-          <a:prstGeom prst="rect">
-            <a:avLst/>
-          </a:prstGeom>
-          <a:noFill/>
-        </p:spPr>
-        <p:txBody>
-          <a:bodyPr wrap="square" lIns="18288" rIns="18288" tIns="18288">
-            <a:spAutoFit/>
-          </a:bodyPr>
-          <a:lstStyle/>
-          <a:p>
-            <a:pPr>
-              <a:spcAft>
-                <a:spcPts val="1000"/>
-              </a:spcAft>
-              <a:defRPr sz="2100" b="1">
-                <a:solidFill>
-                  <a:srgbClr val="20304B"/>
-                </a:solidFill>
-                <a:latin typeface="맑은 고딕"/>
-              </a:defRPr>
-            </a:pPr>
-            <a:r>
-              <a:t>외부 데이터</a:t>
-            </a:r>
-          </a:p>
-        </p:txBody>
-      </p:sp>
-      <p:sp>
-        <p:nvSpPr>
-          <p:cNvPr id="20" name="TextBox 19"/>
-          <p:cNvSpPr txBox="1"/>
-          <p:nvPr/>
-        </p:nvSpPr>
-        <p:spPr>
-          <a:xfrm>
-            <a:off x="8613648" y="2743200"/>
-            <a:ext cx="2834639" cy="1463039"/>
-          </a:xfrm>
-          <a:prstGeom prst="rect">
-            <a:avLst/>
-          </a:prstGeom>
-          <a:noFill/>
-        </p:spPr>
-        <p:txBody>
-          <a:bodyPr wrap="square" lIns="18288" rIns="18288" tIns="18288">
-            <a:spAutoFit/>
-          </a:bodyPr>
-          <a:lstStyle/>
-          <a:p>
-            <a:pPr>
-              <a:spcAft>
-                <a:spcPts val="1000"/>
-              </a:spcAft>
-              <a:defRPr sz="1700" b="0">
-                <a:solidFill>
-                  <a:srgbClr val="708097"/>
-                </a:solidFill>
-                <a:latin typeface="맑은 고딕"/>
-              </a:defRPr>
-            </a:pPr>
-            <a:r>
-              <a:t>한국도로공사 · 공공데이터</a:t>
-            </a:r>
-          </a:p>
-          <a:p>
-            <a:pPr>
-              <a:spcAft>
-                <a:spcPts val="1000"/>
-              </a:spcAft>
-              <a:defRPr sz="1700" b="0">
-                <a:solidFill>
-                  <a:srgbClr val="708097"/>
-                </a:solidFill>
-                <a:latin typeface="맑은 고딕"/>
-              </a:defRPr>
-            </a:pPr>
-            <a:r>
-              <a:t>Kakao Maps / Mobility</a:t>
-            </a:r>
-          </a:p>
-        </p:txBody>
-      </p:sp>
-      <p:sp>
-        <p:nvSpPr>
-          <p:cNvPr id="21" name="Rounded Rectangle 20"/>
-          <p:cNvSpPr/>
-          <p:nvPr/>
-        </p:nvSpPr>
-        <p:spPr>
-          <a:xfrm>
-            <a:off x="502920" y="4617720"/>
-            <a:ext cx="11155680" cy="1143000"/>
+            <a:off x="502920" y="4114800"/>
+            <a:ext cx="11155680" cy="1737360"/>
           </a:xfrm>
           <a:prstGeom prst="roundRect">
             <a:avLst/>
@@ -10205,19 +10204,20 @@
           <a:lstStyle/>
           <a:p>
             <a:pPr algn="ctr"/>
-          </a:p>
-        </p:txBody>
-      </p:sp>
-      <p:sp>
-        <p:nvSpPr>
-          <p:cNvPr id="22" name="TextBox 21"/>
+            <a:endParaRPr/>
+          </a:p>
+        </p:txBody>
+      </p:sp>
+      <p:sp>
+        <p:nvSpPr>
+          <p:cNvPr id="16" name="TextBox 15"/>
           <p:cNvSpPr txBox="1"/>
           <p:nvPr/>
         </p:nvSpPr>
         <p:spPr>
           <a:xfrm>
-            <a:off x="777240" y="4919472"/>
-            <a:ext cx="2286000" cy="548640"/>
+            <a:off x="777240" y="4343400"/>
+            <a:ext cx="1828800" cy="411480"/>
           </a:xfrm>
           <a:prstGeom prst="rect">
             <a:avLst/>
@@ -10225,7 +10225,7 @@
           <a:noFill/>
         </p:spPr>
         <p:txBody>
-          <a:bodyPr wrap="square" lIns="18288" rIns="18288" tIns="18288">
+          <a:bodyPr wrap="square" lIns="18288" tIns="18288" rIns="18288">
             <a:spAutoFit/>
           </a:bodyPr>
           <a:lstStyle/>
@@ -10234,751 +10234,6 @@
               <a:spcAft>
                 <a:spcPts val="1000"/>
               </a:spcAft>
-              <a:defRPr sz="2500" b="1">
-                <a:solidFill>
-                  <a:srgbClr val="F0BC5E"/>
-                </a:solidFill>
-                <a:latin typeface="맑은 고딕"/>
-              </a:defRPr>
-            </a:pPr>
-            <a:r>
-              <a:t>배포 완료</a:t>
-            </a:r>
-          </a:p>
-        </p:txBody>
-      </p:sp>
-      <p:sp>
-        <p:nvSpPr>
-          <p:cNvPr id="23" name="TextBox 22"/>
-          <p:cNvSpPr txBox="1"/>
-          <p:nvPr/>
-        </p:nvSpPr>
-        <p:spPr>
-          <a:xfrm>
-            <a:off x="3383280" y="4956048"/>
-            <a:ext cx="7772400" cy="548640"/>
-          </a:xfrm>
-          <a:prstGeom prst="rect">
-            <a:avLst/>
-          </a:prstGeom>
-          <a:noFill/>
-        </p:spPr>
-        <p:txBody>
-          <a:bodyPr wrap="square" lIns="18288" rIns="18288" tIns="18288">
-            <a:spAutoFit/>
-          </a:bodyPr>
-          <a:lstStyle/>
-          <a:p>
-            <a:pPr>
-              <a:spcAft>
-                <a:spcPts val="1000"/>
-              </a:spcAft>
-              <a:defRPr sz="2200" b="0">
-                <a:solidFill>
-                  <a:srgbClr val="FFFFFF"/>
-                </a:solidFill>
-                <a:latin typeface="맑은 고딕"/>
-              </a:defRPr>
-            </a:pPr>
-            <a:r>
-              <a:t>서비스 주소  |  배포 URL 입력</a:t>
-            </a:r>
-          </a:p>
-        </p:txBody>
-      </p:sp>
-      <p:sp>
-        <p:nvSpPr>
-          <p:cNvPr id="24" name="TextBox 23"/>
-          <p:cNvSpPr txBox="1"/>
-          <p:nvPr/>
-        </p:nvSpPr>
-        <p:spPr>
-          <a:xfrm>
-            <a:off x="640080" y="5943600"/>
-            <a:ext cx="10972800" cy="320040"/>
-          </a:xfrm>
-          <a:prstGeom prst="rect">
-            <a:avLst/>
-          </a:prstGeom>
-          <a:noFill/>
-        </p:spPr>
-        <p:txBody>
-          <a:bodyPr wrap="square" lIns="18288" rIns="18288" tIns="18288">
-            <a:spAutoFit/>
-          </a:bodyPr>
-          <a:lstStyle/>
-          <a:p>
-            <a:pPr>
-              <a:spcAft>
-                <a:spcPts val="1000"/>
-              </a:spcAft>
-              <a:defRPr sz="1200" b="0">
-                <a:solidFill>
-                  <a:srgbClr val="708097"/>
-                </a:solidFill>
-                <a:latin typeface="맑은 고딕"/>
-              </a:defRPr>
-            </a:pPr>
-            <a:r>
-              <a:t>배포 후 발표용 문구 · 제출 전 공개 URL과 접속 상태 확인</a:t>
-            </a:r>
-          </a:p>
-        </p:txBody>
-      </p:sp>
-    </p:spTree>
-  </p:cSld>
-  <p:clrMapOvr>
-    <a:masterClrMapping/>
-  </p:clrMapOvr>
-</p:sld>
-</file>
-
-<file path=ppt/slides/slide9.xml><?xml version="1.0" encoding="utf-8"?>
-<p:sld xmlns:a="http://schemas.openxmlformats.org/drawingml/2006/main" xmlns:p="http://schemas.openxmlformats.org/presentationml/2006/main" xmlns:r="http://schemas.openxmlformats.org/officeDocument/2006/relationships">
-  <p:cSld>
-    <p:bg>
-      <p:bgPr>
-        <a:solidFill>
-          <a:srgbClr val="F4F7FA"/>
-        </a:solidFill>
-        <a:effectLst/>
-      </p:bgPr>
-    </p:bg>
-    <p:spTree>
-      <p:nvGrpSpPr>
-        <p:cNvPr id="1" name=""/>
-        <p:cNvGrpSpPr/>
-        <p:nvPr/>
-      </p:nvGrpSpPr>
-      <p:grpSpPr/>
-      <p:sp>
-        <p:nvSpPr>
-          <p:cNvPr id="2" name="TextBox 1"/>
-          <p:cNvSpPr txBox="1"/>
-          <p:nvPr/>
-        </p:nvSpPr>
-        <p:spPr>
-          <a:xfrm>
-            <a:off x="502920" y="228600"/>
-            <a:ext cx="10058400" cy="274320"/>
-          </a:xfrm>
-          <a:prstGeom prst="rect">
-            <a:avLst/>
-          </a:prstGeom>
-          <a:noFill/>
-        </p:spPr>
-        <p:txBody>
-          <a:bodyPr wrap="square" lIns="18288" rIns="18288" tIns="18288">
-            <a:spAutoFit/>
-          </a:bodyPr>
-          <a:lstStyle/>
-          <a:p>
-            <a:pPr>
-              <a:spcAft>
-                <a:spcPts val="1000"/>
-              </a:spcAft>
-              <a:defRPr sz="1100" b="1">
-                <a:solidFill>
-                  <a:srgbClr val="47858A"/>
-                </a:solidFill>
-                <a:latin typeface="맑은 고딕"/>
-              </a:defRPr>
-            </a:pPr>
-            <a:r>
-              <a:t>08 / IMPACT &amp; LIMITS</a:t>
-            </a:r>
-          </a:p>
-        </p:txBody>
-      </p:sp>
-      <p:sp>
-        <p:nvSpPr>
-          <p:cNvPr id="3" name="TextBox 2"/>
-          <p:cNvSpPr txBox="1"/>
-          <p:nvPr/>
-        </p:nvSpPr>
-        <p:spPr>
-          <a:xfrm>
-            <a:off x="502920" y="713232"/>
-            <a:ext cx="11155680" cy="731520"/>
-          </a:xfrm>
-          <a:prstGeom prst="rect">
-            <a:avLst/>
-          </a:prstGeom>
-          <a:noFill/>
-        </p:spPr>
-        <p:txBody>
-          <a:bodyPr wrap="square" lIns="18288" rIns="18288" tIns="18288">
-            <a:spAutoFit/>
-          </a:bodyPr>
-          <a:lstStyle/>
-          <a:p>
-            <a:pPr>
-              <a:spcAft>
-                <a:spcPts val="1000"/>
-              </a:spcAft>
-              <a:defRPr sz="2900" b="1">
-                <a:solidFill>
-                  <a:srgbClr val="20304B"/>
-                </a:solidFill>
-                <a:latin typeface="맑은 고딕"/>
-              </a:defRPr>
-            </a:pPr>
-            <a:r>
-              <a:t>많은 탭보다, 결정에 필요한 정보를 선명하게</a:t>
-            </a:r>
-          </a:p>
-        </p:txBody>
-      </p:sp>
-      <p:sp>
-        <p:nvSpPr>
-          <p:cNvPr id="4" name="Rounded Rectangle 3"/>
-          <p:cNvSpPr/>
-          <p:nvPr/>
-        </p:nvSpPr>
-        <p:spPr>
-          <a:xfrm>
-            <a:off x="502920" y="6519672"/>
-            <a:ext cx="11155680" cy="10972"/>
-          </a:xfrm>
-          <a:prstGeom prst="roundRect">
-            <a:avLst/>
-          </a:prstGeom>
-          <a:solidFill>
-            <a:srgbClr val="DCE4EB"/>
-          </a:solidFill>
-          <a:ln>
-            <a:noFill/>
-          </a:ln>
-        </p:spPr>
-        <p:style>
-          <a:lnRef idx="1">
-            <a:schemeClr val="accent1"/>
-          </a:lnRef>
-          <a:fillRef idx="3">
-            <a:schemeClr val="accent1"/>
-          </a:fillRef>
-          <a:effectRef idx="2">
-            <a:schemeClr val="accent1"/>
-          </a:effectRef>
-          <a:fontRef idx="minor">
-            <a:schemeClr val="lt1"/>
-          </a:fontRef>
-        </p:style>
-        <p:txBody>
-          <a:bodyPr rtlCol="0" anchor="ctr"/>
-          <a:lstStyle/>
-          <a:p>
-            <a:pPr algn="ctr"/>
-          </a:p>
-        </p:txBody>
-      </p:sp>
-      <p:sp>
-        <p:nvSpPr>
-          <p:cNvPr id="5" name="TextBox 4"/>
-          <p:cNvSpPr txBox="1"/>
-          <p:nvPr/>
-        </p:nvSpPr>
-        <p:spPr>
-          <a:xfrm>
-            <a:off x="502920" y="6601968"/>
-            <a:ext cx="9144000" cy="182880"/>
-          </a:xfrm>
-          <a:prstGeom prst="rect">
-            <a:avLst/>
-          </a:prstGeom>
-          <a:noFill/>
-        </p:spPr>
-        <p:txBody>
-          <a:bodyPr wrap="square" lIns="18288" rIns="18288" tIns="18288">
-            <a:spAutoFit/>
-          </a:bodyPr>
-          <a:lstStyle/>
-          <a:p>
-            <a:pPr>
-              <a:spcAft>
-                <a:spcPts val="1000"/>
-              </a:spcAft>
-              <a:defRPr sz="900" b="0">
-                <a:solidFill>
-                  <a:srgbClr val="708097"/>
-                </a:solidFill>
-                <a:latin typeface="맑은 고딕"/>
-              </a:defRPr>
-            </a:pPr>
-            <a:r>
-              <a:t>휴게길  ·  김수종 / 202395007</a:t>
-            </a:r>
-          </a:p>
-        </p:txBody>
-      </p:sp>
-      <p:sp>
-        <p:nvSpPr>
-          <p:cNvPr id="6" name="TextBox 5"/>
-          <p:cNvSpPr txBox="1"/>
-          <p:nvPr/>
-        </p:nvSpPr>
-        <p:spPr>
-          <a:xfrm>
-            <a:off x="11064240" y="6565392"/>
-            <a:ext cx="548640" cy="274320"/>
-          </a:xfrm>
-          <a:prstGeom prst="rect">
-            <a:avLst/>
-          </a:prstGeom>
-          <a:noFill/>
-        </p:spPr>
-        <p:txBody>
-          <a:bodyPr wrap="square" lIns="18288" rIns="18288" tIns="18288">
-            <a:spAutoFit/>
-          </a:bodyPr>
-          <a:lstStyle/>
-          <a:p>
-            <a:pPr>
-              <a:spcAft>
-                <a:spcPts val="1000"/>
-              </a:spcAft>
-              <a:defRPr sz="1100" b="1">
-                <a:solidFill>
-                  <a:srgbClr val="47858A"/>
-                </a:solidFill>
-                <a:latin typeface="맑은 고딕"/>
-              </a:defRPr>
-            </a:pPr>
-            <a:r>
-              <a:t>09</a:t>
-            </a:r>
-          </a:p>
-        </p:txBody>
-      </p:sp>
-      <p:sp>
-        <p:nvSpPr>
-          <p:cNvPr id="7" name="Rounded Rectangle 6"/>
-          <p:cNvSpPr/>
-          <p:nvPr/>
-        </p:nvSpPr>
-        <p:spPr>
-          <a:xfrm>
-            <a:off x="502920" y="1783080"/>
-            <a:ext cx="5394960" cy="1965960"/>
-          </a:xfrm>
-          <a:prstGeom prst="roundRect">
-            <a:avLst/>
-          </a:prstGeom>
-          <a:solidFill>
-            <a:srgbClr val="FFFFFF"/>
-          </a:solidFill>
-          <a:ln>
-            <a:noFill/>
-          </a:ln>
-        </p:spPr>
-        <p:style>
-          <a:lnRef idx="1">
-            <a:schemeClr val="accent1"/>
-          </a:lnRef>
-          <a:fillRef idx="3">
-            <a:schemeClr val="accent1"/>
-          </a:fillRef>
-          <a:effectRef idx="2">
-            <a:schemeClr val="accent1"/>
-          </a:effectRef>
-          <a:fontRef idx="minor">
-            <a:schemeClr val="lt1"/>
-          </a:fontRef>
-        </p:style>
-        <p:txBody>
-          <a:bodyPr rtlCol="0" anchor="ctr"/>
-          <a:lstStyle/>
-          <a:p>
-            <a:pPr algn="ctr"/>
-          </a:p>
-        </p:txBody>
-      </p:sp>
-      <p:sp>
-        <p:nvSpPr>
-          <p:cNvPr id="8" name="Rounded Rectangle 7"/>
-          <p:cNvSpPr/>
-          <p:nvPr/>
-        </p:nvSpPr>
-        <p:spPr>
-          <a:xfrm>
-            <a:off x="502920" y="1783080"/>
-            <a:ext cx="50292" cy="1965960"/>
-          </a:xfrm>
-          <a:prstGeom prst="roundRect">
-            <a:avLst/>
-          </a:prstGeom>
-          <a:solidFill>
-            <a:srgbClr val="47858A"/>
-          </a:solidFill>
-          <a:ln>
-            <a:noFill/>
-          </a:ln>
-        </p:spPr>
-        <p:style>
-          <a:lnRef idx="1">
-            <a:schemeClr val="accent1"/>
-          </a:lnRef>
-          <a:fillRef idx="3">
-            <a:schemeClr val="accent1"/>
-          </a:fillRef>
-          <a:effectRef idx="2">
-            <a:schemeClr val="accent1"/>
-          </a:effectRef>
-          <a:fontRef idx="minor">
-            <a:schemeClr val="lt1"/>
-          </a:fontRef>
-        </p:style>
-        <p:txBody>
-          <a:bodyPr rtlCol="0" anchor="ctr"/>
-          <a:lstStyle/>
-          <a:p>
-            <a:pPr algn="ctr"/>
-          </a:p>
-        </p:txBody>
-      </p:sp>
-      <p:sp>
-        <p:nvSpPr>
-          <p:cNvPr id="9" name="TextBox 8"/>
-          <p:cNvSpPr txBox="1"/>
-          <p:nvPr/>
-        </p:nvSpPr>
-        <p:spPr>
-          <a:xfrm>
-            <a:off x="704088" y="1965960"/>
-            <a:ext cx="5029200" cy="548640"/>
-          </a:xfrm>
-          <a:prstGeom prst="rect">
-            <a:avLst/>
-          </a:prstGeom>
-          <a:noFill/>
-        </p:spPr>
-        <p:txBody>
-          <a:bodyPr wrap="square" lIns="18288" rIns="18288" tIns="18288">
-            <a:spAutoFit/>
-          </a:bodyPr>
-          <a:lstStyle/>
-          <a:p>
-            <a:pPr>
-              <a:spcAft>
-                <a:spcPts val="1000"/>
-              </a:spcAft>
-              <a:defRPr sz="2100" b="1">
-                <a:solidFill>
-                  <a:srgbClr val="20304B"/>
-                </a:solidFill>
-                <a:latin typeface="맑은 고딕"/>
-              </a:defRPr>
-            </a:pPr>
-            <a:r>
-              <a:t>사용자에게 주는 가치</a:t>
-            </a:r>
-          </a:p>
-        </p:txBody>
-      </p:sp>
-      <p:sp>
-        <p:nvSpPr>
-          <p:cNvPr id="10" name="TextBox 9"/>
-          <p:cNvSpPr txBox="1"/>
-          <p:nvPr/>
-        </p:nvSpPr>
-        <p:spPr>
-          <a:xfrm>
-            <a:off x="704088" y="2651760"/>
-            <a:ext cx="4983480" cy="1097280"/>
-          </a:xfrm>
-          <a:prstGeom prst="rect">
-            <a:avLst/>
-          </a:prstGeom>
-          <a:noFill/>
-        </p:spPr>
-        <p:txBody>
-          <a:bodyPr wrap="square" lIns="18288" rIns="18288" tIns="18288">
-            <a:spAutoFit/>
-          </a:bodyPr>
-          <a:lstStyle/>
-          <a:p>
-            <a:pPr>
-              <a:spcAft>
-                <a:spcPts val="1000"/>
-              </a:spcAft>
-              <a:defRPr sz="1700" b="0">
-                <a:solidFill>
-                  <a:srgbClr val="708097"/>
-                </a:solidFill>
-                <a:latin typeface="맑은 고딕"/>
-              </a:defRPr>
-            </a:pPr>
-            <a:r>
-              <a:t>가는 방향으로 탐색 · 방문 정보 통합</a:t>
-            </a:r>
-          </a:p>
-          <a:p>
-            <a:pPr>
-              <a:spcAft>
-                <a:spcPts val="1000"/>
-              </a:spcAft>
-              <a:defRPr sz="1700" b="0">
-                <a:solidFill>
-                  <a:srgbClr val="708097"/>
-                </a:solidFill>
-                <a:latin typeface="맑은 고딕"/>
-              </a:defRPr>
-            </a:pPr>
-            <a:r>
-              <a:t>동일 음식 가격과 주차 규모 비교</a:t>
-            </a:r>
-          </a:p>
-        </p:txBody>
-      </p:sp>
-      <p:sp>
-        <p:nvSpPr>
-          <p:cNvPr id="11" name="Rounded Rectangle 10"/>
-          <p:cNvSpPr/>
-          <p:nvPr/>
-        </p:nvSpPr>
-        <p:spPr>
-          <a:xfrm>
-            <a:off x="6126480" y="1783080"/>
-            <a:ext cx="5532120" cy="1965960"/>
-          </a:xfrm>
-          <a:prstGeom prst="roundRect">
-            <a:avLst/>
-          </a:prstGeom>
-          <a:solidFill>
-            <a:srgbClr val="FFFFFF"/>
-          </a:solidFill>
-          <a:ln>
-            <a:noFill/>
-          </a:ln>
-        </p:spPr>
-        <p:style>
-          <a:lnRef idx="1">
-            <a:schemeClr val="accent1"/>
-          </a:lnRef>
-          <a:fillRef idx="3">
-            <a:schemeClr val="accent1"/>
-          </a:fillRef>
-          <a:effectRef idx="2">
-            <a:schemeClr val="accent1"/>
-          </a:effectRef>
-          <a:fontRef idx="minor">
-            <a:schemeClr val="lt1"/>
-          </a:fontRef>
-        </p:style>
-        <p:txBody>
-          <a:bodyPr rtlCol="0" anchor="ctr"/>
-          <a:lstStyle/>
-          <a:p>
-            <a:pPr algn="ctr"/>
-          </a:p>
-        </p:txBody>
-      </p:sp>
-      <p:sp>
-        <p:nvSpPr>
-          <p:cNvPr id="12" name="Rounded Rectangle 11"/>
-          <p:cNvSpPr/>
-          <p:nvPr/>
-        </p:nvSpPr>
-        <p:spPr>
-          <a:xfrm>
-            <a:off x="6126480" y="1783080"/>
-            <a:ext cx="50292" cy="1965960"/>
-          </a:xfrm>
-          <a:prstGeom prst="roundRect">
-            <a:avLst/>
-          </a:prstGeom>
-          <a:solidFill>
-            <a:srgbClr val="47858A"/>
-          </a:solidFill>
-          <a:ln>
-            <a:noFill/>
-          </a:ln>
-        </p:spPr>
-        <p:style>
-          <a:lnRef idx="1">
-            <a:schemeClr val="accent1"/>
-          </a:lnRef>
-          <a:fillRef idx="3">
-            <a:schemeClr val="accent1"/>
-          </a:fillRef>
-          <a:effectRef idx="2">
-            <a:schemeClr val="accent1"/>
-          </a:effectRef>
-          <a:fontRef idx="minor">
-            <a:schemeClr val="lt1"/>
-          </a:fontRef>
-        </p:style>
-        <p:txBody>
-          <a:bodyPr rtlCol="0" anchor="ctr"/>
-          <a:lstStyle/>
-          <a:p>
-            <a:pPr algn="ctr"/>
-          </a:p>
-        </p:txBody>
-      </p:sp>
-      <p:sp>
-        <p:nvSpPr>
-          <p:cNvPr id="13" name="TextBox 12"/>
-          <p:cNvSpPr txBox="1"/>
-          <p:nvPr/>
-        </p:nvSpPr>
-        <p:spPr>
-          <a:xfrm>
-            <a:off x="6327648" y="1965960"/>
-            <a:ext cx="5166359" cy="548640"/>
-          </a:xfrm>
-          <a:prstGeom prst="rect">
-            <a:avLst/>
-          </a:prstGeom>
-          <a:noFill/>
-        </p:spPr>
-        <p:txBody>
-          <a:bodyPr wrap="square" lIns="18288" rIns="18288" tIns="18288">
-            <a:spAutoFit/>
-          </a:bodyPr>
-          <a:lstStyle/>
-          <a:p>
-            <a:pPr>
-              <a:spcAft>
-                <a:spcPts val="1000"/>
-              </a:spcAft>
-              <a:defRPr sz="2100" b="1">
-                <a:solidFill>
-                  <a:srgbClr val="20304B"/>
-                </a:solidFill>
-                <a:latin typeface="맑은 고딕"/>
-              </a:defRPr>
-            </a:pPr>
-            <a:r>
-              <a:t>정보의 신뢰성을 위한 장치</a:t>
-            </a:r>
-          </a:p>
-        </p:txBody>
-      </p:sp>
-      <p:sp>
-        <p:nvSpPr>
-          <p:cNvPr id="14" name="TextBox 13"/>
-          <p:cNvSpPr txBox="1"/>
-          <p:nvPr/>
-        </p:nvSpPr>
-        <p:spPr>
-          <a:xfrm>
-            <a:off x="6327648" y="2651760"/>
-            <a:ext cx="5120640" cy="1097280"/>
-          </a:xfrm>
-          <a:prstGeom prst="rect">
-            <a:avLst/>
-          </a:prstGeom>
-          <a:noFill/>
-        </p:spPr>
-        <p:txBody>
-          <a:bodyPr wrap="square" lIns="18288" rIns="18288" tIns="18288">
-            <a:spAutoFit/>
-          </a:bodyPr>
-          <a:lstStyle/>
-          <a:p>
-            <a:pPr>
-              <a:spcAft>
-                <a:spcPts val="1000"/>
-              </a:spcAft>
-              <a:defRPr sz="1700" b="0">
-                <a:solidFill>
-                  <a:srgbClr val="708097"/>
-                </a:solidFill>
-                <a:latin typeface="맑은 고딕"/>
-              </a:defRPr>
-            </a:pPr>
-            <a:r>
-              <a:t>자료 기준일 표시 · 미상과 없음 구분</a:t>
-            </a:r>
-          </a:p>
-          <a:p>
-            <a:pPr>
-              <a:spcAft>
-                <a:spcPts val="1000"/>
-              </a:spcAft>
-              <a:defRPr sz="1700" b="0">
-                <a:solidFill>
-                  <a:srgbClr val="708097"/>
-                </a:solidFill>
-                <a:latin typeface="맑은 고딕"/>
-              </a:defRPr>
-            </a:pPr>
-            <a:r>
-              <a:t>로딩 / 오류 / 재시도 상태 안내</a:t>
-            </a:r>
-          </a:p>
-        </p:txBody>
-      </p:sp>
-      <p:sp>
-        <p:nvSpPr>
-          <p:cNvPr id="15" name="Rounded Rectangle 14"/>
-          <p:cNvSpPr/>
-          <p:nvPr/>
-        </p:nvSpPr>
-        <p:spPr>
-          <a:xfrm>
-            <a:off x="502920" y="4114800"/>
-            <a:ext cx="11155680" cy="1737360"/>
-          </a:xfrm>
-          <a:prstGeom prst="roundRect">
-            <a:avLst/>
-          </a:prstGeom>
-          <a:solidFill>
-            <a:srgbClr val="20304B"/>
-          </a:solidFill>
-          <a:ln>
-            <a:noFill/>
-          </a:ln>
-        </p:spPr>
-        <p:style>
-          <a:lnRef idx="1">
-            <a:schemeClr val="accent1"/>
-          </a:lnRef>
-          <a:fillRef idx="3">
-            <a:schemeClr val="accent1"/>
-          </a:fillRef>
-          <a:effectRef idx="2">
-            <a:schemeClr val="accent1"/>
-          </a:effectRef>
-          <a:fontRef idx="minor">
-            <a:schemeClr val="lt1"/>
-          </a:fontRef>
-        </p:style>
-        <p:txBody>
-          <a:bodyPr rtlCol="0" anchor="ctr"/>
-          <a:lstStyle/>
-          <a:p>
-            <a:pPr algn="ctr"/>
-          </a:p>
-        </p:txBody>
-      </p:sp>
-      <p:sp>
-        <p:nvSpPr>
-          <p:cNvPr id="16" name="TextBox 15"/>
-          <p:cNvSpPr txBox="1"/>
-          <p:nvPr/>
-        </p:nvSpPr>
-        <p:spPr>
-          <a:xfrm>
-            <a:off x="777240" y="4343400"/>
-            <a:ext cx="1828800" cy="411480"/>
-          </a:xfrm>
-          <a:prstGeom prst="rect">
-            <a:avLst/>
-          </a:prstGeom>
-          <a:noFill/>
-        </p:spPr>
-        <p:txBody>
-          <a:bodyPr wrap="square" lIns="18288" rIns="18288" tIns="18288">
-            <a:spAutoFit/>
-          </a:bodyPr>
-          <a:lstStyle/>
-          <a:p>
-            <a:pPr>
-              <a:spcAft>
-                <a:spcPts val="1000"/>
-              </a:spcAft>
               <a:defRPr sz="2100" b="1">
                 <a:solidFill>
                   <a:srgbClr val="F0BC5E"/>
@@ -11009,7 +10264,7 @@
           <a:noFill/>
         </p:spPr>
         <p:txBody>
-          <a:bodyPr wrap="square" lIns="18288" rIns="18288" tIns="18288">
+          <a:bodyPr wrap="square" lIns="18288" tIns="18288" rIns="18288">
             <a:spAutoFit/>
           </a:bodyPr>
           <a:lstStyle/>
@@ -11376,7 +10631,7 @@
 </file>
 
 <file path=ppt/theme/theme2.xml><?xml version="1.0" encoding="utf-8"?>
-<a:theme xmlns:a="http://schemas.openxmlformats.org/drawingml/2006/main" name="Office Theme">
+<a:theme xmlns:a="http://schemas.openxmlformats.org/drawingml/2006/main" name="Office 테마">
   <a:themeElements>
     <a:clrScheme name="Office">
       <a:dk1>
@@ -11386,44 +10641,44 @@
         <a:sysClr val="window" lastClr="FFFFFF"/>
       </a:lt1>
       <a:dk2>
-        <a:srgbClr val="1F497D"/>
+        <a:srgbClr val="0E2841"/>
       </a:dk2>
       <a:lt2>
-        <a:srgbClr val="EEECE1"/>
+        <a:srgbClr val="E8E8E8"/>
       </a:lt2>
       <a:accent1>
-        <a:srgbClr val="4F81BD"/>
+        <a:srgbClr val="156082"/>
       </a:accent1>
       <a:accent2>
-        <a:srgbClr val="C0504D"/>
+        <a:srgbClr val="E97132"/>
       </a:accent2>
       <a:accent3>
-        <a:srgbClr val="9BBB59"/>
+        <a:srgbClr val="196B24"/>
       </a:accent3>
       <a:accent4>
-        <a:srgbClr val="8064A2"/>
+        <a:srgbClr val="0F9ED5"/>
       </a:accent4>
       <a:accent5>
-        <a:srgbClr val="4BACC6"/>
+        <a:srgbClr val="A02B93"/>
       </a:accent5>
       <a:accent6>
-        <a:srgbClr val="F79646"/>
+        <a:srgbClr val="4EA72E"/>
       </a:accent6>
       <a:hlink>
-        <a:srgbClr val="0000FF"/>
+        <a:srgbClr val="467886"/>
       </a:hlink>
       <a:folHlink>
-        <a:srgbClr val="800080"/>
+        <a:srgbClr val="96607D"/>
       </a:folHlink>
     </a:clrScheme>
     <a:fontScheme name="Office">
       <a:majorFont>
-        <a:latin typeface="Calibri"/>
+        <a:latin typeface="맑은 고딕" panose="02110004020202020204"/>
         <a:ea typeface=""/>
         <a:cs typeface=""/>
-        <a:font script="Jpan" typeface="ＭＳ Ｐゴシック"/>
+        <a:font script="Jpan" typeface="游ゴシック Light"/>
         <a:font script="Hang" typeface="맑은 고딕"/>
-        <a:font script="Hans" typeface="宋体"/>
+        <a:font script="Hans" typeface="等线 Light"/>
         <a:font script="Hant" typeface="新細明體"/>
         <a:font script="Arab" typeface="Times New Roman"/>
         <a:font script="Hebr" typeface="Times New Roman"/>
@@ -11451,14 +10706,31 @@
         <a:font script="Viet" typeface="Times New Roman"/>
         <a:font script="Uigh" typeface="Microsoft Uighur"/>
         <a:font script="Geor" typeface="Sylfaen"/>
+        <a:font script="Armn" typeface="Arial"/>
+        <a:font script="Bugi" typeface="Leelawadee UI"/>
+        <a:font script="Bopo" typeface="Microsoft JhengHei"/>
+        <a:font script="Java" typeface="Javanese Text"/>
+        <a:font script="Lisu" typeface="Segoe UI"/>
+        <a:font script="Mymr" typeface="Myanmar Text"/>
+        <a:font script="Nkoo" typeface="Ebrima"/>
+        <a:font script="Olck" typeface="Nirmala UI"/>
+        <a:font script="Osma" typeface="Ebrima"/>
+        <a:font script="Phag" typeface="Phagspa"/>
+        <a:font script="Syrn" typeface="Estrangelo Edessa"/>
+        <a:font script="Syrj" typeface="Estrangelo Edessa"/>
+        <a:font script="Syre" typeface="Estrangelo Edessa"/>
+        <a:font script="Sora" typeface="Nirmala UI"/>
+        <a:font script="Tale" typeface="Microsoft Tai Le"/>
+        <a:font script="Talu" typeface="Microsoft New Tai Lue"/>
+        <a:font script="Tfng" typeface="Ebrima"/>
       </a:majorFont>
       <a:minorFont>
-        <a:latin typeface="Calibri"/>
+        <a:latin typeface="맑은 고딕" panose="02110004020202020204"/>
         <a:ea typeface=""/>
         <a:cs typeface=""/>
-        <a:font script="Jpan" typeface="ＭＳ Ｐゴシック"/>
+        <a:font script="Jpan" typeface="游ゴシック"/>
         <a:font script="Hang" typeface="맑은 고딕"/>
-        <a:font script="Hans" typeface="宋体"/>
+        <a:font script="Hans" typeface="等线"/>
         <a:font script="Hant" typeface="新細明體"/>
         <a:font script="Arab" typeface="Arial"/>
         <a:font script="Hebr" typeface="Arial"/>
@@ -11486,6 +10758,23 @@
         <a:font script="Viet" typeface="Arial"/>
         <a:font script="Uigh" typeface="Microsoft Uighur"/>
         <a:font script="Geor" typeface="Sylfaen"/>
+        <a:font script="Armn" typeface="Arial"/>
+        <a:font script="Bugi" typeface="Leelawadee UI"/>
+        <a:font script="Bopo" typeface="Microsoft JhengHei"/>
+        <a:font script="Java" typeface="Javanese Text"/>
+        <a:font script="Lisu" typeface="Segoe UI"/>
+        <a:font script="Mymr" typeface="Myanmar Text"/>
+        <a:font script="Nkoo" typeface="Ebrima"/>
+        <a:font script="Olck" typeface="Nirmala UI"/>
+        <a:font script="Osma" typeface="Ebrima"/>
+        <a:font script="Phag" typeface="Phagspa"/>
+        <a:font script="Syrn" typeface="Estrangelo Edessa"/>
+        <a:font script="Syrj" typeface="Estrangelo Edessa"/>
+        <a:font script="Syre" typeface="Estrangelo Edessa"/>
+        <a:font script="Sora" typeface="Nirmala UI"/>
+        <a:font script="Tale" typeface="Microsoft Tai Le"/>
+        <a:font script="Talu" typeface="Microsoft New Tai Lue"/>
+        <a:font script="Tfng" typeface="Ebrima"/>
       </a:minorFont>
     </a:fontScheme>
     <a:fmtScheme name="Office">
@@ -11497,180 +10786,136 @@
           <a:gsLst>
             <a:gs pos="0">
               <a:schemeClr val="phClr">
-                <a:tint val="50000"/>
-                <a:satMod val="300000"/>
+                <a:lumMod val="110000"/>
+                <a:satMod val="105000"/>
+                <a:tint val="67000"/>
               </a:schemeClr>
             </a:gs>
-            <a:gs pos="35000">
+            <a:gs pos="50000">
               <a:schemeClr val="phClr">
-                <a:tint val="37000"/>
-                <a:satMod val="300000"/>
+                <a:lumMod val="105000"/>
+                <a:satMod val="103000"/>
+                <a:tint val="73000"/>
               </a:schemeClr>
             </a:gs>
             <a:gs pos="100000">
               <a:schemeClr val="phClr">
-                <a:tint val="15000"/>
-                <a:satMod val="350000"/>
+                <a:lumMod val="105000"/>
+                <a:satMod val="109000"/>
+                <a:tint val="81000"/>
               </a:schemeClr>
             </a:gs>
           </a:gsLst>
-          <a:lin ang="16200000" scaled="1"/>
+          <a:lin ang="5400000" scaled="0"/>
         </a:gradFill>
         <a:gradFill rotWithShape="1">
           <a:gsLst>
             <a:gs pos="0">
               <a:schemeClr val="phClr">
-                <a:tint val="100000"/>
+                <a:satMod val="103000"/>
+                <a:lumMod val="102000"/>
+                <a:tint val="94000"/>
+              </a:schemeClr>
+            </a:gs>
+            <a:gs pos="50000">
+              <a:schemeClr val="phClr">
+                <a:satMod val="110000"/>
+                <a:lumMod val="100000"/>
                 <a:shade val="100000"/>
-                <a:satMod val="130000"/>
               </a:schemeClr>
             </a:gs>
             <a:gs pos="100000">
               <a:schemeClr val="phClr">
-                <a:tint val="50000"/>
-                <a:shade val="100000"/>
-                <a:satMod val="350000"/>
+                <a:lumMod val="99000"/>
+                <a:satMod val="120000"/>
+                <a:shade val="78000"/>
               </a:schemeClr>
             </a:gs>
           </a:gsLst>
-          <a:lin ang="16200000" scaled="0"/>
+          <a:lin ang="5400000" scaled="0"/>
         </a:gradFill>
       </a:fillStyleLst>
       <a:lnStyleLst>
-        <a:ln w="9525" cap="flat" cmpd="sng" algn="ctr">
+        <a:ln w="12700" cap="flat" cmpd="sng" algn="ctr">
           <a:solidFill>
-            <a:schemeClr val="phClr">
-              <a:shade val="95000"/>
-              <a:satMod val="105000"/>
-            </a:schemeClr>
+            <a:schemeClr val="phClr"/>
           </a:solidFill>
           <a:prstDash val="solid"/>
+          <a:miter lim="800000"/>
+        </a:ln>
+        <a:ln w="19050" cap="flat" cmpd="sng" algn="ctr">
+          <a:solidFill>
+            <a:schemeClr val="phClr"/>
+          </a:solidFill>
+          <a:prstDash val="solid"/>
+          <a:miter lim="800000"/>
         </a:ln>
         <a:ln w="25400" cap="flat" cmpd="sng" algn="ctr">
           <a:solidFill>
             <a:schemeClr val="phClr"/>
           </a:solidFill>
           <a:prstDash val="solid"/>
-        </a:ln>
-        <a:ln w="38100" cap="flat" cmpd="sng" algn="ctr">
-          <a:solidFill>
-            <a:schemeClr val="phClr"/>
-          </a:solidFill>
-          <a:prstDash val="solid"/>
+          <a:miter lim="800000"/>
         </a:ln>
       </a:lnStyleLst>
       <a:effectStyleLst>
         <a:effectStyle>
+          <a:effectLst/>
+        </a:effectStyle>
+        <a:effectStyle>
+          <a:effectLst/>
+        </a:effectStyle>
+        <a:effectStyle>
           <a:effectLst>
-            <a:outerShdw blurRad="40000" dist="20000" dir="5400000" rotWithShape="0">
+            <a:outerShdw blurRad="57150" dist="19050" dir="5400000" algn="ctr" rotWithShape="0">
               <a:srgbClr val="000000">
-                <a:alpha val="38000"/>
+                <a:alpha val="63000"/>
               </a:srgbClr>
             </a:outerShdw>
           </a:effectLst>
-        </a:effectStyle>
-        <a:effectStyle>
-          <a:effectLst>
-            <a:outerShdw blurRad="40000" dist="23000" dir="5400000" rotWithShape="0">
-              <a:srgbClr val="000000">
-                <a:alpha val="35000"/>
-              </a:srgbClr>
-            </a:outerShdw>
-          </a:effectLst>
-        </a:effectStyle>
-        <a:effectStyle>
-          <a:effectLst>
-            <a:outerShdw blurRad="40000" dist="23000" dir="5400000" rotWithShape="0">
-              <a:srgbClr val="000000">
-                <a:alpha val="35000"/>
-              </a:srgbClr>
-            </a:outerShdw>
-          </a:effectLst>
-          <a:scene3d>
-            <a:camera prst="orthographicFront">
-              <a:rot lat="0" lon="0" rev="0"/>
-            </a:camera>
-            <a:lightRig rig="threePt" dir="t">
-              <a:rot lat="0" lon="0" rev="1200000"/>
-            </a:lightRig>
-          </a:scene3d>
-          <a:sp3d>
-            <a:bevelT w="63500" h="25400"/>
-          </a:sp3d>
         </a:effectStyle>
       </a:effectStyleLst>
       <a:bgFillStyleLst>
         <a:solidFill>
           <a:schemeClr val="phClr"/>
         </a:solidFill>
+        <a:solidFill>
+          <a:schemeClr val="phClr">
+            <a:tint val="95000"/>
+            <a:satMod val="170000"/>
+          </a:schemeClr>
+        </a:solidFill>
         <a:gradFill rotWithShape="1">
           <a:gsLst>
             <a:gs pos="0">
               <a:schemeClr val="phClr">
-                <a:tint val="40000"/>
-                <a:satMod val="350000"/>
+                <a:tint val="93000"/>
+                <a:satMod val="150000"/>
+                <a:shade val="98000"/>
+                <a:lumMod val="102000"/>
               </a:schemeClr>
             </a:gs>
-            <a:gs pos="40000">
+            <a:gs pos="50000">
               <a:schemeClr val="phClr">
-                <a:tint val="45000"/>
-                <a:shade val="99000"/>
-                <a:satMod val="350000"/>
+                <a:tint val="98000"/>
+                <a:satMod val="130000"/>
+                <a:shade val="90000"/>
+                <a:lumMod val="103000"/>
               </a:schemeClr>
             </a:gs>
             <a:gs pos="100000">
               <a:schemeClr val="phClr">
-                <a:shade val="20000"/>
-                <a:satMod val="255000"/>
+                <a:shade val="63000"/>
+                <a:satMod val="120000"/>
               </a:schemeClr>
             </a:gs>
           </a:gsLst>
-          <a:path path="circle">
-            <a:fillToRect l="50000" t="-80000" r="50000" b="180000"/>
-          </a:path>
-        </a:gradFill>
-        <a:gradFill rotWithShape="1">
-          <a:gsLst>
-            <a:gs pos="0">
-              <a:schemeClr val="phClr">
-                <a:tint val="80000"/>
-                <a:satMod val="300000"/>
-              </a:schemeClr>
-            </a:gs>
-            <a:gs pos="100000">
-              <a:schemeClr val="phClr">
-                <a:shade val="30000"/>
-                <a:satMod val="200000"/>
-              </a:schemeClr>
-            </a:gs>
-          </a:gsLst>
-          <a:path path="circle">
-            <a:fillToRect l="50000" t="50000" r="50000" b="50000"/>
-          </a:path>
+          <a:lin ang="5400000" scaled="0"/>
         </a:gradFill>
       </a:bgFillStyleLst>
     </a:fmtScheme>
   </a:themeElements>
   <a:objectDefaults>
-    <a:spDef>
-      <a:spPr/>
-      <a:bodyPr/>
-      <a:lstStyle/>
-      <a:style>
-        <a:lnRef idx="1">
-          <a:schemeClr val="accent1"/>
-        </a:lnRef>
-        <a:fillRef idx="3">
-          <a:schemeClr val="accent1"/>
-        </a:fillRef>
-        <a:effectRef idx="2">
-          <a:schemeClr val="accent1"/>
-        </a:effectRef>
-        <a:fontRef idx="minor">
-          <a:schemeClr val="lt1"/>
-        </a:fontRef>
-      </a:style>
-    </a:spDef>
     <a:lnDef>
       <a:spPr/>
       <a:bodyPr/>
@@ -11692,5 +10937,10 @@
     </a:lnDef>
   </a:objectDefaults>
   <a:extraClrSchemeLst/>
+  <a:extLst>
+    <a:ext uri="{05A4C25C-085E-4340-85A3-A5531E510DB2}">
+      <thm15:themeFamily xmlns:thm15="http://schemas.microsoft.com/office/thememl/2012/main" name="Office Theme" id="{2E142A2C-CD16-42D6-873A-C26D2A0506FA}" vid="{1BDDFF52-6CD6-40A5-AB3C-68EB2F1E4D0A}"/>
+    </a:ext>
+  </a:extLst>
 </a:theme>
 </file>